--- a/output/wordlabs-end-3day.pptx
+++ b/output/wordlabs-end-3day.pptx
@@ -4240,7 +4240,7 @@
                 <a:ea typeface="Calibri" pitchFamily="34" charset="-122"/>
                 <a:cs typeface="Calibri" pitchFamily="34" charset="-120"/>
               </a:rPr>
-              <a:t>"to finish, stop, or limit"</a:t>
+              <a:t>"to finish; the final part"</a:t>
             </a:r>
             <a:endParaRPr lang="en-US" sz="2200" dirty="0"/>
           </a:p>
@@ -4279,7 +4279,7 @@
                 <a:ea typeface="Calibri" pitchFamily="34" charset="-122"/>
                 <a:cs typeface="Calibri" pitchFamily="34" charset="-120"/>
               </a:rPr>
-              <a:t>Origin: Latin: finis</a:t>
+              <a:t>Origin: Anglo-Saxon (Old English) root</a:t>
             </a:r>
             <a:endParaRPr lang="en-US" sz="1300" dirty="0"/>
           </a:p>
@@ -5288,7 +5288,7 @@
                 <a:ea typeface="Calibri" pitchFamily="34" charset="-122"/>
                 <a:cs typeface="Calibri" pitchFamily="34" charset="-120"/>
               </a:rPr>
-              <a:t>Word Labs  •  wordlabs.app  •  Root: 'end' = to finish, stop, or limit</a:t>
+              <a:t>Word Labs  •  wordlabs.app  •  Root: 'end' = to finish; the final part</a:t>
             </a:r>
             <a:endParaRPr lang="en-US" sz="800" dirty="0"/>
           </a:p>
@@ -5622,7 +5622,7 @@
                 <a:ea typeface="Trebuchet MS" pitchFamily="34" charset="-122"/>
                 <a:cs typeface="Trebuchet MS" pitchFamily="34" charset="-120"/>
               </a:rPr>
-              <a:t>1</a:t>
+              <a:t>0</a:t>
             </a:r>
             <a:pPr algn="ctr" indent="0" marL="0">
               <a:buNone/>
@@ -5928,7 +5928,7 @@
                 <a:ea typeface="Calibri" pitchFamily="34" charset="-122"/>
                 <a:cs typeface="Calibri" pitchFamily="34" charset="-120"/>
               </a:rPr>
-              <a:t>Word Labs  •  wordlabs.app  •  Root: 'end' = to finish, stop, or limit</a:t>
+              <a:t>Word Labs  •  wordlabs.app  •  Root: 'end' = to finish; the final part</a:t>
             </a:r>
             <a:endParaRPr lang="en-US" sz="800" dirty="0"/>
           </a:p>
@@ -6040,7 +6040,7 @@
                 <a:ea typeface="Calibri" pitchFamily="34" charset="-122"/>
                 <a:cs typeface="Calibri" pitchFamily="34" charset="-120"/>
               </a:rPr>
-              <a:t>The scientist worked hard to </a:t>
+              <a:t>The film had a surprising </a:t>
             </a:r>
             <a:pPr algn="l" indent="0" marL="0">
               <a:buNone/>
@@ -6057,7 +6057,7 @@
                 <a:ea typeface="Calibri" pitchFamily="34" charset="-122"/>
                 <a:cs typeface="Calibri" pitchFamily="34" charset="-120"/>
               </a:rPr>
-              <a:t>extend</a:t>
+              <a:t>ending</a:t>
             </a:r>
             <a:pPr algn="l" indent="0" marL="0">
               <a:buNone/>
@@ -6071,7 +6071,7 @@
                 <a:ea typeface="Calibri" pitchFamily="34" charset="-122"/>
                 <a:cs typeface="Calibri" pitchFamily="34" charset="-120"/>
               </a:rPr>
-              <a:t> her research, and the </a:t>
+              <a:t>. The desert seemed to stretch on in an </a:t>
             </a:r>
             <a:pPr algn="l" indent="0" marL="0">
               <a:buNone/>
@@ -6088,7 +6088,7 @@
                 <a:ea typeface="Calibri" pitchFamily="34" charset="-122"/>
                 <a:cs typeface="Calibri" pitchFamily="34" charset="-120"/>
               </a:rPr>
-              <a:t>ending</a:t>
+              <a:t>endless</a:t>
             </a:r>
             <a:pPr algn="l" indent="0" marL="0">
               <a:buNone/>
@@ -6102,7 +6102,7 @@
                 <a:ea typeface="Calibri" pitchFamily="34" charset="-122"/>
                 <a:cs typeface="Calibri" pitchFamily="34" charset="-120"/>
               </a:rPr>
-              <a:t> of her report was very impressive.</a:t>
+              <a:t> expanse of sand.</a:t>
             </a:r>
             <a:endParaRPr lang="en-US" sz="1800" dirty="0"/>
           </a:p>
@@ -6257,7 +6257,7 @@
                 <a:ea typeface="Trebuchet MS" pitchFamily="34" charset="-122"/>
                 <a:cs typeface="Trebuchet MS" pitchFamily="34" charset="-120"/>
               </a:rPr>
-              <a:t>extend</a:t>
+              <a:t>ending</a:t>
             </a:r>
             <a:endParaRPr lang="en-US" sz="1400" dirty="0"/>
           </a:p>
@@ -6385,7 +6385,7 @@
                 <a:ea typeface="Trebuchet MS" pitchFamily="34" charset="-122"/>
                 <a:cs typeface="Trebuchet MS" pitchFamily="34" charset="-120"/>
               </a:rPr>
-              <a:t>ending</a:t>
+              <a:t>endless</a:t>
             </a:r>
             <a:endParaRPr lang="en-US" sz="1400" dirty="0"/>
           </a:p>
@@ -6716,7 +6716,7 @@
                 <a:ea typeface="Calibri" pitchFamily="34" charset="-122"/>
                 <a:cs typeface="Calibri" pitchFamily="34" charset="-120"/>
               </a:rPr>
-              <a:t>Word Labs  •  wordlabs.app  •  Root: 'end' = to finish, stop, or limit</a:t>
+              <a:t>Word Labs  •  wordlabs.app  •  Root: 'end' = to finish; the final part</a:t>
             </a:r>
             <a:endParaRPr lang="en-US" sz="800" dirty="0"/>
           </a:p>
@@ -6855,7 +6855,7 @@
                 <a:ea typeface="Trebuchet MS" pitchFamily="34" charset="-122"/>
                 <a:cs typeface="Trebuchet MS" pitchFamily="34" charset="-120"/>
               </a:rPr>
-              <a:t>extend</a:t>
+              <a:t>ending</a:t>
             </a:r>
             <a:endParaRPr lang="en-US" sz="2800" dirty="0"/>
           </a:p>
@@ -7543,7 +7543,7 @@
                 <a:ea typeface="Calibri" pitchFamily="34" charset="-122"/>
                 <a:cs typeface="Calibri" pitchFamily="34" charset="-120"/>
               </a:rPr>
-              <a:t>Word Labs  •  wordlabs.app  •  Root: 'end' = to finish, stop, or limit</a:t>
+              <a:t>Word Labs  •  wordlabs.app  •  Root: 'end' = to finish; the final part</a:t>
             </a:r>
             <a:endParaRPr lang="en-US" sz="800" dirty="0"/>
           </a:p>
@@ -7682,7 +7682,7 @@
                 <a:ea typeface="Trebuchet MS" pitchFamily="34" charset="-122"/>
                 <a:cs typeface="Trebuchet MS" pitchFamily="34" charset="-120"/>
               </a:rPr>
-              <a:t>extend</a:t>
+              <a:t>ending</a:t>
             </a:r>
             <a:endParaRPr lang="en-US" sz="2800" dirty="0"/>
           </a:p>
@@ -7771,11 +7771,11 @@
             </a:avLst>
           </a:prstGeom>
           <a:solidFill>
-            <a:srgbClr val="DDD6FE"/>
+            <a:srgbClr val="CCFBF1"/>
           </a:solidFill>
           <a:ln w="19050">
             <a:solidFill>
-              <a:srgbClr val="7C3AED"/>
+              <a:srgbClr val="0D9488"/>
             </a:solidFill>
             <a:prstDash val="solid"/>
           </a:ln>
@@ -7815,13 +7815,13 @@
             <a:r>
               <a:rPr lang="en-US" sz="1300" b="1" dirty="0">
                 <a:solidFill>
-                  <a:srgbClr val="4C1D95"/>
+                  <a:srgbClr val="0F766E"/>
                 </a:solidFill>
                 <a:latin typeface="Trebuchet MS" pitchFamily="34" charset="0"/>
                 <a:ea typeface="Trebuchet MS" pitchFamily="34" charset="-122"/>
                 <a:cs typeface="Trebuchet MS" pitchFamily="34" charset="-120"/>
               </a:rPr>
-              <a:t>ex</a:t>
+              <a:t>end</a:t>
             </a:r>
             <a:endParaRPr lang="en-US" sz="1300" dirty="0"/>
           </a:p>
@@ -7860,7 +7860,7 @@
                 <a:ea typeface="Calibri" pitchFamily="34" charset="-122"/>
                 <a:cs typeface="Calibri" pitchFamily="34" charset="-120"/>
               </a:rPr>
-              <a:t>out, beyond</a:t>
+              <a:t>to finish; the final part</a:t>
             </a:r>
             <a:endParaRPr lang="en-US" sz="850" dirty="0"/>
           </a:p>
@@ -7883,11 +7883,11 @@
             </a:avLst>
           </a:prstGeom>
           <a:solidFill>
-            <a:srgbClr val="CCFBF1"/>
+            <a:srgbClr val="FCE7F3"/>
           </a:solidFill>
           <a:ln w="19050">
             <a:solidFill>
-              <a:srgbClr val="0D9488"/>
+              <a:srgbClr val="DB2777"/>
             </a:solidFill>
             <a:prstDash val="solid"/>
           </a:ln>
@@ -7927,13 +7927,13 @@
             <a:r>
               <a:rPr lang="en-US" sz="1300" b="1" dirty="0">
                 <a:solidFill>
-                  <a:srgbClr val="0F766E"/>
+                  <a:srgbClr val="9D174D"/>
                 </a:solidFill>
                 <a:latin typeface="Trebuchet MS" pitchFamily="34" charset="0"/>
                 <a:ea typeface="Trebuchet MS" pitchFamily="34" charset="-122"/>
                 <a:cs typeface="Trebuchet MS" pitchFamily="34" charset="-120"/>
               </a:rPr>
-              <a:t>end</a:t>
+              <a:t>ing</a:t>
             </a:r>
             <a:endParaRPr lang="en-US" sz="1300" dirty="0"/>
           </a:p>
@@ -7972,7 +7972,7 @@
                 <a:ea typeface="Calibri" pitchFamily="34" charset="-122"/>
                 <a:cs typeface="Calibri" pitchFamily="34" charset="-120"/>
               </a:rPr>
-              <a:t>to finish or limit</a:t>
+              <a:t>happening now</a:t>
             </a:r>
             <a:endParaRPr lang="en-US" sz="850" dirty="0"/>
           </a:p>
@@ -8528,7 +8528,7 @@
                 <a:ea typeface="Calibri" pitchFamily="34" charset="-122"/>
                 <a:cs typeface="Calibri" pitchFamily="34" charset="-120"/>
               </a:rPr>
-              <a:t>Word Labs  •  wordlabs.app  •  Root: 'end' = to finish, stop, or limit</a:t>
+              <a:t>Word Labs  •  wordlabs.app  •  Root: 'end' = to finish; the final part</a:t>
             </a:r>
             <a:endParaRPr lang="en-US" sz="800" dirty="0"/>
           </a:p>
@@ -8667,7 +8667,7 @@
                 <a:ea typeface="Trebuchet MS" pitchFamily="34" charset="-122"/>
                 <a:cs typeface="Trebuchet MS" pitchFamily="34" charset="-120"/>
               </a:rPr>
-              <a:t>extend</a:t>
+              <a:t>ending</a:t>
             </a:r>
             <a:endParaRPr lang="en-US" sz="2800" dirty="0"/>
           </a:p>
@@ -8756,11 +8756,11 @@
             </a:avLst>
           </a:prstGeom>
           <a:solidFill>
-            <a:srgbClr val="DDD6FE"/>
+            <a:srgbClr val="CCFBF1"/>
           </a:solidFill>
           <a:ln w="19050">
             <a:solidFill>
-              <a:srgbClr val="7C3AED"/>
+              <a:srgbClr val="0D9488"/>
             </a:solidFill>
             <a:prstDash val="solid"/>
           </a:ln>
@@ -8800,13 +8800,13 @@
             <a:r>
               <a:rPr lang="en-US" sz="1300" b="1" dirty="0">
                 <a:solidFill>
-                  <a:srgbClr val="4C1D95"/>
+                  <a:srgbClr val="0F766E"/>
                 </a:solidFill>
                 <a:latin typeface="Trebuchet MS" pitchFamily="34" charset="0"/>
                 <a:ea typeface="Trebuchet MS" pitchFamily="34" charset="-122"/>
                 <a:cs typeface="Trebuchet MS" pitchFamily="34" charset="-120"/>
               </a:rPr>
-              <a:t>ex</a:t>
+              <a:t>end</a:t>
             </a:r>
             <a:endParaRPr lang="en-US" sz="1300" dirty="0"/>
           </a:p>
@@ -8845,7 +8845,7 @@
                 <a:ea typeface="Calibri" pitchFamily="34" charset="-122"/>
                 <a:cs typeface="Calibri" pitchFamily="34" charset="-120"/>
               </a:rPr>
-              <a:t>out, beyond</a:t>
+              <a:t>to finish; the final part</a:t>
             </a:r>
             <a:endParaRPr lang="en-US" sz="850" dirty="0"/>
           </a:p>
@@ -8868,11 +8868,11 @@
             </a:avLst>
           </a:prstGeom>
           <a:solidFill>
-            <a:srgbClr val="CCFBF1"/>
+            <a:srgbClr val="FCE7F3"/>
           </a:solidFill>
           <a:ln w="19050">
             <a:solidFill>
-              <a:srgbClr val="0D9488"/>
+              <a:srgbClr val="DB2777"/>
             </a:solidFill>
             <a:prstDash val="solid"/>
           </a:ln>
@@ -8912,13 +8912,13 @@
             <a:r>
               <a:rPr lang="en-US" sz="1300" b="1" dirty="0">
                 <a:solidFill>
-                  <a:srgbClr val="0F766E"/>
+                  <a:srgbClr val="9D174D"/>
                 </a:solidFill>
                 <a:latin typeface="Trebuchet MS" pitchFamily="34" charset="0"/>
                 <a:ea typeface="Trebuchet MS" pitchFamily="34" charset="-122"/>
                 <a:cs typeface="Trebuchet MS" pitchFamily="34" charset="-120"/>
               </a:rPr>
-              <a:t>end</a:t>
+              <a:t>ing</a:t>
             </a:r>
             <a:endParaRPr lang="en-US" sz="1300" dirty="0"/>
           </a:p>
@@ -8957,7 +8957,7 @@
                 <a:ea typeface="Calibri" pitchFamily="34" charset="-122"/>
                 <a:cs typeface="Calibri" pitchFamily="34" charset="-120"/>
               </a:rPr>
-              <a:t>to finish or limit</a:t>
+              <a:t>happening now</a:t>
             </a:r>
             <a:endParaRPr lang="en-US" sz="850" dirty="0"/>
           </a:p>
@@ -9116,7 +9116,7 @@
                 <a:ea typeface="Trebuchet MS" pitchFamily="34" charset="-122"/>
                 <a:cs typeface="Trebuchet MS" pitchFamily="34" charset="-120"/>
               </a:rPr>
-              <a:t>ex</a:t>
+              <a:t>end</a:t>
             </a:r>
             <a:endParaRPr lang="en-US" sz="1400" dirty="0"/>
           </a:p>
@@ -9221,7 +9221,7 @@
                 <a:ea typeface="Trebuchet MS" pitchFamily="34" charset="-122"/>
                 <a:cs typeface="Trebuchet MS" pitchFamily="34" charset="-120"/>
               </a:rPr>
-              <a:t>tend</a:t>
+              <a:t>ing</a:t>
             </a:r>
             <a:endParaRPr lang="en-US" sz="1400" dirty="0"/>
           </a:p>
@@ -9645,7 +9645,7 @@
                 <a:ea typeface="Calibri" pitchFamily="34" charset="-122"/>
                 <a:cs typeface="Calibri" pitchFamily="34" charset="-120"/>
               </a:rPr>
-              <a:t>Word Labs  •  wordlabs.app  •  Root: 'end' = to finish, stop, or limit</a:t>
+              <a:t>Word Labs  •  wordlabs.app  •  Root: 'end' = to finish; the final part</a:t>
             </a:r>
             <a:endParaRPr lang="en-US" sz="800" dirty="0"/>
           </a:p>
@@ -9784,7 +9784,7 @@
                 <a:ea typeface="Trebuchet MS" pitchFamily="34" charset="-122"/>
                 <a:cs typeface="Trebuchet MS" pitchFamily="34" charset="-120"/>
               </a:rPr>
-              <a:t>extend</a:t>
+              <a:t>ending</a:t>
             </a:r>
             <a:endParaRPr lang="en-US" sz="2800" dirty="0"/>
           </a:p>
@@ -9873,11 +9873,11 @@
             </a:avLst>
           </a:prstGeom>
           <a:solidFill>
-            <a:srgbClr val="DDD6FE"/>
+            <a:srgbClr val="CCFBF1"/>
           </a:solidFill>
           <a:ln w="19050">
             <a:solidFill>
-              <a:srgbClr val="7C3AED"/>
+              <a:srgbClr val="0D9488"/>
             </a:solidFill>
             <a:prstDash val="solid"/>
           </a:ln>
@@ -9917,13 +9917,13 @@
             <a:r>
               <a:rPr lang="en-US" sz="1300" b="1" dirty="0">
                 <a:solidFill>
-                  <a:srgbClr val="4C1D95"/>
+                  <a:srgbClr val="0F766E"/>
                 </a:solidFill>
                 <a:latin typeface="Trebuchet MS" pitchFamily="34" charset="0"/>
                 <a:ea typeface="Trebuchet MS" pitchFamily="34" charset="-122"/>
                 <a:cs typeface="Trebuchet MS" pitchFamily="34" charset="-120"/>
               </a:rPr>
-              <a:t>ex</a:t>
+              <a:t>end</a:t>
             </a:r>
             <a:endParaRPr lang="en-US" sz="1300" dirty="0"/>
           </a:p>
@@ -9962,7 +9962,7 @@
                 <a:ea typeface="Calibri" pitchFamily="34" charset="-122"/>
                 <a:cs typeface="Calibri" pitchFamily="34" charset="-120"/>
               </a:rPr>
-              <a:t>out, beyond</a:t>
+              <a:t>to finish; the final part</a:t>
             </a:r>
             <a:endParaRPr lang="en-US" sz="850" dirty="0"/>
           </a:p>
@@ -9985,11 +9985,11 @@
             </a:avLst>
           </a:prstGeom>
           <a:solidFill>
-            <a:srgbClr val="CCFBF1"/>
+            <a:srgbClr val="FCE7F3"/>
           </a:solidFill>
           <a:ln w="19050">
             <a:solidFill>
-              <a:srgbClr val="0D9488"/>
+              <a:srgbClr val="DB2777"/>
             </a:solidFill>
             <a:prstDash val="solid"/>
           </a:ln>
@@ -10029,13 +10029,13 @@
             <a:r>
               <a:rPr lang="en-US" sz="1300" b="1" dirty="0">
                 <a:solidFill>
-                  <a:srgbClr val="0F766E"/>
+                  <a:srgbClr val="9D174D"/>
                 </a:solidFill>
                 <a:latin typeface="Trebuchet MS" pitchFamily="34" charset="0"/>
                 <a:ea typeface="Trebuchet MS" pitchFamily="34" charset="-122"/>
                 <a:cs typeface="Trebuchet MS" pitchFamily="34" charset="-120"/>
               </a:rPr>
-              <a:t>end</a:t>
+              <a:t>ing</a:t>
             </a:r>
             <a:endParaRPr lang="en-US" sz="1300" dirty="0"/>
           </a:p>
@@ -10074,7 +10074,7 @@
                 <a:ea typeface="Calibri" pitchFamily="34" charset="-122"/>
                 <a:cs typeface="Calibri" pitchFamily="34" charset="-120"/>
               </a:rPr>
-              <a:t>to finish or limit</a:t>
+              <a:t>happening now</a:t>
             </a:r>
             <a:endParaRPr lang="en-US" sz="850" dirty="0"/>
           </a:p>
@@ -10233,7 +10233,7 @@
                 <a:ea typeface="Trebuchet MS" pitchFamily="34" charset="-122"/>
                 <a:cs typeface="Trebuchet MS" pitchFamily="34" charset="-120"/>
               </a:rPr>
-              <a:t>ex</a:t>
+              <a:t>end</a:t>
             </a:r>
             <a:endParaRPr lang="en-US" sz="1400" dirty="0"/>
           </a:p>
@@ -10338,7 +10338,7 @@
                 <a:ea typeface="Trebuchet MS" pitchFamily="34" charset="-122"/>
                 <a:cs typeface="Trebuchet MS" pitchFamily="34" charset="-120"/>
               </a:rPr>
-              <a:t>tend</a:t>
+              <a:t>ing</a:t>
             </a:r>
             <a:endParaRPr lang="en-US" sz="1400" dirty="0"/>
           </a:p>
@@ -10445,7 +10445,7 @@
         </p:nvSpPr>
         <p:spPr>
           <a:xfrm>
-            <a:off x="2254649" y="4169664"/>
+            <a:off x="2427732" y="4169664"/>
             <a:ext cx="685800" cy="475488"/>
           </a:xfrm>
           <a:prstGeom prst="rect">
@@ -10472,7 +10472,7 @@
         </p:nvSpPr>
         <p:spPr>
           <a:xfrm>
-            <a:off x="2254649" y="4169664"/>
+            <a:off x="2427732" y="4169664"/>
             <a:ext cx="685800" cy="475488"/>
           </a:xfrm>
           <a:prstGeom prst="rect">
@@ -10511,7 +10511,7 @@
         </p:nvSpPr>
         <p:spPr>
           <a:xfrm>
-            <a:off x="3293146" y="4169664"/>
+            <a:off x="3639312" y="4169664"/>
             <a:ext cx="685800" cy="475488"/>
           </a:xfrm>
           <a:prstGeom prst="rect">
@@ -10538,7 +10538,7 @@
         </p:nvSpPr>
         <p:spPr>
           <a:xfrm>
-            <a:off x="3293146" y="4169664"/>
+            <a:off x="3639312" y="4169664"/>
             <a:ext cx="685800" cy="475488"/>
           </a:xfrm>
           <a:prstGeom prst="rect">
@@ -10563,7 +10563,7 @@
                 <a:ea typeface="Trebuchet MS" pitchFamily="34" charset="-122"/>
                 <a:cs typeface="Trebuchet MS" pitchFamily="34" charset="-120"/>
               </a:rPr>
-              <a:t>x</a:t>
+              <a:t>n</a:t>
             </a:r>
             <a:endParaRPr lang="en-US" sz="900" dirty="0"/>
           </a:p>
@@ -10577,7 +10577,7 @@
         </p:nvSpPr>
         <p:spPr>
           <a:xfrm>
-            <a:off x="4331643" y="4169664"/>
+            <a:off x="4850892" y="4169664"/>
             <a:ext cx="685800" cy="475488"/>
           </a:xfrm>
           <a:prstGeom prst="rect">
@@ -10604,7 +10604,7 @@
         </p:nvSpPr>
         <p:spPr>
           <a:xfrm>
-            <a:off x="4331643" y="4169664"/>
+            <a:off x="4850892" y="4169664"/>
             <a:ext cx="685800" cy="475488"/>
           </a:xfrm>
           <a:prstGeom prst="rect">
@@ -10629,7 +10629,7 @@
                 <a:ea typeface="Trebuchet MS" pitchFamily="34" charset="-122"/>
                 <a:cs typeface="Trebuchet MS" pitchFamily="34" charset="-120"/>
               </a:rPr>
-              <a:t>t</a:t>
+              <a:t>d</a:t>
             </a:r>
             <a:endParaRPr lang="en-US" sz="900" dirty="0"/>
           </a:p>
@@ -10643,7 +10643,7 @@
         </p:nvSpPr>
         <p:spPr>
           <a:xfrm>
-            <a:off x="5370141" y="4169664"/>
+            <a:off x="6062472" y="4169664"/>
             <a:ext cx="685800" cy="475488"/>
           </a:xfrm>
           <a:prstGeom prst="rect">
@@ -10670,7 +10670,7 @@
         </p:nvSpPr>
         <p:spPr>
           <a:xfrm>
-            <a:off x="5370141" y="4169664"/>
+            <a:off x="6062472" y="4169664"/>
             <a:ext cx="685800" cy="475488"/>
           </a:xfrm>
           <a:prstGeom prst="rect">
@@ -10695,7 +10695,7 @@
                 <a:ea typeface="Trebuchet MS" pitchFamily="34" charset="-122"/>
                 <a:cs typeface="Trebuchet MS" pitchFamily="34" charset="-120"/>
               </a:rPr>
-              <a:t>e</a:t>
+              <a:t>i</a:t>
             </a:r>
             <a:endParaRPr lang="en-US" sz="900" dirty="0"/>
           </a:p>
@@ -10709,7 +10709,7 @@
         </p:nvSpPr>
         <p:spPr>
           <a:xfrm>
-            <a:off x="6408638" y="4169664"/>
+            <a:off x="7274052" y="4169664"/>
             <a:ext cx="685800" cy="475488"/>
           </a:xfrm>
           <a:prstGeom prst="rect">
@@ -10736,7 +10736,7 @@
         </p:nvSpPr>
         <p:spPr>
           <a:xfrm>
-            <a:off x="6408638" y="4169664"/>
+            <a:off x="7274052" y="4169664"/>
             <a:ext cx="685800" cy="475488"/>
           </a:xfrm>
           <a:prstGeom prst="rect">
@@ -10761,73 +10761,7 @@
                 <a:ea typeface="Trebuchet MS" pitchFamily="34" charset="-122"/>
                 <a:cs typeface="Trebuchet MS" pitchFamily="34" charset="-120"/>
               </a:rPr>
-              <a:t>n</a:t>
-            </a:r>
-            <a:endParaRPr lang="en-US" sz="900" dirty="0"/>
-          </a:p>
-        </p:txBody>
-      </p:sp>
-      <p:sp>
-        <p:nvSpPr>
-          <p:cNvPr id="43" name="Shape 41"/>
-          <p:cNvSpPr/>
-          <p:nvPr/>
-        </p:nvSpPr>
-        <p:spPr>
-          <a:xfrm>
-            <a:off x="7447135" y="4169664"/>
-            <a:ext cx="685800" cy="475488"/>
-          </a:xfrm>
-          <a:prstGeom prst="rect">
-            <a:avLst>
-              <a:gd name="adj" fmla="val 7692"/>
-            </a:avLst>
-          </a:prstGeom>
-          <a:solidFill>
-            <a:srgbClr val="FFFFFF"/>
-          </a:solidFill>
-          <a:ln w="12700">
-            <a:solidFill>
-              <a:srgbClr val="DB2777"/>
-            </a:solidFill>
-            <a:prstDash val="solid"/>
-          </a:ln>
-        </p:spPr>
-      </p:sp>
-      <p:sp>
-        <p:nvSpPr>
-          <p:cNvPr id="44" name="Text 42"/>
-          <p:cNvSpPr/>
-          <p:nvPr/>
-        </p:nvSpPr>
-        <p:spPr>
-          <a:xfrm>
-            <a:off x="7447135" y="4169664"/>
-            <a:ext cx="685800" cy="475488"/>
-          </a:xfrm>
-          <a:prstGeom prst="rect">
-            <a:avLst/>
-          </a:prstGeom>
-          <a:noFill/>
-          <a:ln/>
-        </p:spPr>
-        <p:txBody>
-          <a:bodyPr wrap="square" lIns="0" tIns="0" rIns="0" bIns="0" rtlCol="0" anchor="ctr"/>
-          <a:lstStyle/>
-          <a:p>
-            <a:pPr algn="ctr" indent="0" marL="0">
-              <a:buNone/>
-            </a:pPr>
-            <a:r>
-              <a:rPr lang="en-US" sz="900" b="1" dirty="0">
-                <a:solidFill>
-                  <a:srgbClr val="9D174D"/>
-                </a:solidFill>
-                <a:latin typeface="Trebuchet MS" pitchFamily="34" charset="0"/>
-                <a:ea typeface="Trebuchet MS" pitchFamily="34" charset="-122"/>
-                <a:cs typeface="Trebuchet MS" pitchFamily="34" charset="-120"/>
-              </a:rPr>
-              <a:t>d</a:t>
+              <a:t>ng</a:t>
             </a:r>
             <a:endParaRPr lang="en-US" sz="900" dirty="0"/>
           </a:p>
@@ -11119,7 +11053,7 @@
                 <a:ea typeface="Calibri" pitchFamily="34" charset="-122"/>
                 <a:cs typeface="Calibri" pitchFamily="34" charset="-120"/>
               </a:rPr>
-              <a:t>Word Labs  •  wordlabs.app  •  Root: 'end' = to finish, stop, or limit</a:t>
+              <a:t>Word Labs  •  wordlabs.app  •  Root: 'end' = to finish; the final part</a:t>
             </a:r>
             <a:endParaRPr lang="en-US" sz="800" dirty="0"/>
           </a:p>
@@ -11258,7 +11192,7 @@
                 <a:ea typeface="Trebuchet MS" pitchFamily="34" charset="-122"/>
                 <a:cs typeface="Trebuchet MS" pitchFamily="34" charset="-120"/>
               </a:rPr>
-              <a:t>ending</a:t>
+              <a:t>endless</a:t>
             </a:r>
             <a:endParaRPr lang="en-US" sz="2800" dirty="0"/>
           </a:p>
@@ -11946,7 +11880,7 @@
                 <a:ea typeface="Calibri" pitchFamily="34" charset="-122"/>
                 <a:cs typeface="Calibri" pitchFamily="34" charset="-120"/>
               </a:rPr>
-              <a:t>Word Labs  •  wordlabs.app  •  Root: 'end' = to finish, stop, or limit</a:t>
+              <a:t>Word Labs  •  wordlabs.app  •  Root: 'end' = to finish; the final part</a:t>
             </a:r>
             <a:endParaRPr lang="en-US" sz="800" dirty="0"/>
           </a:p>
@@ -12085,7 +12019,7 @@
                 <a:ea typeface="Trebuchet MS" pitchFamily="34" charset="-122"/>
                 <a:cs typeface="Trebuchet MS" pitchFamily="34" charset="-120"/>
               </a:rPr>
-              <a:t>ending</a:t>
+              <a:t>endless</a:t>
             </a:r>
             <a:endParaRPr lang="en-US" sz="2800" dirty="0"/>
           </a:p>
@@ -12263,7 +12197,7 @@
                 <a:ea typeface="Calibri" pitchFamily="34" charset="-122"/>
                 <a:cs typeface="Calibri" pitchFamily="34" charset="-120"/>
               </a:rPr>
-              <a:t>to finish or limit</a:t>
+              <a:t>to finish; the final part</a:t>
             </a:r>
             <a:endParaRPr lang="en-US" sz="850" dirty="0"/>
           </a:p>
@@ -12286,11 +12220,11 @@
             </a:avLst>
           </a:prstGeom>
           <a:solidFill>
-            <a:srgbClr val="FCE7F3"/>
+            <a:srgbClr val="DDD6FE"/>
           </a:solidFill>
           <a:ln w="19050">
             <a:solidFill>
-              <a:srgbClr val="DB2777"/>
+              <a:srgbClr val="7C3AED"/>
             </a:solidFill>
             <a:prstDash val="solid"/>
           </a:ln>
@@ -12330,13 +12264,13 @@
             <a:r>
               <a:rPr lang="en-US" sz="1300" b="1" dirty="0">
                 <a:solidFill>
-                  <a:srgbClr val="9D174D"/>
+                  <a:srgbClr val="4C1D95"/>
                 </a:solidFill>
                 <a:latin typeface="Trebuchet MS" pitchFamily="34" charset="0"/>
                 <a:ea typeface="Trebuchet MS" pitchFamily="34" charset="-122"/>
                 <a:cs typeface="Trebuchet MS" pitchFamily="34" charset="-120"/>
               </a:rPr>
-              <a:t>ing</a:t>
+              <a:t>less</a:t>
             </a:r>
             <a:endParaRPr lang="en-US" sz="1300" dirty="0"/>
           </a:p>
@@ -12375,7 +12309,7 @@
                 <a:ea typeface="Calibri" pitchFamily="34" charset="-122"/>
                 <a:cs typeface="Calibri" pitchFamily="34" charset="-120"/>
               </a:rPr>
-              <a:t>action happening now</a:t>
+              <a:t>without</a:t>
             </a:r>
             <a:endParaRPr lang="en-US" sz="850" dirty="0"/>
           </a:p>
@@ -12931,7 +12865,7 @@
                 <a:ea typeface="Calibri" pitchFamily="34" charset="-122"/>
                 <a:cs typeface="Calibri" pitchFamily="34" charset="-120"/>
               </a:rPr>
-              <a:t>Word Labs  •  wordlabs.app  •  Root: 'end' = to finish, stop, or limit</a:t>
+              <a:t>Word Labs  •  wordlabs.app  •  Root: 'end' = to finish; the final part</a:t>
             </a:r>
             <a:endParaRPr lang="en-US" sz="800" dirty="0"/>
           </a:p>
@@ -13070,7 +13004,7 @@
                 <a:ea typeface="Trebuchet MS" pitchFamily="34" charset="-122"/>
                 <a:cs typeface="Trebuchet MS" pitchFamily="34" charset="-120"/>
               </a:rPr>
-              <a:t>ending</a:t>
+              <a:t>endless</a:t>
             </a:r>
             <a:endParaRPr lang="en-US" sz="2800" dirty="0"/>
           </a:p>
@@ -13248,7 +13182,7 @@
                 <a:ea typeface="Calibri" pitchFamily="34" charset="-122"/>
                 <a:cs typeface="Calibri" pitchFamily="34" charset="-120"/>
               </a:rPr>
-              <a:t>to finish or limit</a:t>
+              <a:t>to finish; the final part</a:t>
             </a:r>
             <a:endParaRPr lang="en-US" sz="850" dirty="0"/>
           </a:p>
@@ -13271,11 +13205,11 @@
             </a:avLst>
           </a:prstGeom>
           <a:solidFill>
-            <a:srgbClr val="FCE7F3"/>
+            <a:srgbClr val="DDD6FE"/>
           </a:solidFill>
           <a:ln w="19050">
             <a:solidFill>
-              <a:srgbClr val="DB2777"/>
+              <a:srgbClr val="7C3AED"/>
             </a:solidFill>
             <a:prstDash val="solid"/>
           </a:ln>
@@ -13315,13 +13249,13 @@
             <a:r>
               <a:rPr lang="en-US" sz="1300" b="1" dirty="0">
                 <a:solidFill>
-                  <a:srgbClr val="9D174D"/>
+                  <a:srgbClr val="4C1D95"/>
                 </a:solidFill>
                 <a:latin typeface="Trebuchet MS" pitchFamily="34" charset="0"/>
                 <a:ea typeface="Trebuchet MS" pitchFamily="34" charset="-122"/>
                 <a:cs typeface="Trebuchet MS" pitchFamily="34" charset="-120"/>
               </a:rPr>
-              <a:t>ing</a:t>
+              <a:t>less</a:t>
             </a:r>
             <a:endParaRPr lang="en-US" sz="1300" dirty="0"/>
           </a:p>
@@ -13360,7 +13294,7 @@
                 <a:ea typeface="Calibri" pitchFamily="34" charset="-122"/>
                 <a:cs typeface="Calibri" pitchFamily="34" charset="-120"/>
               </a:rPr>
-              <a:t>action happening now</a:t>
+              <a:t>without</a:t>
             </a:r>
             <a:endParaRPr lang="en-US" sz="850" dirty="0"/>
           </a:p>
@@ -13624,7 +13558,7 @@
                 <a:ea typeface="Trebuchet MS" pitchFamily="34" charset="-122"/>
                 <a:cs typeface="Trebuchet MS" pitchFamily="34" charset="-120"/>
               </a:rPr>
-              <a:t>ing</a:t>
+              <a:t>less</a:t>
             </a:r>
             <a:endParaRPr lang="en-US" sz="1400" dirty="0"/>
           </a:p>
@@ -13957,7 +13891,7 @@
                 <a:ea typeface="Calibri" pitchFamily="34" charset="-122"/>
                 <a:cs typeface="Calibri" pitchFamily="34" charset="-120"/>
               </a:rPr>
-              <a:t>Root 'end' — to finish, stop, or limit</a:t>
+              <a:t>Root 'end' — to finish; the final part</a:t>
             </a:r>
             <a:endParaRPr lang="en-US" sz="1600" dirty="0"/>
           </a:p>
@@ -14313,7 +14247,7 @@
                 <a:ea typeface="Calibri" pitchFamily="34" charset="-122"/>
                 <a:cs typeface="Calibri" pitchFamily="34" charset="-120"/>
               </a:rPr>
-              <a:t>Word Labs  •  wordlabs.app  •  Root: 'end' = to finish, stop, or limit</a:t>
+              <a:t>Word Labs  •  wordlabs.app  •  Root: 'end' = to finish; the final part</a:t>
             </a:r>
             <a:endParaRPr lang="en-US" sz="800" dirty="0"/>
           </a:p>
@@ -14452,7 +14386,7 @@
                 <a:ea typeface="Trebuchet MS" pitchFamily="34" charset="-122"/>
                 <a:cs typeface="Trebuchet MS" pitchFamily="34" charset="-120"/>
               </a:rPr>
-              <a:t>ending</a:t>
+              <a:t>endless</a:t>
             </a:r>
             <a:endParaRPr lang="en-US" sz="2800" dirty="0"/>
           </a:p>
@@ -14630,7 +14564,7 @@
                 <a:ea typeface="Calibri" pitchFamily="34" charset="-122"/>
                 <a:cs typeface="Calibri" pitchFamily="34" charset="-120"/>
               </a:rPr>
-              <a:t>to finish or limit</a:t>
+              <a:t>to finish; the final part</a:t>
             </a:r>
             <a:endParaRPr lang="en-US" sz="850" dirty="0"/>
           </a:p>
@@ -14653,11 +14587,11 @@
             </a:avLst>
           </a:prstGeom>
           <a:solidFill>
-            <a:srgbClr val="FCE7F3"/>
+            <a:srgbClr val="DDD6FE"/>
           </a:solidFill>
           <a:ln w="19050">
             <a:solidFill>
-              <a:srgbClr val="DB2777"/>
+              <a:srgbClr val="7C3AED"/>
             </a:solidFill>
             <a:prstDash val="solid"/>
           </a:ln>
@@ -14697,13 +14631,13 @@
             <a:r>
               <a:rPr lang="en-US" sz="1300" b="1" dirty="0">
                 <a:solidFill>
-                  <a:srgbClr val="9D174D"/>
+                  <a:srgbClr val="4C1D95"/>
                 </a:solidFill>
                 <a:latin typeface="Trebuchet MS" pitchFamily="34" charset="0"/>
                 <a:ea typeface="Trebuchet MS" pitchFamily="34" charset="-122"/>
                 <a:cs typeface="Trebuchet MS" pitchFamily="34" charset="-120"/>
               </a:rPr>
-              <a:t>ing</a:t>
+              <a:t>less</a:t>
             </a:r>
             <a:endParaRPr lang="en-US" sz="1300" dirty="0"/>
           </a:p>
@@ -14742,7 +14676,7 @@
                 <a:ea typeface="Calibri" pitchFamily="34" charset="-122"/>
                 <a:cs typeface="Calibri" pitchFamily="34" charset="-120"/>
               </a:rPr>
-              <a:t>action happening now</a:t>
+              <a:t>without</a:t>
             </a:r>
             <a:endParaRPr lang="en-US" sz="850" dirty="0"/>
           </a:p>
@@ -15006,7 +14940,7 @@
                 <a:ea typeface="Trebuchet MS" pitchFamily="34" charset="-122"/>
                 <a:cs typeface="Trebuchet MS" pitchFamily="34" charset="-120"/>
               </a:rPr>
-              <a:t>ing</a:t>
+              <a:t>less</a:t>
             </a:r>
             <a:endParaRPr lang="en-US" sz="1400" dirty="0"/>
           </a:p>
@@ -15113,7 +15047,7 @@
         </p:nvSpPr>
         <p:spPr>
           <a:xfrm>
-            <a:off x="2427732" y="4169664"/>
+            <a:off x="2254649" y="4169664"/>
             <a:ext cx="685800" cy="475488"/>
           </a:xfrm>
           <a:prstGeom prst="rect">
@@ -15140,7 +15074,7 @@
         </p:nvSpPr>
         <p:spPr>
           <a:xfrm>
-            <a:off x="2427732" y="4169664"/>
+            <a:off x="2254649" y="4169664"/>
             <a:ext cx="685800" cy="475488"/>
           </a:xfrm>
           <a:prstGeom prst="rect">
@@ -15179,7 +15113,7 @@
         </p:nvSpPr>
         <p:spPr>
           <a:xfrm>
-            <a:off x="3639312" y="4169664"/>
+            <a:off x="3293146" y="4169664"/>
             <a:ext cx="685800" cy="475488"/>
           </a:xfrm>
           <a:prstGeom prst="rect">
@@ -15206,7 +15140,7 @@
         </p:nvSpPr>
         <p:spPr>
           <a:xfrm>
-            <a:off x="3639312" y="4169664"/>
+            <a:off x="3293146" y="4169664"/>
             <a:ext cx="685800" cy="475488"/>
           </a:xfrm>
           <a:prstGeom prst="rect">
@@ -15245,7 +15179,7 @@
         </p:nvSpPr>
         <p:spPr>
           <a:xfrm>
-            <a:off x="4850892" y="4169664"/>
+            <a:off x="4331643" y="4169664"/>
             <a:ext cx="685800" cy="475488"/>
           </a:xfrm>
           <a:prstGeom prst="rect">
@@ -15272,7 +15206,7 @@
         </p:nvSpPr>
         <p:spPr>
           <a:xfrm>
-            <a:off x="4850892" y="4169664"/>
+            <a:off x="4331643" y="4169664"/>
             <a:ext cx="685800" cy="475488"/>
           </a:xfrm>
           <a:prstGeom prst="rect">
@@ -15311,7 +15245,7 @@
         </p:nvSpPr>
         <p:spPr>
           <a:xfrm>
-            <a:off x="6062472" y="4169664"/>
+            <a:off x="5370141" y="4169664"/>
             <a:ext cx="685800" cy="475488"/>
           </a:xfrm>
           <a:prstGeom prst="rect">
@@ -15338,7 +15272,7 @@
         </p:nvSpPr>
         <p:spPr>
           <a:xfrm>
-            <a:off x="6062472" y="4169664"/>
+            <a:off x="5370141" y="4169664"/>
             <a:ext cx="685800" cy="475488"/>
           </a:xfrm>
           <a:prstGeom prst="rect">
@@ -15363,7 +15297,7 @@
                 <a:ea typeface="Trebuchet MS" pitchFamily="34" charset="-122"/>
                 <a:cs typeface="Trebuchet MS" pitchFamily="34" charset="-120"/>
               </a:rPr>
-              <a:t>i</a:t>
+              <a:t>l</a:t>
             </a:r>
             <a:endParaRPr lang="en-US" sz="900" dirty="0"/>
           </a:p>
@@ -15377,7 +15311,7 @@
         </p:nvSpPr>
         <p:spPr>
           <a:xfrm>
-            <a:off x="7274052" y="4169664"/>
+            <a:off x="6408638" y="4169664"/>
             <a:ext cx="685800" cy="475488"/>
           </a:xfrm>
           <a:prstGeom prst="rect">
@@ -15404,7 +15338,7 @@
         </p:nvSpPr>
         <p:spPr>
           <a:xfrm>
-            <a:off x="7274052" y="4169664"/>
+            <a:off x="6408638" y="4169664"/>
             <a:ext cx="685800" cy="475488"/>
           </a:xfrm>
           <a:prstGeom prst="rect">
@@ -15429,7 +15363,73 @@
                 <a:ea typeface="Trebuchet MS" pitchFamily="34" charset="-122"/>
                 <a:cs typeface="Trebuchet MS" pitchFamily="34" charset="-120"/>
               </a:rPr>
-              <a:t>ng</a:t>
+              <a:t>e</a:t>
+            </a:r>
+            <a:endParaRPr lang="en-US" sz="900" dirty="0"/>
+          </a:p>
+        </p:txBody>
+      </p:sp>
+      <p:sp>
+        <p:nvSpPr>
+          <p:cNvPr id="43" name="Shape 41"/>
+          <p:cNvSpPr/>
+          <p:nvPr/>
+        </p:nvSpPr>
+        <p:spPr>
+          <a:xfrm>
+            <a:off x="7447135" y="4169664"/>
+            <a:ext cx="685800" cy="475488"/>
+          </a:xfrm>
+          <a:prstGeom prst="rect">
+            <a:avLst>
+              <a:gd name="adj" fmla="val 7692"/>
+            </a:avLst>
+          </a:prstGeom>
+          <a:solidFill>
+            <a:srgbClr val="FFFFFF"/>
+          </a:solidFill>
+          <a:ln w="12700">
+            <a:solidFill>
+              <a:srgbClr val="DB2777"/>
+            </a:solidFill>
+            <a:prstDash val="solid"/>
+          </a:ln>
+        </p:spPr>
+      </p:sp>
+      <p:sp>
+        <p:nvSpPr>
+          <p:cNvPr id="44" name="Text 42"/>
+          <p:cNvSpPr/>
+          <p:nvPr/>
+        </p:nvSpPr>
+        <p:spPr>
+          <a:xfrm>
+            <a:off x="7447135" y="4169664"/>
+            <a:ext cx="685800" cy="475488"/>
+          </a:xfrm>
+          <a:prstGeom prst="rect">
+            <a:avLst/>
+          </a:prstGeom>
+          <a:noFill/>
+          <a:ln/>
+        </p:spPr>
+        <p:txBody>
+          <a:bodyPr wrap="square" lIns="0" tIns="0" rIns="0" bIns="0" rtlCol="0" anchor="ctr"/>
+          <a:lstStyle/>
+          <a:p>
+            <a:pPr algn="ctr" indent="0" marL="0">
+              <a:buNone/>
+            </a:pPr>
+            <a:r>
+              <a:rPr lang="en-US" sz="900" b="1" dirty="0">
+                <a:solidFill>
+                  <a:srgbClr val="9D174D"/>
+                </a:solidFill>
+                <a:latin typeface="Trebuchet MS" pitchFamily="34" charset="0"/>
+                <a:ea typeface="Trebuchet MS" pitchFamily="34" charset="-122"/>
+                <a:cs typeface="Trebuchet MS" pitchFamily="34" charset="-120"/>
+              </a:rPr>
+              <a:t>ss</a:t>
             </a:r>
             <a:endParaRPr lang="en-US" sz="900" dirty="0"/>
           </a:p>
@@ -16003,7 +16003,7 @@
                 <a:ea typeface="Calibri" pitchFamily="34" charset="-122"/>
                 <a:cs typeface="Calibri" pitchFamily="34" charset="-120"/>
               </a:rPr>
-              <a:t>Word Labs  •  wordlabs.app  •  Root: 'end' = to finish, stop, or limit</a:t>
+              <a:t>Word Labs  •  wordlabs.app  •  Root: 'end' = to finish; the final part</a:t>
             </a:r>
             <a:endParaRPr lang="en-US" sz="800" dirty="0"/>
           </a:p>
@@ -16337,7 +16337,7 @@
                 <a:ea typeface="Trebuchet MS" pitchFamily="34" charset="-122"/>
                 <a:cs typeface="Trebuchet MS" pitchFamily="34" charset="-120"/>
               </a:rPr>
-              <a:t>2</a:t>
+              <a:t>0</a:t>
             </a:r>
             <a:pPr algn="ctr" indent="0" marL="0">
               <a:buNone/>
@@ -16351,7 +16351,7 @@
                 <a:ea typeface="Trebuchet MS" pitchFamily="34" charset="-122"/>
                 <a:cs typeface="Trebuchet MS" pitchFamily="34" charset="-120"/>
               </a:rPr>
-              <a:t>  punctuation marks</a:t>
+              <a:t>  punctuation mark</a:t>
             </a:r>
             <a:endParaRPr lang="en-US" sz="2800" dirty="0"/>
           </a:p>
@@ -16643,7 +16643,7 @@
                 <a:ea typeface="Calibri" pitchFamily="34" charset="-122"/>
                 <a:cs typeface="Calibri" pitchFamily="34" charset="-120"/>
               </a:rPr>
-              <a:t>Word Labs  •  wordlabs.app  •  Root: 'end' = to finish, stop, or limit</a:t>
+              <a:t>Word Labs  •  wordlabs.app  •  Root: 'end' = to finish; the final part</a:t>
             </a:r>
             <a:endParaRPr lang="en-US" sz="800" dirty="0"/>
           </a:p>
@@ -16755,7 +16755,7 @@
                 <a:ea typeface="Calibri" pitchFamily="34" charset="-122"/>
                 <a:cs typeface="Calibri" pitchFamily="34" charset="-120"/>
               </a:rPr>
-              <a:t>We had to </a:t>
+              <a:t>The explorers had to </a:t>
             </a:r>
             <a:pPr algn="l" indent="0" marL="0">
               <a:buNone/>
@@ -16772,7 +16772,7 @@
                 <a:ea typeface="Calibri" pitchFamily="34" charset="-122"/>
                 <a:cs typeface="Calibri" pitchFamily="34" charset="-120"/>
               </a:rPr>
-              <a:t>defend</a:t>
+              <a:t>endure</a:t>
             </a:r>
             <a:pPr algn="l" indent="0" marL="0">
               <a:buNone/>
@@ -16786,7 +16786,7 @@
                 <a:ea typeface="Calibri" pitchFamily="34" charset="-122"/>
                 <a:cs typeface="Calibri" pitchFamily="34" charset="-120"/>
               </a:rPr>
-              <a:t> our </a:t>
+              <a:t> freezing temperatures on their journey. Their </a:t>
             </a:r>
             <a:pPr algn="l" indent="0" marL="0">
               <a:buNone/>
@@ -16803,7 +16803,7 @@
                 <a:ea typeface="Calibri" pitchFamily="34" charset="-122"/>
                 <a:cs typeface="Calibri" pitchFamily="34" charset="-120"/>
               </a:rPr>
-              <a:t>endless</a:t>
+              <a:t>enduring</a:t>
             </a:r>
             <a:pPr algn="l" indent="0" marL="0">
               <a:buNone/>
@@ -16817,7 +16817,7 @@
                 <a:ea typeface="Calibri" pitchFamily="34" charset="-122"/>
                 <a:cs typeface="Calibri" pitchFamily="34" charset="-120"/>
               </a:rPr>
-              <a:t> project work, but thankfully the </a:t>
+              <a:t> friendship lasted over fifty years. Running a marathon takes great </a:t>
             </a:r>
             <a:pPr algn="l" indent="0" marL="0">
               <a:buNone/>
@@ -16834,7 +16834,7 @@
                 <a:ea typeface="Calibri" pitchFamily="34" charset="-122"/>
                 <a:cs typeface="Calibri" pitchFamily="34" charset="-120"/>
               </a:rPr>
-              <a:t>blending</a:t>
+              <a:t>endurance</a:t>
             </a:r>
             <a:pPr algn="l" indent="0" marL="0">
               <a:buNone/>
@@ -16848,7 +16848,7 @@
                 <a:ea typeface="Calibri" pitchFamily="34" charset="-122"/>
                 <a:cs typeface="Calibri" pitchFamily="34" charset="-120"/>
               </a:rPr>
-              <a:t> of our ideas impressed everyone!</a:t>
+              <a:t>.</a:t>
             </a:r>
             <a:endParaRPr lang="en-US" sz="1800" dirty="0"/>
           </a:p>
@@ -17003,7 +17003,7 @@
                 <a:ea typeface="Trebuchet MS" pitchFamily="34" charset="-122"/>
                 <a:cs typeface="Trebuchet MS" pitchFamily="34" charset="-120"/>
               </a:rPr>
-              <a:t>defend</a:t>
+              <a:t>endure</a:t>
             </a:r>
             <a:endParaRPr lang="en-US" sz="1400" dirty="0"/>
           </a:p>
@@ -17131,7 +17131,7 @@
                 <a:ea typeface="Trebuchet MS" pitchFamily="34" charset="-122"/>
                 <a:cs typeface="Trebuchet MS" pitchFamily="34" charset="-120"/>
               </a:rPr>
-              <a:t>endless</a:t>
+              <a:t>enduring</a:t>
             </a:r>
             <a:endParaRPr lang="en-US" sz="1400" dirty="0"/>
           </a:p>
@@ -17259,7 +17259,7 @@
                 <a:ea typeface="Trebuchet MS" pitchFamily="34" charset="-122"/>
                 <a:cs typeface="Trebuchet MS" pitchFamily="34" charset="-120"/>
               </a:rPr>
-              <a:t>blending</a:t>
+              <a:t>endurance</a:t>
             </a:r>
             <a:endParaRPr lang="en-US" sz="1400" dirty="0"/>
           </a:p>
@@ -17590,7 +17590,7 @@
                 <a:ea typeface="Calibri" pitchFamily="34" charset="-122"/>
                 <a:cs typeface="Calibri" pitchFamily="34" charset="-120"/>
               </a:rPr>
-              <a:t>Word Labs  •  wordlabs.app  •  Root: 'end' = to finish, stop, or limit</a:t>
+              <a:t>Word Labs  •  wordlabs.app  •  Root: 'end' = to finish; the final part</a:t>
             </a:r>
             <a:endParaRPr lang="en-US" sz="800" dirty="0"/>
           </a:p>
@@ -17729,7 +17729,7 @@
                 <a:ea typeface="Trebuchet MS" pitchFamily="34" charset="-122"/>
                 <a:cs typeface="Trebuchet MS" pitchFamily="34" charset="-120"/>
               </a:rPr>
-              <a:t>defend</a:t>
+              <a:t>endure</a:t>
             </a:r>
             <a:endParaRPr lang="en-US" sz="2800" dirty="0"/>
           </a:p>
@@ -18417,7 +18417,7 @@
                 <a:ea typeface="Calibri" pitchFamily="34" charset="-122"/>
                 <a:cs typeface="Calibri" pitchFamily="34" charset="-120"/>
               </a:rPr>
-              <a:t>Word Labs  •  wordlabs.app  •  Root: 'end' = to finish, stop, or limit</a:t>
+              <a:t>Word Labs  •  wordlabs.app  •  Root: 'end' = to finish; the final part</a:t>
             </a:r>
             <a:endParaRPr lang="en-US" sz="800" dirty="0"/>
           </a:p>
@@ -18556,7 +18556,7 @@
                 <a:ea typeface="Trebuchet MS" pitchFamily="34" charset="-122"/>
                 <a:cs typeface="Trebuchet MS" pitchFamily="34" charset="-120"/>
               </a:rPr>
-              <a:t>defend</a:t>
+              <a:t>endure</a:t>
             </a:r>
             <a:endParaRPr lang="en-US" sz="2800" dirty="0"/>
           </a:p>
@@ -18645,11 +18645,11 @@
             </a:avLst>
           </a:prstGeom>
           <a:solidFill>
-            <a:srgbClr val="DDD6FE"/>
+            <a:srgbClr val="CCFBF1"/>
           </a:solidFill>
           <a:ln w="19050">
             <a:solidFill>
-              <a:srgbClr val="7C3AED"/>
+              <a:srgbClr val="0D9488"/>
             </a:solidFill>
             <a:prstDash val="solid"/>
           </a:ln>
@@ -18689,13 +18689,13 @@
             <a:r>
               <a:rPr lang="en-US" sz="1300" b="1" dirty="0">
                 <a:solidFill>
-                  <a:srgbClr val="4C1D95"/>
+                  <a:srgbClr val="0F766E"/>
                 </a:solidFill>
                 <a:latin typeface="Trebuchet MS" pitchFamily="34" charset="0"/>
                 <a:ea typeface="Trebuchet MS" pitchFamily="34" charset="-122"/>
                 <a:cs typeface="Trebuchet MS" pitchFamily="34" charset="-120"/>
               </a:rPr>
-              <a:t>de</a:t>
+              <a:t>end</a:t>
             </a:r>
             <a:endParaRPr lang="en-US" sz="1300" dirty="0"/>
           </a:p>
@@ -18734,7 +18734,7 @@
                 <a:ea typeface="Calibri" pitchFamily="34" charset="-122"/>
                 <a:cs typeface="Calibri" pitchFamily="34" charset="-120"/>
               </a:rPr>
-              <a:t>away from, down</a:t>
+              <a:t>to finish; the final part</a:t>
             </a:r>
             <a:endParaRPr lang="en-US" sz="850" dirty="0"/>
           </a:p>
@@ -18757,11 +18757,11 @@
             </a:avLst>
           </a:prstGeom>
           <a:solidFill>
-            <a:srgbClr val="CCFBF1"/>
+            <a:srgbClr val="FCE7F3"/>
           </a:solidFill>
           <a:ln w="19050">
             <a:solidFill>
-              <a:srgbClr val="0D9488"/>
+              <a:srgbClr val="DB2777"/>
             </a:solidFill>
             <a:prstDash val="solid"/>
           </a:ln>
@@ -18801,13 +18801,13 @@
             <a:r>
               <a:rPr lang="en-US" sz="1300" b="1" dirty="0">
                 <a:solidFill>
-                  <a:srgbClr val="0F766E"/>
+                  <a:srgbClr val="9D174D"/>
                 </a:solidFill>
                 <a:latin typeface="Trebuchet MS" pitchFamily="34" charset="0"/>
                 <a:ea typeface="Trebuchet MS" pitchFamily="34" charset="-122"/>
                 <a:cs typeface="Trebuchet MS" pitchFamily="34" charset="-120"/>
               </a:rPr>
-              <a:t>end</a:t>
+              <a:t>ure</a:t>
             </a:r>
             <a:endParaRPr lang="en-US" sz="1300" dirty="0"/>
           </a:p>
@@ -18846,7 +18846,7 @@
                 <a:ea typeface="Calibri" pitchFamily="34" charset="-122"/>
                 <a:cs typeface="Calibri" pitchFamily="34" charset="-120"/>
               </a:rPr>
-              <a:t>to finish or limit</a:t>
+              <a:t>result of</a:t>
             </a:r>
             <a:endParaRPr lang="en-US" sz="850" dirty="0"/>
           </a:p>
@@ -19402,7 +19402,7 @@
                 <a:ea typeface="Calibri" pitchFamily="34" charset="-122"/>
                 <a:cs typeface="Calibri" pitchFamily="34" charset="-120"/>
               </a:rPr>
-              <a:t>Word Labs  •  wordlabs.app  •  Root: 'end' = to finish, stop, or limit</a:t>
+              <a:t>Word Labs  •  wordlabs.app  •  Root: 'end' = to finish; the final part</a:t>
             </a:r>
             <a:endParaRPr lang="en-US" sz="800" dirty="0"/>
           </a:p>
@@ -19541,7 +19541,7 @@
                 <a:ea typeface="Trebuchet MS" pitchFamily="34" charset="-122"/>
                 <a:cs typeface="Trebuchet MS" pitchFamily="34" charset="-120"/>
               </a:rPr>
-              <a:t>defend</a:t>
+              <a:t>endure</a:t>
             </a:r>
             <a:endParaRPr lang="en-US" sz="2800" dirty="0"/>
           </a:p>
@@ -19630,11 +19630,11 @@
             </a:avLst>
           </a:prstGeom>
           <a:solidFill>
-            <a:srgbClr val="DDD6FE"/>
+            <a:srgbClr val="CCFBF1"/>
           </a:solidFill>
           <a:ln w="19050">
             <a:solidFill>
-              <a:srgbClr val="7C3AED"/>
+              <a:srgbClr val="0D9488"/>
             </a:solidFill>
             <a:prstDash val="solid"/>
           </a:ln>
@@ -19674,13 +19674,13 @@
             <a:r>
               <a:rPr lang="en-US" sz="1300" b="1" dirty="0">
                 <a:solidFill>
-                  <a:srgbClr val="4C1D95"/>
+                  <a:srgbClr val="0F766E"/>
                 </a:solidFill>
                 <a:latin typeface="Trebuchet MS" pitchFamily="34" charset="0"/>
                 <a:ea typeface="Trebuchet MS" pitchFamily="34" charset="-122"/>
                 <a:cs typeface="Trebuchet MS" pitchFamily="34" charset="-120"/>
               </a:rPr>
-              <a:t>de</a:t>
+              <a:t>end</a:t>
             </a:r>
             <a:endParaRPr lang="en-US" sz="1300" dirty="0"/>
           </a:p>
@@ -19719,7 +19719,7 @@
                 <a:ea typeface="Calibri" pitchFamily="34" charset="-122"/>
                 <a:cs typeface="Calibri" pitchFamily="34" charset="-120"/>
               </a:rPr>
-              <a:t>away from, down</a:t>
+              <a:t>to finish; the final part</a:t>
             </a:r>
             <a:endParaRPr lang="en-US" sz="850" dirty="0"/>
           </a:p>
@@ -19742,11 +19742,11 @@
             </a:avLst>
           </a:prstGeom>
           <a:solidFill>
-            <a:srgbClr val="CCFBF1"/>
+            <a:srgbClr val="FCE7F3"/>
           </a:solidFill>
           <a:ln w="19050">
             <a:solidFill>
-              <a:srgbClr val="0D9488"/>
+              <a:srgbClr val="DB2777"/>
             </a:solidFill>
             <a:prstDash val="solid"/>
           </a:ln>
@@ -19786,13 +19786,13 @@
             <a:r>
               <a:rPr lang="en-US" sz="1300" b="1" dirty="0">
                 <a:solidFill>
-                  <a:srgbClr val="0F766E"/>
+                  <a:srgbClr val="9D174D"/>
                 </a:solidFill>
                 <a:latin typeface="Trebuchet MS" pitchFamily="34" charset="0"/>
                 <a:ea typeface="Trebuchet MS" pitchFamily="34" charset="-122"/>
                 <a:cs typeface="Trebuchet MS" pitchFamily="34" charset="-120"/>
               </a:rPr>
-              <a:t>end</a:t>
+              <a:t>ure</a:t>
             </a:r>
             <a:endParaRPr lang="en-US" sz="1300" dirty="0"/>
           </a:p>
@@ -19831,7 +19831,7 @@
                 <a:ea typeface="Calibri" pitchFamily="34" charset="-122"/>
                 <a:cs typeface="Calibri" pitchFamily="34" charset="-120"/>
               </a:rPr>
-              <a:t>to finish or limit</a:t>
+              <a:t>result of</a:t>
             </a:r>
             <a:endParaRPr lang="en-US" sz="850" dirty="0"/>
           </a:p>
@@ -19990,7 +19990,7 @@
                 <a:ea typeface="Trebuchet MS" pitchFamily="34" charset="-122"/>
                 <a:cs typeface="Trebuchet MS" pitchFamily="34" charset="-120"/>
               </a:rPr>
-              <a:t>de</a:t>
+              <a:t>en</a:t>
             </a:r>
             <a:endParaRPr lang="en-US" sz="1400" dirty="0"/>
           </a:p>
@@ -20095,7 +20095,7 @@
                 <a:ea typeface="Trebuchet MS" pitchFamily="34" charset="-122"/>
                 <a:cs typeface="Trebuchet MS" pitchFamily="34" charset="-120"/>
               </a:rPr>
-              <a:t>fend</a:t>
+              <a:t>dure</a:t>
             </a:r>
             <a:endParaRPr lang="en-US" sz="1400" dirty="0"/>
           </a:p>
@@ -20519,7 +20519,7 @@
                 <a:ea typeface="Calibri" pitchFamily="34" charset="-122"/>
                 <a:cs typeface="Calibri" pitchFamily="34" charset="-120"/>
               </a:rPr>
-              <a:t>Word Labs  •  wordlabs.app  •  Root: 'end' = to finish, stop, or limit</a:t>
+              <a:t>Word Labs  •  wordlabs.app  •  Root: 'end' = to finish; the final part</a:t>
             </a:r>
             <a:endParaRPr lang="en-US" sz="800" dirty="0"/>
           </a:p>
@@ -20658,7 +20658,7 @@
                 <a:ea typeface="Trebuchet MS" pitchFamily="34" charset="-122"/>
                 <a:cs typeface="Trebuchet MS" pitchFamily="34" charset="-120"/>
               </a:rPr>
-              <a:t>defend</a:t>
+              <a:t>endure</a:t>
             </a:r>
             <a:endParaRPr lang="en-US" sz="2800" dirty="0"/>
           </a:p>
@@ -20747,11 +20747,11 @@
             </a:avLst>
           </a:prstGeom>
           <a:solidFill>
-            <a:srgbClr val="DDD6FE"/>
+            <a:srgbClr val="CCFBF1"/>
           </a:solidFill>
           <a:ln w="19050">
             <a:solidFill>
-              <a:srgbClr val="7C3AED"/>
+              <a:srgbClr val="0D9488"/>
             </a:solidFill>
             <a:prstDash val="solid"/>
           </a:ln>
@@ -20791,13 +20791,13 @@
             <a:r>
               <a:rPr lang="en-US" sz="1300" b="1" dirty="0">
                 <a:solidFill>
-                  <a:srgbClr val="4C1D95"/>
+                  <a:srgbClr val="0F766E"/>
                 </a:solidFill>
                 <a:latin typeface="Trebuchet MS" pitchFamily="34" charset="0"/>
                 <a:ea typeface="Trebuchet MS" pitchFamily="34" charset="-122"/>
                 <a:cs typeface="Trebuchet MS" pitchFamily="34" charset="-120"/>
               </a:rPr>
-              <a:t>de</a:t>
+              <a:t>end</a:t>
             </a:r>
             <a:endParaRPr lang="en-US" sz="1300" dirty="0"/>
           </a:p>
@@ -20836,7 +20836,7 @@
                 <a:ea typeface="Calibri" pitchFamily="34" charset="-122"/>
                 <a:cs typeface="Calibri" pitchFamily="34" charset="-120"/>
               </a:rPr>
-              <a:t>away from, down</a:t>
+              <a:t>to finish; the final part</a:t>
             </a:r>
             <a:endParaRPr lang="en-US" sz="850" dirty="0"/>
           </a:p>
@@ -20859,11 +20859,11 @@
             </a:avLst>
           </a:prstGeom>
           <a:solidFill>
-            <a:srgbClr val="CCFBF1"/>
+            <a:srgbClr val="FCE7F3"/>
           </a:solidFill>
           <a:ln w="19050">
             <a:solidFill>
-              <a:srgbClr val="0D9488"/>
+              <a:srgbClr val="DB2777"/>
             </a:solidFill>
             <a:prstDash val="solid"/>
           </a:ln>
@@ -20903,13 +20903,13 @@
             <a:r>
               <a:rPr lang="en-US" sz="1300" b="1" dirty="0">
                 <a:solidFill>
-                  <a:srgbClr val="0F766E"/>
+                  <a:srgbClr val="9D174D"/>
                 </a:solidFill>
                 <a:latin typeface="Trebuchet MS" pitchFamily="34" charset="0"/>
                 <a:ea typeface="Trebuchet MS" pitchFamily="34" charset="-122"/>
                 <a:cs typeface="Trebuchet MS" pitchFamily="34" charset="-120"/>
               </a:rPr>
-              <a:t>end</a:t>
+              <a:t>ure</a:t>
             </a:r>
             <a:endParaRPr lang="en-US" sz="1300" dirty="0"/>
           </a:p>
@@ -20948,7 +20948,7 @@
                 <a:ea typeface="Calibri" pitchFamily="34" charset="-122"/>
                 <a:cs typeface="Calibri" pitchFamily="34" charset="-120"/>
               </a:rPr>
-              <a:t>to finish or limit</a:t>
+              <a:t>result of</a:t>
             </a:r>
             <a:endParaRPr lang="en-US" sz="850" dirty="0"/>
           </a:p>
@@ -21107,7 +21107,7 @@
                 <a:ea typeface="Trebuchet MS" pitchFamily="34" charset="-122"/>
                 <a:cs typeface="Trebuchet MS" pitchFamily="34" charset="-120"/>
               </a:rPr>
-              <a:t>de</a:t>
+              <a:t>en</a:t>
             </a:r>
             <a:endParaRPr lang="en-US" sz="1400" dirty="0"/>
           </a:p>
@@ -21212,7 +21212,7 @@
                 <a:ea typeface="Trebuchet MS" pitchFamily="34" charset="-122"/>
                 <a:cs typeface="Trebuchet MS" pitchFamily="34" charset="-120"/>
               </a:rPr>
-              <a:t>fend</a:t>
+              <a:t>dure</a:t>
             </a:r>
             <a:endParaRPr lang="en-US" sz="1400" dirty="0"/>
           </a:p>
@@ -21319,7 +21319,7 @@
         </p:nvSpPr>
         <p:spPr>
           <a:xfrm>
-            <a:off x="2254649" y="4169664"/>
+            <a:off x="2427732" y="4169664"/>
             <a:ext cx="685800" cy="475488"/>
           </a:xfrm>
           <a:prstGeom prst="rect">
@@ -21346,7 +21346,7 @@
         </p:nvSpPr>
         <p:spPr>
           <a:xfrm>
-            <a:off x="2254649" y="4169664"/>
+            <a:off x="2427732" y="4169664"/>
             <a:ext cx="685800" cy="475488"/>
           </a:xfrm>
           <a:prstGeom prst="rect">
@@ -21371,7 +21371,7 @@
                 <a:ea typeface="Trebuchet MS" pitchFamily="34" charset="-122"/>
                 <a:cs typeface="Trebuchet MS" pitchFamily="34" charset="-120"/>
               </a:rPr>
-              <a:t>d</a:t>
+              <a:t>e</a:t>
             </a:r>
             <a:endParaRPr lang="en-US" sz="900" dirty="0"/>
           </a:p>
@@ -21385,7 +21385,7 @@
         </p:nvSpPr>
         <p:spPr>
           <a:xfrm>
-            <a:off x="3293146" y="4169664"/>
+            <a:off x="3639312" y="4169664"/>
             <a:ext cx="685800" cy="475488"/>
           </a:xfrm>
           <a:prstGeom prst="rect">
@@ -21412,7 +21412,7 @@
         </p:nvSpPr>
         <p:spPr>
           <a:xfrm>
-            <a:off x="3293146" y="4169664"/>
+            <a:off x="3639312" y="4169664"/>
             <a:ext cx="685800" cy="475488"/>
           </a:xfrm>
           <a:prstGeom prst="rect">
@@ -21437,7 +21437,7 @@
                 <a:ea typeface="Trebuchet MS" pitchFamily="34" charset="-122"/>
                 <a:cs typeface="Trebuchet MS" pitchFamily="34" charset="-120"/>
               </a:rPr>
-              <a:t>e</a:t>
+              <a:t>n</a:t>
             </a:r>
             <a:endParaRPr lang="en-US" sz="900" dirty="0"/>
           </a:p>
@@ -21451,7 +21451,7 @@
         </p:nvSpPr>
         <p:spPr>
           <a:xfrm>
-            <a:off x="4331643" y="4169664"/>
+            <a:off x="4850892" y="4169664"/>
             <a:ext cx="685800" cy="475488"/>
           </a:xfrm>
           <a:prstGeom prst="rect">
@@ -21478,7 +21478,7 @@
         </p:nvSpPr>
         <p:spPr>
           <a:xfrm>
-            <a:off x="4331643" y="4169664"/>
+            <a:off x="4850892" y="4169664"/>
             <a:ext cx="685800" cy="475488"/>
           </a:xfrm>
           <a:prstGeom prst="rect">
@@ -21503,7 +21503,7 @@
                 <a:ea typeface="Trebuchet MS" pitchFamily="34" charset="-122"/>
                 <a:cs typeface="Trebuchet MS" pitchFamily="34" charset="-120"/>
               </a:rPr>
-              <a:t>f</a:t>
+              <a:t>d</a:t>
             </a:r>
             <a:endParaRPr lang="en-US" sz="900" dirty="0"/>
           </a:p>
@@ -21517,7 +21517,7 @@
         </p:nvSpPr>
         <p:spPr>
           <a:xfrm>
-            <a:off x="5370141" y="4169664"/>
+            <a:off x="6062472" y="4169664"/>
             <a:ext cx="685800" cy="475488"/>
           </a:xfrm>
           <a:prstGeom prst="rect">
@@ -21544,7 +21544,7 @@
         </p:nvSpPr>
         <p:spPr>
           <a:xfrm>
-            <a:off x="5370141" y="4169664"/>
+            <a:off x="6062472" y="4169664"/>
             <a:ext cx="685800" cy="475488"/>
           </a:xfrm>
           <a:prstGeom prst="rect">
@@ -21569,7 +21569,7 @@
                 <a:ea typeface="Trebuchet MS" pitchFamily="34" charset="-122"/>
                 <a:cs typeface="Trebuchet MS" pitchFamily="34" charset="-120"/>
               </a:rPr>
-              <a:t>e</a:t>
+              <a:t>u_e</a:t>
             </a:r>
             <a:endParaRPr lang="en-US" sz="900" dirty="0"/>
           </a:p>
@@ -21583,7 +21583,7 @@
         </p:nvSpPr>
         <p:spPr>
           <a:xfrm>
-            <a:off x="6408638" y="4169664"/>
+            <a:off x="7274052" y="4169664"/>
             <a:ext cx="685800" cy="475488"/>
           </a:xfrm>
           <a:prstGeom prst="rect">
@@ -21610,7 +21610,7 @@
         </p:nvSpPr>
         <p:spPr>
           <a:xfrm>
-            <a:off x="6408638" y="4169664"/>
+            <a:off x="7274052" y="4169664"/>
             <a:ext cx="685800" cy="475488"/>
           </a:xfrm>
           <a:prstGeom prst="rect">
@@ -21635,73 +21635,7 @@
                 <a:ea typeface="Trebuchet MS" pitchFamily="34" charset="-122"/>
                 <a:cs typeface="Trebuchet MS" pitchFamily="34" charset="-120"/>
               </a:rPr>
-              <a:t>n</a:t>
-            </a:r>
-            <a:endParaRPr lang="en-US" sz="900" dirty="0"/>
-          </a:p>
-        </p:txBody>
-      </p:sp>
-      <p:sp>
-        <p:nvSpPr>
-          <p:cNvPr id="43" name="Shape 41"/>
-          <p:cNvSpPr/>
-          <p:nvPr/>
-        </p:nvSpPr>
-        <p:spPr>
-          <a:xfrm>
-            <a:off x="7447135" y="4169664"/>
-            <a:ext cx="685800" cy="475488"/>
-          </a:xfrm>
-          <a:prstGeom prst="rect">
-            <a:avLst>
-              <a:gd name="adj" fmla="val 7692"/>
-            </a:avLst>
-          </a:prstGeom>
-          <a:solidFill>
-            <a:srgbClr val="FFFFFF"/>
-          </a:solidFill>
-          <a:ln w="12700">
-            <a:solidFill>
-              <a:srgbClr val="DB2777"/>
-            </a:solidFill>
-            <a:prstDash val="solid"/>
-          </a:ln>
-        </p:spPr>
-      </p:sp>
-      <p:sp>
-        <p:nvSpPr>
-          <p:cNvPr id="44" name="Text 42"/>
-          <p:cNvSpPr/>
-          <p:nvPr/>
-        </p:nvSpPr>
-        <p:spPr>
-          <a:xfrm>
-            <a:off x="7447135" y="4169664"/>
-            <a:ext cx="685800" cy="475488"/>
-          </a:xfrm>
-          <a:prstGeom prst="rect">
-            <a:avLst/>
-          </a:prstGeom>
-          <a:noFill/>
-          <a:ln/>
-        </p:spPr>
-        <p:txBody>
-          <a:bodyPr wrap="square" lIns="0" tIns="0" rIns="0" bIns="0" rtlCol="0" anchor="ctr"/>
-          <a:lstStyle/>
-          <a:p>
-            <a:pPr algn="ctr" indent="0" marL="0">
-              <a:buNone/>
-            </a:pPr>
-            <a:r>
-              <a:rPr lang="en-US" sz="900" b="1" dirty="0">
-                <a:solidFill>
-                  <a:srgbClr val="9D174D"/>
-                </a:solidFill>
-                <a:latin typeface="Trebuchet MS" pitchFamily="34" charset="0"/>
-                <a:ea typeface="Trebuchet MS" pitchFamily="34" charset="-122"/>
-                <a:cs typeface="Trebuchet MS" pitchFamily="34" charset="-120"/>
-              </a:rPr>
-              <a:t>d</a:t>
+              <a:t>r</a:t>
             </a:r>
             <a:endParaRPr lang="en-US" sz="900" dirty="0"/>
           </a:p>
@@ -21993,7 +21927,7 @@
                 <a:ea typeface="Calibri" pitchFamily="34" charset="-122"/>
                 <a:cs typeface="Calibri" pitchFamily="34" charset="-120"/>
               </a:rPr>
-              <a:t>Word Labs  •  wordlabs.app  •  Root: 'end' = to finish, stop, or limit</a:t>
+              <a:t>Word Labs  •  wordlabs.app  •  Root: 'end' = to finish; the final part</a:t>
             </a:r>
             <a:endParaRPr lang="en-US" sz="800" dirty="0"/>
           </a:p>
@@ -22132,7 +22066,7 @@
                 <a:ea typeface="Trebuchet MS" pitchFamily="34" charset="-122"/>
                 <a:cs typeface="Trebuchet MS" pitchFamily="34" charset="-120"/>
               </a:rPr>
-              <a:t>endless</a:t>
+              <a:t>enduring</a:t>
             </a:r>
             <a:endParaRPr lang="en-US" sz="2800" dirty="0"/>
           </a:p>
@@ -22820,7 +22754,7 @@
                 <a:ea typeface="Calibri" pitchFamily="34" charset="-122"/>
                 <a:cs typeface="Calibri" pitchFamily="34" charset="-120"/>
               </a:rPr>
-              <a:t>Word Labs  •  wordlabs.app  •  Root: 'end' = to finish, stop, or limit</a:t>
+              <a:t>Word Labs  •  wordlabs.app  •  Root: 'end' = to finish; the final part</a:t>
             </a:r>
             <a:endParaRPr lang="en-US" sz="800" dirty="0"/>
           </a:p>
@@ -22959,7 +22893,7 @@
                 <a:ea typeface="Trebuchet MS" pitchFamily="34" charset="-122"/>
                 <a:cs typeface="Trebuchet MS" pitchFamily="34" charset="-120"/>
               </a:rPr>
-              <a:t>endless</a:t>
+              <a:t>enduring</a:t>
             </a:r>
             <a:endParaRPr lang="en-US" sz="2800" dirty="0"/>
           </a:p>
@@ -23039,7 +22973,7 @@
         </p:nvSpPr>
         <p:spPr>
           <a:xfrm>
-            <a:off x="2938272" y="2258568"/>
+            <a:off x="2221992" y="2258568"/>
             <a:ext cx="1828800" cy="292608"/>
           </a:xfrm>
           <a:prstGeom prst="rect">
@@ -23073,7 +23007,7 @@
         </p:nvSpPr>
         <p:spPr>
           <a:xfrm>
-            <a:off x="2938272" y="2258568"/>
+            <a:off x="2221992" y="2258568"/>
             <a:ext cx="1828800" cy="292608"/>
           </a:xfrm>
           <a:prstGeom prst="rect">
@@ -23112,7 +23046,7 @@
         </p:nvSpPr>
         <p:spPr>
           <a:xfrm>
-            <a:off x="2938272" y="2569464"/>
+            <a:off x="2221992" y="2569464"/>
             <a:ext cx="1828800" cy="201168"/>
           </a:xfrm>
           <a:prstGeom prst="rect">
@@ -23137,7 +23071,7 @@
                 <a:ea typeface="Calibri" pitchFamily="34" charset="-122"/>
                 <a:cs typeface="Calibri" pitchFamily="34" charset="-120"/>
               </a:rPr>
-              <a:t>to finish or limit</a:t>
+              <a:t>to finish; the final part</a:t>
             </a:r>
             <a:endParaRPr lang="en-US" sz="850" dirty="0"/>
           </a:p>
@@ -23151,7 +23085,7 @@
         </p:nvSpPr>
         <p:spPr>
           <a:xfrm>
-            <a:off x="5803392" y="2258568"/>
+            <a:off x="4370832" y="2258568"/>
             <a:ext cx="1828800" cy="292608"/>
           </a:xfrm>
           <a:prstGeom prst="rect">
@@ -23160,11 +23094,11 @@
             </a:avLst>
           </a:prstGeom>
           <a:solidFill>
-            <a:srgbClr val="DDD6FE"/>
+            <a:srgbClr val="FCE7F3"/>
           </a:solidFill>
           <a:ln w="19050">
             <a:solidFill>
-              <a:srgbClr val="7C3AED"/>
+              <a:srgbClr val="DB2777"/>
             </a:solidFill>
             <a:prstDash val="solid"/>
           </a:ln>
@@ -23185,7 +23119,7 @@
         </p:nvSpPr>
         <p:spPr>
           <a:xfrm>
-            <a:off x="5803392" y="2258568"/>
+            <a:off x="4370832" y="2258568"/>
             <a:ext cx="1828800" cy="292608"/>
           </a:xfrm>
           <a:prstGeom prst="rect">
@@ -23204,13 +23138,13 @@
             <a:r>
               <a:rPr lang="en-US" sz="1300" b="1" dirty="0">
                 <a:solidFill>
-                  <a:srgbClr val="4C1D95"/>
+                  <a:srgbClr val="9D174D"/>
                 </a:solidFill>
                 <a:latin typeface="Trebuchet MS" pitchFamily="34" charset="0"/>
                 <a:ea typeface="Trebuchet MS" pitchFamily="34" charset="-122"/>
                 <a:cs typeface="Trebuchet MS" pitchFamily="34" charset="-120"/>
               </a:rPr>
-              <a:t>less</a:t>
+              <a:t>ure</a:t>
             </a:r>
             <a:endParaRPr lang="en-US" sz="1300" dirty="0"/>
           </a:p>
@@ -23224,7 +23158,7 @@
         </p:nvSpPr>
         <p:spPr>
           <a:xfrm>
-            <a:off x="5803392" y="2569464"/>
+            <a:off x="4370832" y="2569464"/>
             <a:ext cx="1828800" cy="201168"/>
           </a:xfrm>
           <a:prstGeom prst="rect">
@@ -23249,7 +23183,7 @@
                 <a:ea typeface="Calibri" pitchFamily="34" charset="-122"/>
                 <a:cs typeface="Calibri" pitchFamily="34" charset="-120"/>
               </a:rPr>
-              <a:t>without</a:t>
+              <a:t>result of</a:t>
             </a:r>
             <a:endParaRPr lang="en-US" sz="850" dirty="0"/>
           </a:p>
@@ -23258,6 +23192,118 @@
       <p:sp>
         <p:nvSpPr>
           <p:cNvPr id="22" name="Shape 20"/>
+          <p:cNvSpPr/>
+          <p:nvPr/>
+        </p:nvSpPr>
+        <p:spPr>
+          <a:xfrm>
+            <a:off x="6519672" y="2258568"/>
+            <a:ext cx="1828800" cy="292608"/>
+          </a:xfrm>
+          <a:prstGeom prst="rect">
+            <a:avLst>
+              <a:gd name="adj" fmla="val 25000"/>
+            </a:avLst>
+          </a:prstGeom>
+          <a:solidFill>
+            <a:srgbClr val="FCE7F3"/>
+          </a:solidFill>
+          <a:ln w="19050">
+            <a:solidFill>
+              <a:srgbClr val="DB2777"/>
+            </a:solidFill>
+            <a:prstDash val="solid"/>
+          </a:ln>
+          <a:effectLst>
+            <a:outerShdw sx="100000" sy="100000" kx="0" ky="0" algn="bl" rotWithShape="0" blurRad="101600" dist="38100" dir="8100000">
+              <a:srgbClr val="000000">
+                <a:alpha val="12000"/>
+              </a:srgbClr>
+            </a:outerShdw>
+          </a:effectLst>
+        </p:spPr>
+      </p:sp>
+      <p:sp>
+        <p:nvSpPr>
+          <p:cNvPr id="23" name="Text 21"/>
+          <p:cNvSpPr/>
+          <p:nvPr/>
+        </p:nvSpPr>
+        <p:spPr>
+          <a:xfrm>
+            <a:off x="6519672" y="2258568"/>
+            <a:ext cx="1828800" cy="292608"/>
+          </a:xfrm>
+          <a:prstGeom prst="rect">
+            <a:avLst/>
+          </a:prstGeom>
+          <a:noFill/>
+          <a:ln/>
+        </p:spPr>
+        <p:txBody>
+          <a:bodyPr wrap="square" lIns="0" tIns="0" rIns="0" bIns="0" rtlCol="0" anchor="ctr"/>
+          <a:lstStyle/>
+          <a:p>
+            <a:pPr algn="ctr" indent="0" marL="0">
+              <a:buNone/>
+            </a:pPr>
+            <a:r>
+              <a:rPr lang="en-US" sz="1300" b="1" dirty="0">
+                <a:solidFill>
+                  <a:srgbClr val="9D174D"/>
+                </a:solidFill>
+                <a:latin typeface="Trebuchet MS" pitchFamily="34" charset="0"/>
+                <a:ea typeface="Trebuchet MS" pitchFamily="34" charset="-122"/>
+                <a:cs typeface="Trebuchet MS" pitchFamily="34" charset="-120"/>
+              </a:rPr>
+              <a:t>ing</a:t>
+            </a:r>
+            <a:endParaRPr lang="en-US" sz="1300" dirty="0"/>
+          </a:p>
+        </p:txBody>
+      </p:sp>
+      <p:sp>
+        <p:nvSpPr>
+          <p:cNvPr id="24" name="Text 22"/>
+          <p:cNvSpPr/>
+          <p:nvPr/>
+        </p:nvSpPr>
+        <p:spPr>
+          <a:xfrm>
+            <a:off x="6519672" y="2569464"/>
+            <a:ext cx="1828800" cy="201168"/>
+          </a:xfrm>
+          <a:prstGeom prst="rect">
+            <a:avLst/>
+          </a:prstGeom>
+          <a:noFill/>
+          <a:ln/>
+        </p:spPr>
+        <p:txBody>
+          <a:bodyPr wrap="square" lIns="0" tIns="0" rIns="0" bIns="0" rtlCol="0" anchor="t"/>
+          <a:lstStyle/>
+          <a:p>
+            <a:pPr algn="ctr" indent="0" marL="0">
+              <a:buNone/>
+            </a:pPr>
+            <a:r>
+              <a:rPr lang="en-US" sz="850" dirty="0">
+                <a:solidFill>
+                  <a:srgbClr val="475569"/>
+                </a:solidFill>
+                <a:latin typeface="Calibri" pitchFamily="34" charset="0"/>
+                <a:ea typeface="Calibri" pitchFamily="34" charset="-122"/>
+                <a:cs typeface="Calibri" pitchFamily="34" charset="-120"/>
+              </a:rPr>
+              <a:t>happening now</a:t>
+            </a:r>
+            <a:endParaRPr lang="en-US" sz="850" dirty="0"/>
+          </a:p>
+        </p:txBody>
+      </p:sp>
+      <p:sp>
+        <p:nvSpPr>
+          <p:cNvPr id="25" name="Shape 23"/>
           <p:cNvSpPr/>
           <p:nvPr/>
         </p:nvSpPr>
@@ -23284,7 +23330,7 @@
       </p:sp>
       <p:sp>
         <p:nvSpPr>
-          <p:cNvPr id="23" name="Text 21"/>
+          <p:cNvPr id="26" name="Text 24"/>
           <p:cNvSpPr/>
           <p:nvPr/>
         </p:nvSpPr>
@@ -23323,7 +23369,7 @@
       </p:sp>
       <p:sp>
         <p:nvSpPr>
-          <p:cNvPr id="24" name="Shape 22"/>
+          <p:cNvPr id="27" name="Shape 25"/>
           <p:cNvSpPr/>
           <p:nvPr/>
         </p:nvSpPr>
@@ -23350,7 +23396,7 @@
       </p:sp>
       <p:sp>
         <p:nvSpPr>
-          <p:cNvPr id="25" name="Text 23"/>
+          <p:cNvPr id="28" name="Text 26"/>
           <p:cNvSpPr/>
           <p:nvPr/>
         </p:nvSpPr>
@@ -23389,7 +23435,7 @@
       </p:sp>
       <p:sp>
         <p:nvSpPr>
-          <p:cNvPr id="26" name="Shape 24"/>
+          <p:cNvPr id="29" name="Shape 27"/>
           <p:cNvSpPr/>
           <p:nvPr/>
         </p:nvSpPr>
@@ -23416,7 +23462,7 @@
       </p:sp>
       <p:sp>
         <p:nvSpPr>
-          <p:cNvPr id="27" name="Text 25"/>
+          <p:cNvPr id="30" name="Text 28"/>
           <p:cNvSpPr/>
           <p:nvPr/>
         </p:nvSpPr>
@@ -23455,7 +23501,7 @@
       </p:sp>
       <p:sp>
         <p:nvSpPr>
-          <p:cNvPr id="28" name="Shape 26"/>
+          <p:cNvPr id="31" name="Shape 29"/>
           <p:cNvSpPr/>
           <p:nvPr/>
         </p:nvSpPr>
@@ -23482,7 +23528,7 @@
       </p:sp>
       <p:sp>
         <p:nvSpPr>
-          <p:cNvPr id="29" name="Text 27"/>
+          <p:cNvPr id="32" name="Text 30"/>
           <p:cNvSpPr/>
           <p:nvPr/>
         </p:nvSpPr>
@@ -23805,7 +23851,7 @@
                 <a:ea typeface="Calibri" pitchFamily="34" charset="-122"/>
                 <a:cs typeface="Calibri" pitchFamily="34" charset="-120"/>
               </a:rPr>
-              <a:t>Word Labs  •  wordlabs.app  •  Root: 'end' = to finish, stop, or limit</a:t>
+              <a:t>Word Labs  •  wordlabs.app  •  Root: 'end' = to finish; the final part</a:t>
             </a:r>
             <a:endParaRPr lang="en-US" sz="800" dirty="0"/>
           </a:p>
@@ -23878,7 +23924,7 @@
                 <a:ea typeface="Trebuchet MS" pitchFamily="34" charset="-122"/>
                 <a:cs typeface="Trebuchet MS" pitchFamily="34" charset="-120"/>
               </a:rPr>
-              <a:t>We are learning that the root 'end' means 'to finish, stop, or limit'.</a:t>
+              <a:t>We are learning that the root 'end' means 'to finish; the final part'.</a:t>
             </a:r>
             <a:endParaRPr lang="en-US" sz="2000" dirty="0"/>
           </a:p>
@@ -24524,7 +24570,7 @@
                 <a:ea typeface="Calibri" pitchFamily="34" charset="-122"/>
                 <a:cs typeface="Calibri" pitchFamily="34" charset="-120"/>
               </a:rPr>
-              <a:t>Word Labs  •  wordlabs.app  •  Root: 'end' = to finish, stop, or limit</a:t>
+              <a:t>Word Labs  •  wordlabs.app  •  Root: 'end' = to finish; the final part</a:t>
             </a:r>
             <a:endParaRPr lang="en-US" sz="800" dirty="0"/>
           </a:p>
@@ -24663,7 +24709,7 @@
                 <a:ea typeface="Trebuchet MS" pitchFamily="34" charset="-122"/>
                 <a:cs typeface="Trebuchet MS" pitchFamily="34" charset="-120"/>
               </a:rPr>
-              <a:t>endless</a:t>
+              <a:t>enduring</a:t>
             </a:r>
             <a:endParaRPr lang="en-US" sz="2800" dirty="0"/>
           </a:p>
@@ -24743,7 +24789,7 @@
         </p:nvSpPr>
         <p:spPr>
           <a:xfrm>
-            <a:off x="2938272" y="2258568"/>
+            <a:off x="2221992" y="2258568"/>
             <a:ext cx="1828800" cy="292608"/>
           </a:xfrm>
           <a:prstGeom prst="rect">
@@ -24777,7 +24823,7 @@
         </p:nvSpPr>
         <p:spPr>
           <a:xfrm>
-            <a:off x="2938272" y="2258568"/>
+            <a:off x="2221992" y="2258568"/>
             <a:ext cx="1828800" cy="292608"/>
           </a:xfrm>
           <a:prstGeom prst="rect">
@@ -24816,7 +24862,7 @@
         </p:nvSpPr>
         <p:spPr>
           <a:xfrm>
-            <a:off x="2938272" y="2569464"/>
+            <a:off x="2221992" y="2569464"/>
             <a:ext cx="1828800" cy="201168"/>
           </a:xfrm>
           <a:prstGeom prst="rect">
@@ -24841,7 +24887,7 @@
                 <a:ea typeface="Calibri" pitchFamily="34" charset="-122"/>
                 <a:cs typeface="Calibri" pitchFamily="34" charset="-120"/>
               </a:rPr>
-              <a:t>to finish or limit</a:t>
+              <a:t>to finish; the final part</a:t>
             </a:r>
             <a:endParaRPr lang="en-US" sz="850" dirty="0"/>
           </a:p>
@@ -24855,7 +24901,7 @@
         </p:nvSpPr>
         <p:spPr>
           <a:xfrm>
-            <a:off x="5803392" y="2258568"/>
+            <a:off x="4370832" y="2258568"/>
             <a:ext cx="1828800" cy="292608"/>
           </a:xfrm>
           <a:prstGeom prst="rect">
@@ -24864,11 +24910,11 @@
             </a:avLst>
           </a:prstGeom>
           <a:solidFill>
-            <a:srgbClr val="DDD6FE"/>
+            <a:srgbClr val="FCE7F3"/>
           </a:solidFill>
           <a:ln w="19050">
             <a:solidFill>
-              <a:srgbClr val="7C3AED"/>
+              <a:srgbClr val="DB2777"/>
             </a:solidFill>
             <a:prstDash val="solid"/>
           </a:ln>
@@ -24889,7 +24935,7 @@
         </p:nvSpPr>
         <p:spPr>
           <a:xfrm>
-            <a:off x="5803392" y="2258568"/>
+            <a:off x="4370832" y="2258568"/>
             <a:ext cx="1828800" cy="292608"/>
           </a:xfrm>
           <a:prstGeom prst="rect">
@@ -24908,13 +24954,13 @@
             <a:r>
               <a:rPr lang="en-US" sz="1300" b="1" dirty="0">
                 <a:solidFill>
-                  <a:srgbClr val="4C1D95"/>
+                  <a:srgbClr val="9D174D"/>
                 </a:solidFill>
                 <a:latin typeface="Trebuchet MS" pitchFamily="34" charset="0"/>
                 <a:ea typeface="Trebuchet MS" pitchFamily="34" charset="-122"/>
                 <a:cs typeface="Trebuchet MS" pitchFamily="34" charset="-120"/>
               </a:rPr>
-              <a:t>less</a:t>
+              <a:t>ure</a:t>
             </a:r>
             <a:endParaRPr lang="en-US" sz="1300" dirty="0"/>
           </a:p>
@@ -24928,7 +24974,7 @@
         </p:nvSpPr>
         <p:spPr>
           <a:xfrm>
-            <a:off x="5803392" y="2569464"/>
+            <a:off x="4370832" y="2569464"/>
             <a:ext cx="1828800" cy="201168"/>
           </a:xfrm>
           <a:prstGeom prst="rect">
@@ -24953,7 +24999,7 @@
                 <a:ea typeface="Calibri" pitchFamily="34" charset="-122"/>
                 <a:cs typeface="Calibri" pitchFamily="34" charset="-120"/>
               </a:rPr>
-              <a:t>without</a:t>
+              <a:t>result of</a:t>
             </a:r>
             <a:endParaRPr lang="en-US" sz="850" dirty="0"/>
           </a:p>
@@ -24962,6 +25008,118 @@
       <p:sp>
         <p:nvSpPr>
           <p:cNvPr id="22" name="Shape 20"/>
+          <p:cNvSpPr/>
+          <p:nvPr/>
+        </p:nvSpPr>
+        <p:spPr>
+          <a:xfrm>
+            <a:off x="6519672" y="2258568"/>
+            <a:ext cx="1828800" cy="292608"/>
+          </a:xfrm>
+          <a:prstGeom prst="rect">
+            <a:avLst>
+              <a:gd name="adj" fmla="val 25000"/>
+            </a:avLst>
+          </a:prstGeom>
+          <a:solidFill>
+            <a:srgbClr val="FCE7F3"/>
+          </a:solidFill>
+          <a:ln w="19050">
+            <a:solidFill>
+              <a:srgbClr val="DB2777"/>
+            </a:solidFill>
+            <a:prstDash val="solid"/>
+          </a:ln>
+          <a:effectLst>
+            <a:outerShdw sx="100000" sy="100000" kx="0" ky="0" algn="bl" rotWithShape="0" blurRad="101600" dist="38100" dir="8100000">
+              <a:srgbClr val="000000">
+                <a:alpha val="12000"/>
+              </a:srgbClr>
+            </a:outerShdw>
+          </a:effectLst>
+        </p:spPr>
+      </p:sp>
+      <p:sp>
+        <p:nvSpPr>
+          <p:cNvPr id="23" name="Text 21"/>
+          <p:cNvSpPr/>
+          <p:nvPr/>
+        </p:nvSpPr>
+        <p:spPr>
+          <a:xfrm>
+            <a:off x="6519672" y="2258568"/>
+            <a:ext cx="1828800" cy="292608"/>
+          </a:xfrm>
+          <a:prstGeom prst="rect">
+            <a:avLst/>
+          </a:prstGeom>
+          <a:noFill/>
+          <a:ln/>
+        </p:spPr>
+        <p:txBody>
+          <a:bodyPr wrap="square" lIns="0" tIns="0" rIns="0" bIns="0" rtlCol="0" anchor="ctr"/>
+          <a:lstStyle/>
+          <a:p>
+            <a:pPr algn="ctr" indent="0" marL="0">
+              <a:buNone/>
+            </a:pPr>
+            <a:r>
+              <a:rPr lang="en-US" sz="1300" b="1" dirty="0">
+                <a:solidFill>
+                  <a:srgbClr val="9D174D"/>
+                </a:solidFill>
+                <a:latin typeface="Trebuchet MS" pitchFamily="34" charset="0"/>
+                <a:ea typeface="Trebuchet MS" pitchFamily="34" charset="-122"/>
+                <a:cs typeface="Trebuchet MS" pitchFamily="34" charset="-120"/>
+              </a:rPr>
+              <a:t>ing</a:t>
+            </a:r>
+            <a:endParaRPr lang="en-US" sz="1300" dirty="0"/>
+          </a:p>
+        </p:txBody>
+      </p:sp>
+      <p:sp>
+        <p:nvSpPr>
+          <p:cNvPr id="24" name="Text 22"/>
+          <p:cNvSpPr/>
+          <p:nvPr/>
+        </p:nvSpPr>
+        <p:spPr>
+          <a:xfrm>
+            <a:off x="6519672" y="2569464"/>
+            <a:ext cx="1828800" cy="201168"/>
+          </a:xfrm>
+          <a:prstGeom prst="rect">
+            <a:avLst/>
+          </a:prstGeom>
+          <a:noFill/>
+          <a:ln/>
+        </p:spPr>
+        <p:txBody>
+          <a:bodyPr wrap="square" lIns="0" tIns="0" rIns="0" bIns="0" rtlCol="0" anchor="t"/>
+          <a:lstStyle/>
+          <a:p>
+            <a:pPr algn="ctr" indent="0" marL="0">
+              <a:buNone/>
+            </a:pPr>
+            <a:r>
+              <a:rPr lang="en-US" sz="850" dirty="0">
+                <a:solidFill>
+                  <a:srgbClr val="475569"/>
+                </a:solidFill>
+                <a:latin typeface="Calibri" pitchFamily="34" charset="0"/>
+                <a:ea typeface="Calibri" pitchFamily="34" charset="-122"/>
+                <a:cs typeface="Calibri" pitchFamily="34" charset="-120"/>
+              </a:rPr>
+              <a:t>happening now</a:t>
+            </a:r>
+            <a:endParaRPr lang="en-US" sz="850" dirty="0"/>
+          </a:p>
+        </p:txBody>
+      </p:sp>
+      <p:sp>
+        <p:nvSpPr>
+          <p:cNvPr id="25" name="Shape 23"/>
           <p:cNvSpPr/>
           <p:nvPr/>
         </p:nvSpPr>
@@ -24988,7 +25146,7 @@
       </p:sp>
       <p:sp>
         <p:nvSpPr>
-          <p:cNvPr id="23" name="Text 21"/>
+          <p:cNvPr id="26" name="Text 24"/>
           <p:cNvSpPr/>
           <p:nvPr/>
         </p:nvSpPr>
@@ -25027,7 +25185,7 @@
       </p:sp>
       <p:sp>
         <p:nvSpPr>
-          <p:cNvPr id="24" name="Shape 22"/>
+          <p:cNvPr id="27" name="Shape 25"/>
           <p:cNvSpPr/>
           <p:nvPr/>
         </p:nvSpPr>
@@ -25054,13 +25212,13 @@
       </p:sp>
       <p:sp>
         <p:nvSpPr>
-          <p:cNvPr id="25" name="Shape 23"/>
-          <p:cNvSpPr/>
-          <p:nvPr/>
-        </p:nvSpPr>
-        <p:spPr>
-          <a:xfrm>
-            <a:off x="2999232" y="3364992"/>
+          <p:cNvPr id="28" name="Shape 26"/>
+          <p:cNvSpPr/>
+          <p:nvPr/>
+        </p:nvSpPr>
+        <p:spPr>
+          <a:xfrm>
+            <a:off x="2313432" y="3364992"/>
             <a:ext cx="1645920" cy="475488"/>
           </a:xfrm>
           <a:prstGeom prst="rect">
@@ -25081,13 +25239,13 @@
       </p:sp>
       <p:sp>
         <p:nvSpPr>
-          <p:cNvPr id="26" name="Text 24"/>
-          <p:cNvSpPr/>
-          <p:nvPr/>
-        </p:nvSpPr>
-        <p:spPr>
-          <a:xfrm>
-            <a:off x="2999232" y="3364992"/>
+          <p:cNvPr id="29" name="Text 27"/>
+          <p:cNvSpPr/>
+          <p:nvPr/>
+        </p:nvSpPr>
+        <p:spPr>
+          <a:xfrm>
+            <a:off x="2313432" y="3364992"/>
             <a:ext cx="1645920" cy="475488"/>
           </a:xfrm>
           <a:prstGeom prst="rect">
@@ -25112,7 +25270,7 @@
                 <a:ea typeface="Trebuchet MS" pitchFamily="34" charset="-122"/>
                 <a:cs typeface="Trebuchet MS" pitchFamily="34" charset="-120"/>
               </a:rPr>
-              <a:t>end</a:t>
+              <a:t>en</a:t>
             </a:r>
             <a:endParaRPr lang="en-US" sz="1400" dirty="0"/>
           </a:p>
@@ -25120,14 +25278,14 @@
       </p:sp>
       <p:sp>
         <p:nvSpPr>
-          <p:cNvPr id="27" name="Text 25"/>
-          <p:cNvSpPr/>
-          <p:nvPr/>
-        </p:nvSpPr>
-        <p:spPr>
-          <a:xfrm>
-            <a:off x="4645152" y="3364992"/>
-            <a:ext cx="1097280" cy="475488"/>
+          <p:cNvPr id="30" name="Text 28"/>
+          <p:cNvSpPr/>
+          <p:nvPr/>
+        </p:nvSpPr>
+        <p:spPr>
+          <a:xfrm>
+            <a:off x="3959352" y="3364992"/>
+            <a:ext cx="411480" cy="475488"/>
           </a:xfrm>
           <a:prstGeom prst="rect">
             <a:avLst/>
@@ -25159,13 +25317,13 @@
       </p:sp>
       <p:sp>
         <p:nvSpPr>
-          <p:cNvPr id="28" name="Shape 26"/>
-          <p:cNvSpPr/>
-          <p:nvPr/>
-        </p:nvSpPr>
-        <p:spPr>
-          <a:xfrm>
-            <a:off x="5742432" y="3364992"/>
+          <p:cNvPr id="31" name="Shape 29"/>
+          <p:cNvSpPr/>
+          <p:nvPr/>
+        </p:nvSpPr>
+        <p:spPr>
+          <a:xfrm>
+            <a:off x="4370832" y="3364992"/>
             <a:ext cx="1645920" cy="475488"/>
           </a:xfrm>
           <a:prstGeom prst="rect">
@@ -25186,13 +25344,13 @@
       </p:sp>
       <p:sp>
         <p:nvSpPr>
-          <p:cNvPr id="29" name="Text 27"/>
-          <p:cNvSpPr/>
-          <p:nvPr/>
-        </p:nvSpPr>
-        <p:spPr>
-          <a:xfrm>
-            <a:off x="5742432" y="3364992"/>
+          <p:cNvPr id="32" name="Text 30"/>
+          <p:cNvSpPr/>
+          <p:nvPr/>
+        </p:nvSpPr>
+        <p:spPr>
+          <a:xfrm>
+            <a:off x="4370832" y="3364992"/>
             <a:ext cx="1645920" cy="475488"/>
           </a:xfrm>
           <a:prstGeom prst="rect">
@@ -25217,7 +25375,7 @@
                 <a:ea typeface="Trebuchet MS" pitchFamily="34" charset="-122"/>
                 <a:cs typeface="Trebuchet MS" pitchFamily="34" charset="-120"/>
               </a:rPr>
-              <a:t>less</a:t>
+              <a:t>dur</a:t>
             </a:r>
             <a:endParaRPr lang="en-US" sz="1400" dirty="0"/>
           </a:p>
@@ -25225,7 +25383,112 @@
       </p:sp>
       <p:sp>
         <p:nvSpPr>
-          <p:cNvPr id="30" name="Shape 28"/>
+          <p:cNvPr id="33" name="Text 31"/>
+          <p:cNvSpPr/>
+          <p:nvPr/>
+        </p:nvSpPr>
+        <p:spPr>
+          <a:xfrm>
+            <a:off x="6016752" y="3364992"/>
+            <a:ext cx="411480" cy="475488"/>
+          </a:xfrm>
+          <a:prstGeom prst="rect">
+            <a:avLst/>
+          </a:prstGeom>
+          <a:noFill/>
+          <a:ln/>
+        </p:spPr>
+        <p:txBody>
+          <a:bodyPr wrap="square" lIns="0" tIns="0" rIns="0" bIns="0" rtlCol="0" anchor="ctr"/>
+          <a:lstStyle/>
+          <a:p>
+            <a:pPr algn="ctr" indent="0" marL="0">
+              <a:buNone/>
+            </a:pPr>
+            <a:r>
+              <a:rPr lang="en-US" sz="1600" b="1" dirty="0">
+                <a:solidFill>
+                  <a:srgbClr val="0D9488"/>
+                </a:solidFill>
+                <a:latin typeface="Trebuchet MS" pitchFamily="34" charset="0"/>
+                <a:ea typeface="Trebuchet MS" pitchFamily="34" charset="-122"/>
+                <a:cs typeface="Trebuchet MS" pitchFamily="34" charset="-120"/>
+              </a:rPr>
+              <a:t>·</a:t>
+            </a:r>
+            <a:endParaRPr lang="en-US" sz="1600" dirty="0"/>
+          </a:p>
+        </p:txBody>
+      </p:sp>
+      <p:sp>
+        <p:nvSpPr>
+          <p:cNvPr id="34" name="Shape 32"/>
+          <p:cNvSpPr/>
+          <p:nvPr/>
+        </p:nvSpPr>
+        <p:spPr>
+          <a:xfrm>
+            <a:off x="6428232" y="3364992"/>
+            <a:ext cx="1645920" cy="475488"/>
+          </a:xfrm>
+          <a:prstGeom prst="rect">
+            <a:avLst>
+              <a:gd name="adj" fmla="val 9615"/>
+            </a:avLst>
+          </a:prstGeom>
+          <a:solidFill>
+            <a:srgbClr val="FFFFFF"/>
+          </a:solidFill>
+          <a:ln w="12700">
+            <a:solidFill>
+              <a:srgbClr val="0D9488"/>
+            </a:solidFill>
+            <a:prstDash val="solid"/>
+          </a:ln>
+        </p:spPr>
+      </p:sp>
+      <p:sp>
+        <p:nvSpPr>
+          <p:cNvPr id="35" name="Text 33"/>
+          <p:cNvSpPr/>
+          <p:nvPr/>
+        </p:nvSpPr>
+        <p:spPr>
+          <a:xfrm>
+            <a:off x="6428232" y="3364992"/>
+            <a:ext cx="1645920" cy="475488"/>
+          </a:xfrm>
+          <a:prstGeom prst="rect">
+            <a:avLst/>
+          </a:prstGeom>
+          <a:noFill/>
+          <a:ln/>
+        </p:spPr>
+        <p:txBody>
+          <a:bodyPr wrap="square" lIns="0" tIns="0" rIns="0" bIns="0" rtlCol="0" anchor="ctr"/>
+          <a:lstStyle/>
+          <a:p>
+            <a:pPr algn="ctr" indent="0" marL="0">
+              <a:buNone/>
+            </a:pPr>
+            <a:r>
+              <a:rPr lang="en-US" sz="1400" b="1" dirty="0">
+                <a:solidFill>
+                  <a:srgbClr val="0D9488"/>
+                </a:solidFill>
+                <a:latin typeface="Trebuchet MS" pitchFamily="34" charset="0"/>
+                <a:ea typeface="Trebuchet MS" pitchFamily="34" charset="-122"/>
+                <a:cs typeface="Trebuchet MS" pitchFamily="34" charset="-120"/>
+              </a:rPr>
+              <a:t>ing</a:t>
+            </a:r>
+            <a:endParaRPr lang="en-US" sz="1400" dirty="0"/>
+          </a:p>
+        </p:txBody>
+      </p:sp>
+      <p:sp>
+        <p:nvSpPr>
+          <p:cNvPr id="36" name="Shape 34"/>
           <p:cNvSpPr/>
           <p:nvPr/>
         </p:nvSpPr>
@@ -25252,7 +25515,7 @@
       </p:sp>
       <p:sp>
         <p:nvSpPr>
-          <p:cNvPr id="31" name="Text 29"/>
+          <p:cNvPr id="37" name="Text 35"/>
           <p:cNvSpPr/>
           <p:nvPr/>
         </p:nvSpPr>
@@ -25291,7 +25554,7 @@
       </p:sp>
       <p:sp>
         <p:nvSpPr>
-          <p:cNvPr id="32" name="Shape 30"/>
+          <p:cNvPr id="38" name="Shape 36"/>
           <p:cNvSpPr/>
           <p:nvPr/>
         </p:nvSpPr>
@@ -25318,7 +25581,7 @@
       </p:sp>
       <p:sp>
         <p:nvSpPr>
-          <p:cNvPr id="33" name="Text 31"/>
+          <p:cNvPr id="39" name="Text 37"/>
           <p:cNvSpPr/>
           <p:nvPr/>
         </p:nvSpPr>
@@ -25641,7 +25904,7 @@
                 <a:ea typeface="Calibri" pitchFamily="34" charset="-122"/>
                 <a:cs typeface="Calibri" pitchFamily="34" charset="-120"/>
               </a:rPr>
-              <a:t>Word Labs  •  wordlabs.app  •  Root: 'end' = to finish, stop, or limit</a:t>
+              <a:t>Word Labs  •  wordlabs.app  •  Root: 'end' = to finish; the final part</a:t>
             </a:r>
             <a:endParaRPr lang="en-US" sz="800" dirty="0"/>
           </a:p>
@@ -25780,7 +26043,7 @@
                 <a:ea typeface="Trebuchet MS" pitchFamily="34" charset="-122"/>
                 <a:cs typeface="Trebuchet MS" pitchFamily="34" charset="-120"/>
               </a:rPr>
-              <a:t>endless</a:t>
+              <a:t>enduring</a:t>
             </a:r>
             <a:endParaRPr lang="en-US" sz="2800" dirty="0"/>
           </a:p>
@@ -25860,7 +26123,7 @@
         </p:nvSpPr>
         <p:spPr>
           <a:xfrm>
-            <a:off x="2938272" y="2258568"/>
+            <a:off x="2221992" y="2258568"/>
             <a:ext cx="1828800" cy="292608"/>
           </a:xfrm>
           <a:prstGeom prst="rect">
@@ -25894,7 +26157,7 @@
         </p:nvSpPr>
         <p:spPr>
           <a:xfrm>
-            <a:off x="2938272" y="2258568"/>
+            <a:off x="2221992" y="2258568"/>
             <a:ext cx="1828800" cy="292608"/>
           </a:xfrm>
           <a:prstGeom prst="rect">
@@ -25933,7 +26196,7 @@
         </p:nvSpPr>
         <p:spPr>
           <a:xfrm>
-            <a:off x="2938272" y="2569464"/>
+            <a:off x="2221992" y="2569464"/>
             <a:ext cx="1828800" cy="201168"/>
           </a:xfrm>
           <a:prstGeom prst="rect">
@@ -25958,7 +26221,7 @@
                 <a:ea typeface="Calibri" pitchFamily="34" charset="-122"/>
                 <a:cs typeface="Calibri" pitchFamily="34" charset="-120"/>
               </a:rPr>
-              <a:t>to finish or limit</a:t>
+              <a:t>to finish; the final part</a:t>
             </a:r>
             <a:endParaRPr lang="en-US" sz="850" dirty="0"/>
           </a:p>
@@ -25972,7 +26235,7 @@
         </p:nvSpPr>
         <p:spPr>
           <a:xfrm>
-            <a:off x="5803392" y="2258568"/>
+            <a:off x="4370832" y="2258568"/>
             <a:ext cx="1828800" cy="292608"/>
           </a:xfrm>
           <a:prstGeom prst="rect">
@@ -25981,11 +26244,11 @@
             </a:avLst>
           </a:prstGeom>
           <a:solidFill>
-            <a:srgbClr val="DDD6FE"/>
+            <a:srgbClr val="FCE7F3"/>
           </a:solidFill>
           <a:ln w="19050">
             <a:solidFill>
-              <a:srgbClr val="7C3AED"/>
+              <a:srgbClr val="DB2777"/>
             </a:solidFill>
             <a:prstDash val="solid"/>
           </a:ln>
@@ -26006,7 +26269,7 @@
         </p:nvSpPr>
         <p:spPr>
           <a:xfrm>
-            <a:off x="5803392" y="2258568"/>
+            <a:off x="4370832" y="2258568"/>
             <a:ext cx="1828800" cy="292608"/>
           </a:xfrm>
           <a:prstGeom prst="rect">
@@ -26025,13 +26288,13 @@
             <a:r>
               <a:rPr lang="en-US" sz="1300" b="1" dirty="0">
                 <a:solidFill>
-                  <a:srgbClr val="4C1D95"/>
+                  <a:srgbClr val="9D174D"/>
                 </a:solidFill>
                 <a:latin typeface="Trebuchet MS" pitchFamily="34" charset="0"/>
                 <a:ea typeface="Trebuchet MS" pitchFamily="34" charset="-122"/>
                 <a:cs typeface="Trebuchet MS" pitchFamily="34" charset="-120"/>
               </a:rPr>
-              <a:t>less</a:t>
+              <a:t>ure</a:t>
             </a:r>
             <a:endParaRPr lang="en-US" sz="1300" dirty="0"/>
           </a:p>
@@ -26045,7 +26308,7 @@
         </p:nvSpPr>
         <p:spPr>
           <a:xfrm>
-            <a:off x="5803392" y="2569464"/>
+            <a:off x="4370832" y="2569464"/>
             <a:ext cx="1828800" cy="201168"/>
           </a:xfrm>
           <a:prstGeom prst="rect">
@@ -26070,7 +26333,7 @@
                 <a:ea typeface="Calibri" pitchFamily="34" charset="-122"/>
                 <a:cs typeface="Calibri" pitchFamily="34" charset="-120"/>
               </a:rPr>
-              <a:t>without</a:t>
+              <a:t>result of</a:t>
             </a:r>
             <a:endParaRPr lang="en-US" sz="850" dirty="0"/>
           </a:p>
@@ -26079,6 +26342,118 @@
       <p:sp>
         <p:nvSpPr>
           <p:cNvPr id="22" name="Shape 20"/>
+          <p:cNvSpPr/>
+          <p:nvPr/>
+        </p:nvSpPr>
+        <p:spPr>
+          <a:xfrm>
+            <a:off x="6519672" y="2258568"/>
+            <a:ext cx="1828800" cy="292608"/>
+          </a:xfrm>
+          <a:prstGeom prst="rect">
+            <a:avLst>
+              <a:gd name="adj" fmla="val 25000"/>
+            </a:avLst>
+          </a:prstGeom>
+          <a:solidFill>
+            <a:srgbClr val="FCE7F3"/>
+          </a:solidFill>
+          <a:ln w="19050">
+            <a:solidFill>
+              <a:srgbClr val="DB2777"/>
+            </a:solidFill>
+            <a:prstDash val="solid"/>
+          </a:ln>
+          <a:effectLst>
+            <a:outerShdw sx="100000" sy="100000" kx="0" ky="0" algn="bl" rotWithShape="0" blurRad="101600" dist="38100" dir="8100000">
+              <a:srgbClr val="000000">
+                <a:alpha val="12000"/>
+              </a:srgbClr>
+            </a:outerShdw>
+          </a:effectLst>
+        </p:spPr>
+      </p:sp>
+      <p:sp>
+        <p:nvSpPr>
+          <p:cNvPr id="23" name="Text 21"/>
+          <p:cNvSpPr/>
+          <p:nvPr/>
+        </p:nvSpPr>
+        <p:spPr>
+          <a:xfrm>
+            <a:off x="6519672" y="2258568"/>
+            <a:ext cx="1828800" cy="292608"/>
+          </a:xfrm>
+          <a:prstGeom prst="rect">
+            <a:avLst/>
+          </a:prstGeom>
+          <a:noFill/>
+          <a:ln/>
+        </p:spPr>
+        <p:txBody>
+          <a:bodyPr wrap="square" lIns="0" tIns="0" rIns="0" bIns="0" rtlCol="0" anchor="ctr"/>
+          <a:lstStyle/>
+          <a:p>
+            <a:pPr algn="ctr" indent="0" marL="0">
+              <a:buNone/>
+            </a:pPr>
+            <a:r>
+              <a:rPr lang="en-US" sz="1300" b="1" dirty="0">
+                <a:solidFill>
+                  <a:srgbClr val="9D174D"/>
+                </a:solidFill>
+                <a:latin typeface="Trebuchet MS" pitchFamily="34" charset="0"/>
+                <a:ea typeface="Trebuchet MS" pitchFamily="34" charset="-122"/>
+                <a:cs typeface="Trebuchet MS" pitchFamily="34" charset="-120"/>
+              </a:rPr>
+              <a:t>ing</a:t>
+            </a:r>
+            <a:endParaRPr lang="en-US" sz="1300" dirty="0"/>
+          </a:p>
+        </p:txBody>
+      </p:sp>
+      <p:sp>
+        <p:nvSpPr>
+          <p:cNvPr id="24" name="Text 22"/>
+          <p:cNvSpPr/>
+          <p:nvPr/>
+        </p:nvSpPr>
+        <p:spPr>
+          <a:xfrm>
+            <a:off x="6519672" y="2569464"/>
+            <a:ext cx="1828800" cy="201168"/>
+          </a:xfrm>
+          <a:prstGeom prst="rect">
+            <a:avLst/>
+          </a:prstGeom>
+          <a:noFill/>
+          <a:ln/>
+        </p:spPr>
+        <p:txBody>
+          <a:bodyPr wrap="square" lIns="0" tIns="0" rIns="0" bIns="0" rtlCol="0" anchor="t"/>
+          <a:lstStyle/>
+          <a:p>
+            <a:pPr algn="ctr" indent="0" marL="0">
+              <a:buNone/>
+            </a:pPr>
+            <a:r>
+              <a:rPr lang="en-US" sz="850" dirty="0">
+                <a:solidFill>
+                  <a:srgbClr val="475569"/>
+                </a:solidFill>
+                <a:latin typeface="Calibri" pitchFamily="34" charset="0"/>
+                <a:ea typeface="Calibri" pitchFamily="34" charset="-122"/>
+                <a:cs typeface="Calibri" pitchFamily="34" charset="-120"/>
+              </a:rPr>
+              <a:t>happening now</a:t>
+            </a:r>
+            <a:endParaRPr lang="en-US" sz="850" dirty="0"/>
+          </a:p>
+        </p:txBody>
+      </p:sp>
+      <p:sp>
+        <p:nvSpPr>
+          <p:cNvPr id="25" name="Shape 23"/>
           <p:cNvSpPr/>
           <p:nvPr/>
         </p:nvSpPr>
@@ -26105,7 +26480,7 @@
       </p:sp>
       <p:sp>
         <p:nvSpPr>
-          <p:cNvPr id="23" name="Text 21"/>
+          <p:cNvPr id="26" name="Text 24"/>
           <p:cNvSpPr/>
           <p:nvPr/>
         </p:nvSpPr>
@@ -26144,7 +26519,7 @@
       </p:sp>
       <p:sp>
         <p:nvSpPr>
-          <p:cNvPr id="24" name="Shape 22"/>
+          <p:cNvPr id="27" name="Shape 25"/>
           <p:cNvSpPr/>
           <p:nvPr/>
         </p:nvSpPr>
@@ -26171,13 +26546,13 @@
       </p:sp>
       <p:sp>
         <p:nvSpPr>
-          <p:cNvPr id="25" name="Shape 23"/>
-          <p:cNvSpPr/>
-          <p:nvPr/>
-        </p:nvSpPr>
-        <p:spPr>
-          <a:xfrm>
-            <a:off x="2999232" y="3364992"/>
+          <p:cNvPr id="28" name="Shape 26"/>
+          <p:cNvSpPr/>
+          <p:nvPr/>
+        </p:nvSpPr>
+        <p:spPr>
+          <a:xfrm>
+            <a:off x="2313432" y="3364992"/>
             <a:ext cx="1645920" cy="475488"/>
           </a:xfrm>
           <a:prstGeom prst="rect">
@@ -26198,13 +26573,13 @@
       </p:sp>
       <p:sp>
         <p:nvSpPr>
-          <p:cNvPr id="26" name="Text 24"/>
-          <p:cNvSpPr/>
-          <p:nvPr/>
-        </p:nvSpPr>
-        <p:spPr>
-          <a:xfrm>
-            <a:off x="2999232" y="3364992"/>
+          <p:cNvPr id="29" name="Text 27"/>
+          <p:cNvSpPr/>
+          <p:nvPr/>
+        </p:nvSpPr>
+        <p:spPr>
+          <a:xfrm>
+            <a:off x="2313432" y="3364992"/>
             <a:ext cx="1645920" cy="475488"/>
           </a:xfrm>
           <a:prstGeom prst="rect">
@@ -26229,7 +26604,7 @@
                 <a:ea typeface="Trebuchet MS" pitchFamily="34" charset="-122"/>
                 <a:cs typeface="Trebuchet MS" pitchFamily="34" charset="-120"/>
               </a:rPr>
-              <a:t>end</a:t>
+              <a:t>en</a:t>
             </a:r>
             <a:endParaRPr lang="en-US" sz="1400" dirty="0"/>
           </a:p>
@@ -26237,14 +26612,14 @@
       </p:sp>
       <p:sp>
         <p:nvSpPr>
-          <p:cNvPr id="27" name="Text 25"/>
-          <p:cNvSpPr/>
-          <p:nvPr/>
-        </p:nvSpPr>
-        <p:spPr>
-          <a:xfrm>
-            <a:off x="4645152" y="3364992"/>
-            <a:ext cx="1097280" cy="475488"/>
+          <p:cNvPr id="30" name="Text 28"/>
+          <p:cNvSpPr/>
+          <p:nvPr/>
+        </p:nvSpPr>
+        <p:spPr>
+          <a:xfrm>
+            <a:off x="3959352" y="3364992"/>
+            <a:ext cx="411480" cy="475488"/>
           </a:xfrm>
           <a:prstGeom prst="rect">
             <a:avLst/>
@@ -26276,13 +26651,13 @@
       </p:sp>
       <p:sp>
         <p:nvSpPr>
-          <p:cNvPr id="28" name="Shape 26"/>
-          <p:cNvSpPr/>
-          <p:nvPr/>
-        </p:nvSpPr>
-        <p:spPr>
-          <a:xfrm>
-            <a:off x="5742432" y="3364992"/>
+          <p:cNvPr id="31" name="Shape 29"/>
+          <p:cNvSpPr/>
+          <p:nvPr/>
+        </p:nvSpPr>
+        <p:spPr>
+          <a:xfrm>
+            <a:off x="4370832" y="3364992"/>
             <a:ext cx="1645920" cy="475488"/>
           </a:xfrm>
           <a:prstGeom prst="rect">
@@ -26303,13 +26678,13 @@
       </p:sp>
       <p:sp>
         <p:nvSpPr>
-          <p:cNvPr id="29" name="Text 27"/>
-          <p:cNvSpPr/>
-          <p:nvPr/>
-        </p:nvSpPr>
-        <p:spPr>
-          <a:xfrm>
-            <a:off x="5742432" y="3364992"/>
+          <p:cNvPr id="32" name="Text 30"/>
+          <p:cNvSpPr/>
+          <p:nvPr/>
+        </p:nvSpPr>
+        <p:spPr>
+          <a:xfrm>
+            <a:off x="4370832" y="3364992"/>
             <a:ext cx="1645920" cy="475488"/>
           </a:xfrm>
           <a:prstGeom prst="rect">
@@ -26334,7 +26709,7 @@
                 <a:ea typeface="Trebuchet MS" pitchFamily="34" charset="-122"/>
                 <a:cs typeface="Trebuchet MS" pitchFamily="34" charset="-120"/>
               </a:rPr>
-              <a:t>less</a:t>
+              <a:t>dur</a:t>
             </a:r>
             <a:endParaRPr lang="en-US" sz="1400" dirty="0"/>
           </a:p>
@@ -26342,7 +26717,112 @@
       </p:sp>
       <p:sp>
         <p:nvSpPr>
-          <p:cNvPr id="30" name="Shape 28"/>
+          <p:cNvPr id="33" name="Text 31"/>
+          <p:cNvSpPr/>
+          <p:nvPr/>
+        </p:nvSpPr>
+        <p:spPr>
+          <a:xfrm>
+            <a:off x="6016752" y="3364992"/>
+            <a:ext cx="411480" cy="475488"/>
+          </a:xfrm>
+          <a:prstGeom prst="rect">
+            <a:avLst/>
+          </a:prstGeom>
+          <a:noFill/>
+          <a:ln/>
+        </p:spPr>
+        <p:txBody>
+          <a:bodyPr wrap="square" lIns="0" tIns="0" rIns="0" bIns="0" rtlCol="0" anchor="ctr"/>
+          <a:lstStyle/>
+          <a:p>
+            <a:pPr algn="ctr" indent="0" marL="0">
+              <a:buNone/>
+            </a:pPr>
+            <a:r>
+              <a:rPr lang="en-US" sz="1600" b="1" dirty="0">
+                <a:solidFill>
+                  <a:srgbClr val="0D9488"/>
+                </a:solidFill>
+                <a:latin typeface="Trebuchet MS" pitchFamily="34" charset="0"/>
+                <a:ea typeface="Trebuchet MS" pitchFamily="34" charset="-122"/>
+                <a:cs typeface="Trebuchet MS" pitchFamily="34" charset="-120"/>
+              </a:rPr>
+              <a:t>·</a:t>
+            </a:r>
+            <a:endParaRPr lang="en-US" sz="1600" dirty="0"/>
+          </a:p>
+        </p:txBody>
+      </p:sp>
+      <p:sp>
+        <p:nvSpPr>
+          <p:cNvPr id="34" name="Shape 32"/>
+          <p:cNvSpPr/>
+          <p:nvPr/>
+        </p:nvSpPr>
+        <p:spPr>
+          <a:xfrm>
+            <a:off x="6428232" y="3364992"/>
+            <a:ext cx="1645920" cy="475488"/>
+          </a:xfrm>
+          <a:prstGeom prst="rect">
+            <a:avLst>
+              <a:gd name="adj" fmla="val 9615"/>
+            </a:avLst>
+          </a:prstGeom>
+          <a:solidFill>
+            <a:srgbClr val="FFFFFF"/>
+          </a:solidFill>
+          <a:ln w="12700">
+            <a:solidFill>
+              <a:srgbClr val="0D9488"/>
+            </a:solidFill>
+            <a:prstDash val="solid"/>
+          </a:ln>
+        </p:spPr>
+      </p:sp>
+      <p:sp>
+        <p:nvSpPr>
+          <p:cNvPr id="35" name="Text 33"/>
+          <p:cNvSpPr/>
+          <p:nvPr/>
+        </p:nvSpPr>
+        <p:spPr>
+          <a:xfrm>
+            <a:off x="6428232" y="3364992"/>
+            <a:ext cx="1645920" cy="475488"/>
+          </a:xfrm>
+          <a:prstGeom prst="rect">
+            <a:avLst/>
+          </a:prstGeom>
+          <a:noFill/>
+          <a:ln/>
+        </p:spPr>
+        <p:txBody>
+          <a:bodyPr wrap="square" lIns="0" tIns="0" rIns="0" bIns="0" rtlCol="0" anchor="ctr"/>
+          <a:lstStyle/>
+          <a:p>
+            <a:pPr algn="ctr" indent="0" marL="0">
+              <a:buNone/>
+            </a:pPr>
+            <a:r>
+              <a:rPr lang="en-US" sz="1400" b="1" dirty="0">
+                <a:solidFill>
+                  <a:srgbClr val="0D9488"/>
+                </a:solidFill>
+                <a:latin typeface="Trebuchet MS" pitchFamily="34" charset="0"/>
+                <a:ea typeface="Trebuchet MS" pitchFamily="34" charset="-122"/>
+                <a:cs typeface="Trebuchet MS" pitchFamily="34" charset="-120"/>
+              </a:rPr>
+              <a:t>ing</a:t>
+            </a:r>
+            <a:endParaRPr lang="en-US" sz="1400" dirty="0"/>
+          </a:p>
+        </p:txBody>
+      </p:sp>
+      <p:sp>
+        <p:nvSpPr>
+          <p:cNvPr id="36" name="Shape 34"/>
           <p:cNvSpPr/>
           <p:nvPr/>
         </p:nvSpPr>
@@ -26369,7 +26849,7 @@
       </p:sp>
       <p:sp>
         <p:nvSpPr>
-          <p:cNvPr id="31" name="Text 29"/>
+          <p:cNvPr id="37" name="Text 35"/>
           <p:cNvSpPr/>
           <p:nvPr/>
         </p:nvSpPr>
@@ -26408,7 +26888,7 @@
       </p:sp>
       <p:sp>
         <p:nvSpPr>
-          <p:cNvPr id="32" name="Shape 30"/>
+          <p:cNvPr id="38" name="Shape 36"/>
           <p:cNvSpPr/>
           <p:nvPr/>
         </p:nvSpPr>
@@ -26435,7 +26915,7 @@
       </p:sp>
       <p:sp>
         <p:nvSpPr>
-          <p:cNvPr id="33" name="Shape 31"/>
+          <p:cNvPr id="39" name="Shape 37"/>
           <p:cNvSpPr/>
           <p:nvPr/>
         </p:nvSpPr>
@@ -26462,7 +26942,7 @@
       </p:sp>
       <p:sp>
         <p:nvSpPr>
-          <p:cNvPr id="34" name="Text 32"/>
+          <p:cNvPr id="40" name="Text 38"/>
           <p:cNvSpPr/>
           <p:nvPr/>
         </p:nvSpPr>
@@ -26501,7 +26981,7 @@
       </p:sp>
       <p:sp>
         <p:nvSpPr>
-          <p:cNvPr id="35" name="Shape 33"/>
+          <p:cNvPr id="41" name="Shape 39"/>
           <p:cNvSpPr/>
           <p:nvPr/>
         </p:nvSpPr>
@@ -26528,7 +27008,7 @@
       </p:sp>
       <p:sp>
         <p:nvSpPr>
-          <p:cNvPr id="36" name="Text 34"/>
+          <p:cNvPr id="42" name="Text 40"/>
           <p:cNvSpPr/>
           <p:nvPr/>
         </p:nvSpPr>
@@ -26567,7 +27047,7 @@
       </p:sp>
       <p:sp>
         <p:nvSpPr>
-          <p:cNvPr id="37" name="Shape 35"/>
+          <p:cNvPr id="43" name="Shape 41"/>
           <p:cNvSpPr/>
           <p:nvPr/>
         </p:nvSpPr>
@@ -26594,7 +27074,7 @@
       </p:sp>
       <p:sp>
         <p:nvSpPr>
-          <p:cNvPr id="38" name="Text 36"/>
+          <p:cNvPr id="44" name="Text 42"/>
           <p:cNvSpPr/>
           <p:nvPr/>
         </p:nvSpPr>
@@ -26633,7 +27113,7 @@
       </p:sp>
       <p:sp>
         <p:nvSpPr>
-          <p:cNvPr id="39" name="Shape 37"/>
+          <p:cNvPr id="45" name="Shape 43"/>
           <p:cNvSpPr/>
           <p:nvPr/>
         </p:nvSpPr>
@@ -26660,7 +27140,7 @@
       </p:sp>
       <p:sp>
         <p:nvSpPr>
-          <p:cNvPr id="40" name="Text 38"/>
+          <p:cNvPr id="46" name="Text 44"/>
           <p:cNvSpPr/>
           <p:nvPr/>
         </p:nvSpPr>
@@ -26691,7 +27171,7 @@
                 <a:ea typeface="Trebuchet MS" pitchFamily="34" charset="-122"/>
                 <a:cs typeface="Trebuchet MS" pitchFamily="34" charset="-120"/>
               </a:rPr>
-              <a:t>l</a:t>
+              <a:t>ur</a:t>
             </a:r>
             <a:endParaRPr lang="en-US" sz="900" dirty="0"/>
           </a:p>
@@ -26699,7 +27179,7 @@
       </p:sp>
       <p:sp>
         <p:nvSpPr>
-          <p:cNvPr id="41" name="Shape 39"/>
+          <p:cNvPr id="47" name="Shape 45"/>
           <p:cNvSpPr/>
           <p:nvPr/>
         </p:nvSpPr>
@@ -26726,7 +27206,7 @@
       </p:sp>
       <p:sp>
         <p:nvSpPr>
-          <p:cNvPr id="42" name="Text 40"/>
+          <p:cNvPr id="48" name="Text 46"/>
           <p:cNvSpPr/>
           <p:nvPr/>
         </p:nvSpPr>
@@ -26757,7 +27237,7 @@
                 <a:ea typeface="Trebuchet MS" pitchFamily="34" charset="-122"/>
                 <a:cs typeface="Trebuchet MS" pitchFamily="34" charset="-120"/>
               </a:rPr>
-              <a:t>e</a:t>
+              <a:t>i</a:t>
             </a:r>
             <a:endParaRPr lang="en-US" sz="900" dirty="0"/>
           </a:p>
@@ -26765,7 +27245,7 @@
       </p:sp>
       <p:sp>
         <p:nvSpPr>
-          <p:cNvPr id="43" name="Shape 41"/>
+          <p:cNvPr id="49" name="Shape 47"/>
           <p:cNvSpPr/>
           <p:nvPr/>
         </p:nvSpPr>
@@ -26792,7 +27272,7 @@
       </p:sp>
       <p:sp>
         <p:nvSpPr>
-          <p:cNvPr id="44" name="Text 42"/>
+          <p:cNvPr id="50" name="Text 48"/>
           <p:cNvSpPr/>
           <p:nvPr/>
         </p:nvSpPr>
@@ -26823,7 +27303,7 @@
                 <a:ea typeface="Trebuchet MS" pitchFamily="34" charset="-122"/>
                 <a:cs typeface="Trebuchet MS" pitchFamily="34" charset="-120"/>
               </a:rPr>
-              <a:t>ss</a:t>
+              <a:t>ng</a:t>
             </a:r>
             <a:endParaRPr lang="en-US" sz="900" dirty="0"/>
           </a:p>
@@ -27115,7 +27595,7 @@
                 <a:ea typeface="Calibri" pitchFamily="34" charset="-122"/>
                 <a:cs typeface="Calibri" pitchFamily="34" charset="-120"/>
               </a:rPr>
-              <a:t>Word Labs  •  wordlabs.app  •  Root: 'end' = to finish, stop, or limit</a:t>
+              <a:t>Word Labs  •  wordlabs.app  •  Root: 'end' = to finish; the final part</a:t>
             </a:r>
             <a:endParaRPr lang="en-US" sz="800" dirty="0"/>
           </a:p>
@@ -27254,7 +27734,7 @@
                 <a:ea typeface="Trebuchet MS" pitchFamily="34" charset="-122"/>
                 <a:cs typeface="Trebuchet MS" pitchFamily="34" charset="-120"/>
               </a:rPr>
-              <a:t>blending</a:t>
+              <a:t>endurance</a:t>
             </a:r>
             <a:endParaRPr lang="en-US" sz="2800" dirty="0"/>
           </a:p>
@@ -27942,7 +28422,7 @@
                 <a:ea typeface="Calibri" pitchFamily="34" charset="-122"/>
                 <a:cs typeface="Calibri" pitchFamily="34" charset="-120"/>
               </a:rPr>
-              <a:t>Word Labs  •  wordlabs.app  •  Root: 'end' = to finish, stop, or limit</a:t>
+              <a:t>Word Labs  •  wordlabs.app  •  Root: 'end' = to finish; the final part</a:t>
             </a:r>
             <a:endParaRPr lang="en-US" sz="800" dirty="0"/>
           </a:p>
@@ -28081,7 +28561,7 @@
                 <a:ea typeface="Trebuchet MS" pitchFamily="34" charset="-122"/>
                 <a:cs typeface="Trebuchet MS" pitchFamily="34" charset="-120"/>
               </a:rPr>
-              <a:t>blending</a:t>
+              <a:t>endurance</a:t>
             </a:r>
             <a:endParaRPr lang="en-US" sz="2800" dirty="0"/>
           </a:p>
@@ -28161,7 +28641,7 @@
         </p:nvSpPr>
         <p:spPr>
           <a:xfrm>
-            <a:off x="2938272" y="2258568"/>
+            <a:off x="2221992" y="2258568"/>
             <a:ext cx="1828800" cy="292608"/>
           </a:xfrm>
           <a:prstGeom prst="rect">
@@ -28170,11 +28650,11 @@
             </a:avLst>
           </a:prstGeom>
           <a:solidFill>
-            <a:srgbClr val="DDD6FE"/>
+            <a:srgbClr val="CCFBF1"/>
           </a:solidFill>
           <a:ln w="19050">
             <a:solidFill>
-              <a:srgbClr val="7C3AED"/>
+              <a:srgbClr val="0D9488"/>
             </a:solidFill>
             <a:prstDash val="solid"/>
           </a:ln>
@@ -28195,7 +28675,7 @@
         </p:nvSpPr>
         <p:spPr>
           <a:xfrm>
-            <a:off x="2938272" y="2258568"/>
+            <a:off x="2221992" y="2258568"/>
             <a:ext cx="1828800" cy="292608"/>
           </a:xfrm>
           <a:prstGeom prst="rect">
@@ -28214,13 +28694,13 @@
             <a:r>
               <a:rPr lang="en-US" sz="1300" b="1" dirty="0">
                 <a:solidFill>
-                  <a:srgbClr val="4C1D95"/>
+                  <a:srgbClr val="0F766E"/>
                 </a:solidFill>
                 <a:latin typeface="Trebuchet MS" pitchFamily="34" charset="0"/>
                 <a:ea typeface="Trebuchet MS" pitchFamily="34" charset="-122"/>
                 <a:cs typeface="Trebuchet MS" pitchFamily="34" charset="-120"/>
               </a:rPr>
-              <a:t>blend</a:t>
+              <a:t>end</a:t>
             </a:r>
             <a:endParaRPr lang="en-US" sz="1300" dirty="0"/>
           </a:p>
@@ -28234,7 +28714,7 @@
         </p:nvSpPr>
         <p:spPr>
           <a:xfrm>
-            <a:off x="2938272" y="2569464"/>
+            <a:off x="2221992" y="2569464"/>
             <a:ext cx="1828800" cy="201168"/>
           </a:xfrm>
           <a:prstGeom prst="rect">
@@ -28259,7 +28739,7 @@
                 <a:ea typeface="Calibri" pitchFamily="34" charset="-122"/>
                 <a:cs typeface="Calibri" pitchFamily="34" charset="-120"/>
               </a:rPr>
-              <a:t>to mix together</a:t>
+              <a:t>to finish; the final part</a:t>
             </a:r>
             <a:endParaRPr lang="en-US" sz="850" dirty="0"/>
           </a:p>
@@ -28273,7 +28753,7 @@
         </p:nvSpPr>
         <p:spPr>
           <a:xfrm>
-            <a:off x="5803392" y="2258568"/>
+            <a:off x="4370832" y="2258568"/>
             <a:ext cx="1828800" cy="292608"/>
           </a:xfrm>
           <a:prstGeom prst="rect">
@@ -28307,7 +28787,7 @@
         </p:nvSpPr>
         <p:spPr>
           <a:xfrm>
-            <a:off x="5803392" y="2258568"/>
+            <a:off x="4370832" y="2258568"/>
             <a:ext cx="1828800" cy="292608"/>
           </a:xfrm>
           <a:prstGeom prst="rect">
@@ -28332,7 +28812,7 @@
                 <a:ea typeface="Trebuchet MS" pitchFamily="34" charset="-122"/>
                 <a:cs typeface="Trebuchet MS" pitchFamily="34" charset="-120"/>
               </a:rPr>
-              <a:t>ing</a:t>
+              <a:t>ure</a:t>
             </a:r>
             <a:endParaRPr lang="en-US" sz="1300" dirty="0"/>
           </a:p>
@@ -28346,7 +28826,7 @@
         </p:nvSpPr>
         <p:spPr>
           <a:xfrm>
-            <a:off x="5803392" y="2569464"/>
+            <a:off x="4370832" y="2569464"/>
             <a:ext cx="1828800" cy="201168"/>
           </a:xfrm>
           <a:prstGeom prst="rect">
@@ -28371,7 +28851,7 @@
                 <a:ea typeface="Calibri" pitchFamily="34" charset="-122"/>
                 <a:cs typeface="Calibri" pitchFamily="34" charset="-120"/>
               </a:rPr>
-              <a:t>action happening now</a:t>
+              <a:t>result of</a:t>
             </a:r>
             <a:endParaRPr lang="en-US" sz="850" dirty="0"/>
           </a:p>
@@ -28380,6 +28860,118 @@
       <p:sp>
         <p:nvSpPr>
           <p:cNvPr id="22" name="Shape 20"/>
+          <p:cNvSpPr/>
+          <p:nvPr/>
+        </p:nvSpPr>
+        <p:spPr>
+          <a:xfrm>
+            <a:off x="6519672" y="2258568"/>
+            <a:ext cx="1828800" cy="292608"/>
+          </a:xfrm>
+          <a:prstGeom prst="rect">
+            <a:avLst>
+              <a:gd name="adj" fmla="val 25000"/>
+            </a:avLst>
+          </a:prstGeom>
+          <a:solidFill>
+            <a:srgbClr val="FCE7F3"/>
+          </a:solidFill>
+          <a:ln w="19050">
+            <a:solidFill>
+              <a:srgbClr val="DB2777"/>
+            </a:solidFill>
+            <a:prstDash val="solid"/>
+          </a:ln>
+          <a:effectLst>
+            <a:outerShdw sx="100000" sy="100000" kx="0" ky="0" algn="bl" rotWithShape="0" blurRad="101600" dist="38100" dir="8100000">
+              <a:srgbClr val="000000">
+                <a:alpha val="12000"/>
+              </a:srgbClr>
+            </a:outerShdw>
+          </a:effectLst>
+        </p:spPr>
+      </p:sp>
+      <p:sp>
+        <p:nvSpPr>
+          <p:cNvPr id="23" name="Text 21"/>
+          <p:cNvSpPr/>
+          <p:nvPr/>
+        </p:nvSpPr>
+        <p:spPr>
+          <a:xfrm>
+            <a:off x="6519672" y="2258568"/>
+            <a:ext cx="1828800" cy="292608"/>
+          </a:xfrm>
+          <a:prstGeom prst="rect">
+            <a:avLst/>
+          </a:prstGeom>
+          <a:noFill/>
+          <a:ln/>
+        </p:spPr>
+        <p:txBody>
+          <a:bodyPr wrap="square" lIns="0" tIns="0" rIns="0" bIns="0" rtlCol="0" anchor="ctr"/>
+          <a:lstStyle/>
+          <a:p>
+            <a:pPr algn="ctr" indent="0" marL="0">
+              <a:buNone/>
+            </a:pPr>
+            <a:r>
+              <a:rPr lang="en-US" sz="1300" b="1" dirty="0">
+                <a:solidFill>
+                  <a:srgbClr val="9D174D"/>
+                </a:solidFill>
+                <a:latin typeface="Trebuchet MS" pitchFamily="34" charset="0"/>
+                <a:ea typeface="Trebuchet MS" pitchFamily="34" charset="-122"/>
+                <a:cs typeface="Trebuchet MS" pitchFamily="34" charset="-120"/>
+              </a:rPr>
+              <a:t>ance</a:t>
+            </a:r>
+            <a:endParaRPr lang="en-US" sz="1300" dirty="0"/>
+          </a:p>
+        </p:txBody>
+      </p:sp>
+      <p:sp>
+        <p:nvSpPr>
+          <p:cNvPr id="24" name="Text 22"/>
+          <p:cNvSpPr/>
+          <p:nvPr/>
+        </p:nvSpPr>
+        <p:spPr>
+          <a:xfrm>
+            <a:off x="6519672" y="2569464"/>
+            <a:ext cx="1828800" cy="201168"/>
+          </a:xfrm>
+          <a:prstGeom prst="rect">
+            <a:avLst/>
+          </a:prstGeom>
+          <a:noFill/>
+          <a:ln/>
+        </p:spPr>
+        <p:txBody>
+          <a:bodyPr wrap="square" lIns="0" tIns="0" rIns="0" bIns="0" rtlCol="0" anchor="t"/>
+          <a:lstStyle/>
+          <a:p>
+            <a:pPr algn="ctr" indent="0" marL="0">
+              <a:buNone/>
+            </a:pPr>
+            <a:r>
+              <a:rPr lang="en-US" sz="850" dirty="0">
+                <a:solidFill>
+                  <a:srgbClr val="475569"/>
+                </a:solidFill>
+                <a:latin typeface="Calibri" pitchFamily="34" charset="0"/>
+                <a:ea typeface="Calibri" pitchFamily="34" charset="-122"/>
+                <a:cs typeface="Calibri" pitchFamily="34" charset="-120"/>
+              </a:rPr>
+              <a:t>state of</a:t>
+            </a:r>
+            <a:endParaRPr lang="en-US" sz="850" dirty="0"/>
+          </a:p>
+        </p:txBody>
+      </p:sp>
+      <p:sp>
+        <p:nvSpPr>
+          <p:cNvPr id="25" name="Shape 23"/>
           <p:cNvSpPr/>
           <p:nvPr/>
         </p:nvSpPr>
@@ -28406,7 +28998,7 @@
       </p:sp>
       <p:sp>
         <p:nvSpPr>
-          <p:cNvPr id="23" name="Text 21"/>
+          <p:cNvPr id="26" name="Text 24"/>
           <p:cNvSpPr/>
           <p:nvPr/>
         </p:nvSpPr>
@@ -28445,7 +29037,7 @@
       </p:sp>
       <p:sp>
         <p:nvSpPr>
-          <p:cNvPr id="24" name="Shape 22"/>
+          <p:cNvPr id="27" name="Shape 25"/>
           <p:cNvSpPr/>
           <p:nvPr/>
         </p:nvSpPr>
@@ -28472,7 +29064,7 @@
       </p:sp>
       <p:sp>
         <p:nvSpPr>
-          <p:cNvPr id="25" name="Text 23"/>
+          <p:cNvPr id="28" name="Text 26"/>
           <p:cNvSpPr/>
           <p:nvPr/>
         </p:nvSpPr>
@@ -28511,7 +29103,7 @@
       </p:sp>
       <p:sp>
         <p:nvSpPr>
-          <p:cNvPr id="26" name="Shape 24"/>
+          <p:cNvPr id="29" name="Shape 27"/>
           <p:cNvSpPr/>
           <p:nvPr/>
         </p:nvSpPr>
@@ -28538,7 +29130,7 @@
       </p:sp>
       <p:sp>
         <p:nvSpPr>
-          <p:cNvPr id="27" name="Text 25"/>
+          <p:cNvPr id="30" name="Text 28"/>
           <p:cNvSpPr/>
           <p:nvPr/>
         </p:nvSpPr>
@@ -28577,7 +29169,7 @@
       </p:sp>
       <p:sp>
         <p:nvSpPr>
-          <p:cNvPr id="28" name="Shape 26"/>
+          <p:cNvPr id="31" name="Shape 29"/>
           <p:cNvSpPr/>
           <p:nvPr/>
         </p:nvSpPr>
@@ -28604,7 +29196,7 @@
       </p:sp>
       <p:sp>
         <p:nvSpPr>
-          <p:cNvPr id="29" name="Text 27"/>
+          <p:cNvPr id="32" name="Text 30"/>
           <p:cNvSpPr/>
           <p:nvPr/>
         </p:nvSpPr>
@@ -28927,7 +29519,7 @@
                 <a:ea typeface="Calibri" pitchFamily="34" charset="-122"/>
                 <a:cs typeface="Calibri" pitchFamily="34" charset="-120"/>
               </a:rPr>
-              <a:t>Word Labs  •  wordlabs.app  •  Root: 'end' = to finish, stop, or limit</a:t>
+              <a:t>Word Labs  •  wordlabs.app  •  Root: 'end' = to finish; the final part</a:t>
             </a:r>
             <a:endParaRPr lang="en-US" sz="800" dirty="0"/>
           </a:p>
@@ -29066,7 +29658,7 @@
                 <a:ea typeface="Trebuchet MS" pitchFamily="34" charset="-122"/>
                 <a:cs typeface="Trebuchet MS" pitchFamily="34" charset="-120"/>
               </a:rPr>
-              <a:t>blending</a:t>
+              <a:t>endurance</a:t>
             </a:r>
             <a:endParaRPr lang="en-US" sz="2800" dirty="0"/>
           </a:p>
@@ -29146,7 +29738,7 @@
         </p:nvSpPr>
         <p:spPr>
           <a:xfrm>
-            <a:off x="2938272" y="2258568"/>
+            <a:off x="2221992" y="2258568"/>
             <a:ext cx="1828800" cy="292608"/>
           </a:xfrm>
           <a:prstGeom prst="rect">
@@ -29155,11 +29747,11 @@
             </a:avLst>
           </a:prstGeom>
           <a:solidFill>
-            <a:srgbClr val="DDD6FE"/>
+            <a:srgbClr val="CCFBF1"/>
           </a:solidFill>
           <a:ln w="19050">
             <a:solidFill>
-              <a:srgbClr val="7C3AED"/>
+              <a:srgbClr val="0D9488"/>
             </a:solidFill>
             <a:prstDash val="solid"/>
           </a:ln>
@@ -29180,7 +29772,7 @@
         </p:nvSpPr>
         <p:spPr>
           <a:xfrm>
-            <a:off x="2938272" y="2258568"/>
+            <a:off x="2221992" y="2258568"/>
             <a:ext cx="1828800" cy="292608"/>
           </a:xfrm>
           <a:prstGeom prst="rect">
@@ -29199,13 +29791,13 @@
             <a:r>
               <a:rPr lang="en-US" sz="1300" b="1" dirty="0">
                 <a:solidFill>
-                  <a:srgbClr val="4C1D95"/>
+                  <a:srgbClr val="0F766E"/>
                 </a:solidFill>
                 <a:latin typeface="Trebuchet MS" pitchFamily="34" charset="0"/>
                 <a:ea typeface="Trebuchet MS" pitchFamily="34" charset="-122"/>
                 <a:cs typeface="Trebuchet MS" pitchFamily="34" charset="-120"/>
               </a:rPr>
-              <a:t>blend</a:t>
+              <a:t>end</a:t>
             </a:r>
             <a:endParaRPr lang="en-US" sz="1300" dirty="0"/>
           </a:p>
@@ -29219,7 +29811,7 @@
         </p:nvSpPr>
         <p:spPr>
           <a:xfrm>
-            <a:off x="2938272" y="2569464"/>
+            <a:off x="2221992" y="2569464"/>
             <a:ext cx="1828800" cy="201168"/>
           </a:xfrm>
           <a:prstGeom prst="rect">
@@ -29244,7 +29836,7 @@
                 <a:ea typeface="Calibri" pitchFamily="34" charset="-122"/>
                 <a:cs typeface="Calibri" pitchFamily="34" charset="-120"/>
               </a:rPr>
-              <a:t>to mix together</a:t>
+              <a:t>to finish; the final part</a:t>
             </a:r>
             <a:endParaRPr lang="en-US" sz="850" dirty="0"/>
           </a:p>
@@ -29258,7 +29850,7 @@
         </p:nvSpPr>
         <p:spPr>
           <a:xfrm>
-            <a:off x="5803392" y="2258568"/>
+            <a:off x="4370832" y="2258568"/>
             <a:ext cx="1828800" cy="292608"/>
           </a:xfrm>
           <a:prstGeom prst="rect">
@@ -29292,7 +29884,7 @@
         </p:nvSpPr>
         <p:spPr>
           <a:xfrm>
-            <a:off x="5803392" y="2258568"/>
+            <a:off x="4370832" y="2258568"/>
             <a:ext cx="1828800" cy="292608"/>
           </a:xfrm>
           <a:prstGeom prst="rect">
@@ -29317,7 +29909,7 @@
                 <a:ea typeface="Trebuchet MS" pitchFamily="34" charset="-122"/>
                 <a:cs typeface="Trebuchet MS" pitchFamily="34" charset="-120"/>
               </a:rPr>
-              <a:t>ing</a:t>
+              <a:t>ure</a:t>
             </a:r>
             <a:endParaRPr lang="en-US" sz="1300" dirty="0"/>
           </a:p>
@@ -29331,7 +29923,7 @@
         </p:nvSpPr>
         <p:spPr>
           <a:xfrm>
-            <a:off x="5803392" y="2569464"/>
+            <a:off x="4370832" y="2569464"/>
             <a:ext cx="1828800" cy="201168"/>
           </a:xfrm>
           <a:prstGeom prst="rect">
@@ -29356,7 +29948,7 @@
                 <a:ea typeface="Calibri" pitchFamily="34" charset="-122"/>
                 <a:cs typeface="Calibri" pitchFamily="34" charset="-120"/>
               </a:rPr>
-              <a:t>action happening now</a:t>
+              <a:t>result of</a:t>
             </a:r>
             <a:endParaRPr lang="en-US" sz="850" dirty="0"/>
           </a:p>
@@ -29365,6 +29957,118 @@
       <p:sp>
         <p:nvSpPr>
           <p:cNvPr id="22" name="Shape 20"/>
+          <p:cNvSpPr/>
+          <p:nvPr/>
+        </p:nvSpPr>
+        <p:spPr>
+          <a:xfrm>
+            <a:off x="6519672" y="2258568"/>
+            <a:ext cx="1828800" cy="292608"/>
+          </a:xfrm>
+          <a:prstGeom prst="rect">
+            <a:avLst>
+              <a:gd name="adj" fmla="val 25000"/>
+            </a:avLst>
+          </a:prstGeom>
+          <a:solidFill>
+            <a:srgbClr val="FCE7F3"/>
+          </a:solidFill>
+          <a:ln w="19050">
+            <a:solidFill>
+              <a:srgbClr val="DB2777"/>
+            </a:solidFill>
+            <a:prstDash val="solid"/>
+          </a:ln>
+          <a:effectLst>
+            <a:outerShdw sx="100000" sy="100000" kx="0" ky="0" algn="bl" rotWithShape="0" blurRad="101600" dist="38100" dir="8100000">
+              <a:srgbClr val="000000">
+                <a:alpha val="12000"/>
+              </a:srgbClr>
+            </a:outerShdw>
+          </a:effectLst>
+        </p:spPr>
+      </p:sp>
+      <p:sp>
+        <p:nvSpPr>
+          <p:cNvPr id="23" name="Text 21"/>
+          <p:cNvSpPr/>
+          <p:nvPr/>
+        </p:nvSpPr>
+        <p:spPr>
+          <a:xfrm>
+            <a:off x="6519672" y="2258568"/>
+            <a:ext cx="1828800" cy="292608"/>
+          </a:xfrm>
+          <a:prstGeom prst="rect">
+            <a:avLst/>
+          </a:prstGeom>
+          <a:noFill/>
+          <a:ln/>
+        </p:spPr>
+        <p:txBody>
+          <a:bodyPr wrap="square" lIns="0" tIns="0" rIns="0" bIns="0" rtlCol="0" anchor="ctr"/>
+          <a:lstStyle/>
+          <a:p>
+            <a:pPr algn="ctr" indent="0" marL="0">
+              <a:buNone/>
+            </a:pPr>
+            <a:r>
+              <a:rPr lang="en-US" sz="1300" b="1" dirty="0">
+                <a:solidFill>
+                  <a:srgbClr val="9D174D"/>
+                </a:solidFill>
+                <a:latin typeface="Trebuchet MS" pitchFamily="34" charset="0"/>
+                <a:ea typeface="Trebuchet MS" pitchFamily="34" charset="-122"/>
+                <a:cs typeface="Trebuchet MS" pitchFamily="34" charset="-120"/>
+              </a:rPr>
+              <a:t>ance</a:t>
+            </a:r>
+            <a:endParaRPr lang="en-US" sz="1300" dirty="0"/>
+          </a:p>
+        </p:txBody>
+      </p:sp>
+      <p:sp>
+        <p:nvSpPr>
+          <p:cNvPr id="24" name="Text 22"/>
+          <p:cNvSpPr/>
+          <p:nvPr/>
+        </p:nvSpPr>
+        <p:spPr>
+          <a:xfrm>
+            <a:off x="6519672" y="2569464"/>
+            <a:ext cx="1828800" cy="201168"/>
+          </a:xfrm>
+          <a:prstGeom prst="rect">
+            <a:avLst/>
+          </a:prstGeom>
+          <a:noFill/>
+          <a:ln/>
+        </p:spPr>
+        <p:txBody>
+          <a:bodyPr wrap="square" lIns="0" tIns="0" rIns="0" bIns="0" rtlCol="0" anchor="t"/>
+          <a:lstStyle/>
+          <a:p>
+            <a:pPr algn="ctr" indent="0" marL="0">
+              <a:buNone/>
+            </a:pPr>
+            <a:r>
+              <a:rPr lang="en-US" sz="850" dirty="0">
+                <a:solidFill>
+                  <a:srgbClr val="475569"/>
+                </a:solidFill>
+                <a:latin typeface="Calibri" pitchFamily="34" charset="0"/>
+                <a:ea typeface="Calibri" pitchFamily="34" charset="-122"/>
+                <a:cs typeface="Calibri" pitchFamily="34" charset="-120"/>
+              </a:rPr>
+              <a:t>state of</a:t>
+            </a:r>
+            <a:endParaRPr lang="en-US" sz="850" dirty="0"/>
+          </a:p>
+        </p:txBody>
+      </p:sp>
+      <p:sp>
+        <p:nvSpPr>
+          <p:cNvPr id="25" name="Shape 23"/>
           <p:cNvSpPr/>
           <p:nvPr/>
         </p:nvSpPr>
@@ -29391,7 +30095,7 @@
       </p:sp>
       <p:sp>
         <p:nvSpPr>
-          <p:cNvPr id="23" name="Text 21"/>
+          <p:cNvPr id="26" name="Text 24"/>
           <p:cNvSpPr/>
           <p:nvPr/>
         </p:nvSpPr>
@@ -29430,7 +30134,7 @@
       </p:sp>
       <p:sp>
         <p:nvSpPr>
-          <p:cNvPr id="24" name="Shape 22"/>
+          <p:cNvPr id="27" name="Shape 25"/>
           <p:cNvSpPr/>
           <p:nvPr/>
         </p:nvSpPr>
@@ -29457,13 +30161,13 @@
       </p:sp>
       <p:sp>
         <p:nvSpPr>
-          <p:cNvPr id="25" name="Shape 23"/>
-          <p:cNvSpPr/>
-          <p:nvPr/>
-        </p:nvSpPr>
-        <p:spPr>
-          <a:xfrm>
-            <a:off x="2999232" y="3364992"/>
+          <p:cNvPr id="28" name="Shape 26"/>
+          <p:cNvSpPr/>
+          <p:nvPr/>
+        </p:nvSpPr>
+        <p:spPr>
+          <a:xfrm>
+            <a:off x="2313432" y="3364992"/>
             <a:ext cx="1645920" cy="475488"/>
           </a:xfrm>
           <a:prstGeom prst="rect">
@@ -29484,13 +30188,13 @@
       </p:sp>
       <p:sp>
         <p:nvSpPr>
-          <p:cNvPr id="26" name="Text 24"/>
-          <p:cNvSpPr/>
-          <p:nvPr/>
-        </p:nvSpPr>
-        <p:spPr>
-          <a:xfrm>
-            <a:off x="2999232" y="3364992"/>
+          <p:cNvPr id="29" name="Text 27"/>
+          <p:cNvSpPr/>
+          <p:nvPr/>
+        </p:nvSpPr>
+        <p:spPr>
+          <a:xfrm>
+            <a:off x="2313432" y="3364992"/>
             <a:ext cx="1645920" cy="475488"/>
           </a:xfrm>
           <a:prstGeom prst="rect">
@@ -29515,7 +30219,7 @@
                 <a:ea typeface="Trebuchet MS" pitchFamily="34" charset="-122"/>
                 <a:cs typeface="Trebuchet MS" pitchFamily="34" charset="-120"/>
               </a:rPr>
-              <a:t>blend</a:t>
+              <a:t>en</a:t>
             </a:r>
             <a:endParaRPr lang="en-US" sz="1400" dirty="0"/>
           </a:p>
@@ -29523,14 +30227,14 @@
       </p:sp>
       <p:sp>
         <p:nvSpPr>
-          <p:cNvPr id="27" name="Text 25"/>
-          <p:cNvSpPr/>
-          <p:nvPr/>
-        </p:nvSpPr>
-        <p:spPr>
-          <a:xfrm>
-            <a:off x="4645152" y="3364992"/>
-            <a:ext cx="1097280" cy="475488"/>
+          <p:cNvPr id="30" name="Text 28"/>
+          <p:cNvSpPr/>
+          <p:nvPr/>
+        </p:nvSpPr>
+        <p:spPr>
+          <a:xfrm>
+            <a:off x="3959352" y="3364992"/>
+            <a:ext cx="411480" cy="475488"/>
           </a:xfrm>
           <a:prstGeom prst="rect">
             <a:avLst/>
@@ -29562,13 +30266,13 @@
       </p:sp>
       <p:sp>
         <p:nvSpPr>
-          <p:cNvPr id="28" name="Shape 26"/>
-          <p:cNvSpPr/>
-          <p:nvPr/>
-        </p:nvSpPr>
-        <p:spPr>
-          <a:xfrm>
-            <a:off x="5742432" y="3364992"/>
+          <p:cNvPr id="31" name="Shape 29"/>
+          <p:cNvSpPr/>
+          <p:nvPr/>
+        </p:nvSpPr>
+        <p:spPr>
+          <a:xfrm>
+            <a:off x="4370832" y="3364992"/>
             <a:ext cx="1645920" cy="475488"/>
           </a:xfrm>
           <a:prstGeom prst="rect">
@@ -29589,13 +30293,13 @@
       </p:sp>
       <p:sp>
         <p:nvSpPr>
-          <p:cNvPr id="29" name="Text 27"/>
-          <p:cNvSpPr/>
-          <p:nvPr/>
-        </p:nvSpPr>
-        <p:spPr>
-          <a:xfrm>
-            <a:off x="5742432" y="3364992"/>
+          <p:cNvPr id="32" name="Text 30"/>
+          <p:cNvSpPr/>
+          <p:nvPr/>
+        </p:nvSpPr>
+        <p:spPr>
+          <a:xfrm>
+            <a:off x="4370832" y="3364992"/>
             <a:ext cx="1645920" cy="475488"/>
           </a:xfrm>
           <a:prstGeom prst="rect">
@@ -29620,7 +30324,7 @@
                 <a:ea typeface="Trebuchet MS" pitchFamily="34" charset="-122"/>
                 <a:cs typeface="Trebuchet MS" pitchFamily="34" charset="-120"/>
               </a:rPr>
-              <a:t>ing</a:t>
+              <a:t>dur</a:t>
             </a:r>
             <a:endParaRPr lang="en-US" sz="1400" dirty="0"/>
           </a:p>
@@ -29628,7 +30332,112 @@
       </p:sp>
       <p:sp>
         <p:nvSpPr>
-          <p:cNvPr id="30" name="Shape 28"/>
+          <p:cNvPr id="33" name="Text 31"/>
+          <p:cNvSpPr/>
+          <p:nvPr/>
+        </p:nvSpPr>
+        <p:spPr>
+          <a:xfrm>
+            <a:off x="6016752" y="3364992"/>
+            <a:ext cx="411480" cy="475488"/>
+          </a:xfrm>
+          <a:prstGeom prst="rect">
+            <a:avLst/>
+          </a:prstGeom>
+          <a:noFill/>
+          <a:ln/>
+        </p:spPr>
+        <p:txBody>
+          <a:bodyPr wrap="square" lIns="0" tIns="0" rIns="0" bIns="0" rtlCol="0" anchor="ctr"/>
+          <a:lstStyle/>
+          <a:p>
+            <a:pPr algn="ctr" indent="0" marL="0">
+              <a:buNone/>
+            </a:pPr>
+            <a:r>
+              <a:rPr lang="en-US" sz="1600" b="1" dirty="0">
+                <a:solidFill>
+                  <a:srgbClr val="0D9488"/>
+                </a:solidFill>
+                <a:latin typeface="Trebuchet MS" pitchFamily="34" charset="0"/>
+                <a:ea typeface="Trebuchet MS" pitchFamily="34" charset="-122"/>
+                <a:cs typeface="Trebuchet MS" pitchFamily="34" charset="-120"/>
+              </a:rPr>
+              <a:t>·</a:t>
+            </a:r>
+            <a:endParaRPr lang="en-US" sz="1600" dirty="0"/>
+          </a:p>
+        </p:txBody>
+      </p:sp>
+      <p:sp>
+        <p:nvSpPr>
+          <p:cNvPr id="34" name="Shape 32"/>
+          <p:cNvSpPr/>
+          <p:nvPr/>
+        </p:nvSpPr>
+        <p:spPr>
+          <a:xfrm>
+            <a:off x="6428232" y="3364992"/>
+            <a:ext cx="1645920" cy="475488"/>
+          </a:xfrm>
+          <a:prstGeom prst="rect">
+            <a:avLst>
+              <a:gd name="adj" fmla="val 9615"/>
+            </a:avLst>
+          </a:prstGeom>
+          <a:solidFill>
+            <a:srgbClr val="FFFFFF"/>
+          </a:solidFill>
+          <a:ln w="12700">
+            <a:solidFill>
+              <a:srgbClr val="0D9488"/>
+            </a:solidFill>
+            <a:prstDash val="solid"/>
+          </a:ln>
+        </p:spPr>
+      </p:sp>
+      <p:sp>
+        <p:nvSpPr>
+          <p:cNvPr id="35" name="Text 33"/>
+          <p:cNvSpPr/>
+          <p:nvPr/>
+        </p:nvSpPr>
+        <p:spPr>
+          <a:xfrm>
+            <a:off x="6428232" y="3364992"/>
+            <a:ext cx="1645920" cy="475488"/>
+          </a:xfrm>
+          <a:prstGeom prst="rect">
+            <a:avLst/>
+          </a:prstGeom>
+          <a:noFill/>
+          <a:ln/>
+        </p:spPr>
+        <p:txBody>
+          <a:bodyPr wrap="square" lIns="0" tIns="0" rIns="0" bIns="0" rtlCol="0" anchor="ctr"/>
+          <a:lstStyle/>
+          <a:p>
+            <a:pPr algn="ctr" indent="0" marL="0">
+              <a:buNone/>
+            </a:pPr>
+            <a:r>
+              <a:rPr lang="en-US" sz="1400" b="1" dirty="0">
+                <a:solidFill>
+                  <a:srgbClr val="0D9488"/>
+                </a:solidFill>
+                <a:latin typeface="Trebuchet MS" pitchFamily="34" charset="0"/>
+                <a:ea typeface="Trebuchet MS" pitchFamily="34" charset="-122"/>
+                <a:cs typeface="Trebuchet MS" pitchFamily="34" charset="-120"/>
+              </a:rPr>
+              <a:t>ance</a:t>
+            </a:r>
+            <a:endParaRPr lang="en-US" sz="1400" dirty="0"/>
+          </a:p>
+        </p:txBody>
+      </p:sp>
+      <p:sp>
+        <p:nvSpPr>
+          <p:cNvPr id="36" name="Shape 34"/>
           <p:cNvSpPr/>
           <p:nvPr/>
         </p:nvSpPr>
@@ -29655,7 +30464,7 @@
       </p:sp>
       <p:sp>
         <p:nvSpPr>
-          <p:cNvPr id="31" name="Text 29"/>
+          <p:cNvPr id="37" name="Text 35"/>
           <p:cNvSpPr/>
           <p:nvPr/>
         </p:nvSpPr>
@@ -29694,7 +30503,7 @@
       </p:sp>
       <p:sp>
         <p:nvSpPr>
-          <p:cNvPr id="32" name="Shape 30"/>
+          <p:cNvPr id="38" name="Shape 36"/>
           <p:cNvSpPr/>
           <p:nvPr/>
         </p:nvSpPr>
@@ -29721,7 +30530,7 @@
       </p:sp>
       <p:sp>
         <p:nvSpPr>
-          <p:cNvPr id="33" name="Text 31"/>
+          <p:cNvPr id="39" name="Text 37"/>
           <p:cNvSpPr/>
           <p:nvPr/>
         </p:nvSpPr>
@@ -30044,7 +30853,7 @@
                 <a:ea typeface="Calibri" pitchFamily="34" charset="-122"/>
                 <a:cs typeface="Calibri" pitchFamily="34" charset="-120"/>
               </a:rPr>
-              <a:t>Word Labs  •  wordlabs.app  •  Root: 'end' = to finish, stop, or limit</a:t>
+              <a:t>Word Labs  •  wordlabs.app  •  Root: 'end' = to finish; the final part</a:t>
             </a:r>
             <a:endParaRPr lang="en-US" sz="800" dirty="0"/>
           </a:p>
@@ -30183,7 +30992,7 @@
                 <a:ea typeface="Trebuchet MS" pitchFamily="34" charset="-122"/>
                 <a:cs typeface="Trebuchet MS" pitchFamily="34" charset="-120"/>
               </a:rPr>
-              <a:t>blending</a:t>
+              <a:t>endurance</a:t>
             </a:r>
             <a:endParaRPr lang="en-US" sz="2800" dirty="0"/>
           </a:p>
@@ -30263,7 +31072,7 @@
         </p:nvSpPr>
         <p:spPr>
           <a:xfrm>
-            <a:off x="2938272" y="2258568"/>
+            <a:off x="2221992" y="2258568"/>
             <a:ext cx="1828800" cy="292608"/>
           </a:xfrm>
           <a:prstGeom prst="rect">
@@ -30272,11 +31081,11 @@
             </a:avLst>
           </a:prstGeom>
           <a:solidFill>
-            <a:srgbClr val="DDD6FE"/>
+            <a:srgbClr val="CCFBF1"/>
           </a:solidFill>
           <a:ln w="19050">
             <a:solidFill>
-              <a:srgbClr val="7C3AED"/>
+              <a:srgbClr val="0D9488"/>
             </a:solidFill>
             <a:prstDash val="solid"/>
           </a:ln>
@@ -30297,7 +31106,7 @@
         </p:nvSpPr>
         <p:spPr>
           <a:xfrm>
-            <a:off x="2938272" y="2258568"/>
+            <a:off x="2221992" y="2258568"/>
             <a:ext cx="1828800" cy="292608"/>
           </a:xfrm>
           <a:prstGeom prst="rect">
@@ -30316,13 +31125,13 @@
             <a:r>
               <a:rPr lang="en-US" sz="1300" b="1" dirty="0">
                 <a:solidFill>
-                  <a:srgbClr val="4C1D95"/>
+                  <a:srgbClr val="0F766E"/>
                 </a:solidFill>
                 <a:latin typeface="Trebuchet MS" pitchFamily="34" charset="0"/>
                 <a:ea typeface="Trebuchet MS" pitchFamily="34" charset="-122"/>
                 <a:cs typeface="Trebuchet MS" pitchFamily="34" charset="-120"/>
               </a:rPr>
-              <a:t>blend</a:t>
+              <a:t>end</a:t>
             </a:r>
             <a:endParaRPr lang="en-US" sz="1300" dirty="0"/>
           </a:p>
@@ -30336,7 +31145,7 @@
         </p:nvSpPr>
         <p:spPr>
           <a:xfrm>
-            <a:off x="2938272" y="2569464"/>
+            <a:off x="2221992" y="2569464"/>
             <a:ext cx="1828800" cy="201168"/>
           </a:xfrm>
           <a:prstGeom prst="rect">
@@ -30361,7 +31170,7 @@
                 <a:ea typeface="Calibri" pitchFamily="34" charset="-122"/>
                 <a:cs typeface="Calibri" pitchFamily="34" charset="-120"/>
               </a:rPr>
-              <a:t>to mix together</a:t>
+              <a:t>to finish; the final part</a:t>
             </a:r>
             <a:endParaRPr lang="en-US" sz="850" dirty="0"/>
           </a:p>
@@ -30375,7 +31184,7 @@
         </p:nvSpPr>
         <p:spPr>
           <a:xfrm>
-            <a:off x="5803392" y="2258568"/>
+            <a:off x="4370832" y="2258568"/>
             <a:ext cx="1828800" cy="292608"/>
           </a:xfrm>
           <a:prstGeom prst="rect">
@@ -30409,7 +31218,7 @@
         </p:nvSpPr>
         <p:spPr>
           <a:xfrm>
-            <a:off x="5803392" y="2258568"/>
+            <a:off x="4370832" y="2258568"/>
             <a:ext cx="1828800" cy="292608"/>
           </a:xfrm>
           <a:prstGeom prst="rect">
@@ -30434,7 +31243,7 @@
                 <a:ea typeface="Trebuchet MS" pitchFamily="34" charset="-122"/>
                 <a:cs typeface="Trebuchet MS" pitchFamily="34" charset="-120"/>
               </a:rPr>
-              <a:t>ing</a:t>
+              <a:t>ure</a:t>
             </a:r>
             <a:endParaRPr lang="en-US" sz="1300" dirty="0"/>
           </a:p>
@@ -30448,7 +31257,7 @@
         </p:nvSpPr>
         <p:spPr>
           <a:xfrm>
-            <a:off x="5803392" y="2569464"/>
+            <a:off x="4370832" y="2569464"/>
             <a:ext cx="1828800" cy="201168"/>
           </a:xfrm>
           <a:prstGeom prst="rect">
@@ -30473,7 +31282,7 @@
                 <a:ea typeface="Calibri" pitchFamily="34" charset="-122"/>
                 <a:cs typeface="Calibri" pitchFamily="34" charset="-120"/>
               </a:rPr>
-              <a:t>action happening now</a:t>
+              <a:t>result of</a:t>
             </a:r>
             <a:endParaRPr lang="en-US" sz="850" dirty="0"/>
           </a:p>
@@ -30482,6 +31291,118 @@
       <p:sp>
         <p:nvSpPr>
           <p:cNvPr id="22" name="Shape 20"/>
+          <p:cNvSpPr/>
+          <p:nvPr/>
+        </p:nvSpPr>
+        <p:spPr>
+          <a:xfrm>
+            <a:off x="6519672" y="2258568"/>
+            <a:ext cx="1828800" cy="292608"/>
+          </a:xfrm>
+          <a:prstGeom prst="rect">
+            <a:avLst>
+              <a:gd name="adj" fmla="val 25000"/>
+            </a:avLst>
+          </a:prstGeom>
+          <a:solidFill>
+            <a:srgbClr val="FCE7F3"/>
+          </a:solidFill>
+          <a:ln w="19050">
+            <a:solidFill>
+              <a:srgbClr val="DB2777"/>
+            </a:solidFill>
+            <a:prstDash val="solid"/>
+          </a:ln>
+          <a:effectLst>
+            <a:outerShdw sx="100000" sy="100000" kx="0" ky="0" algn="bl" rotWithShape="0" blurRad="101600" dist="38100" dir="8100000">
+              <a:srgbClr val="000000">
+                <a:alpha val="12000"/>
+              </a:srgbClr>
+            </a:outerShdw>
+          </a:effectLst>
+        </p:spPr>
+      </p:sp>
+      <p:sp>
+        <p:nvSpPr>
+          <p:cNvPr id="23" name="Text 21"/>
+          <p:cNvSpPr/>
+          <p:nvPr/>
+        </p:nvSpPr>
+        <p:spPr>
+          <a:xfrm>
+            <a:off x="6519672" y="2258568"/>
+            <a:ext cx="1828800" cy="292608"/>
+          </a:xfrm>
+          <a:prstGeom prst="rect">
+            <a:avLst/>
+          </a:prstGeom>
+          <a:noFill/>
+          <a:ln/>
+        </p:spPr>
+        <p:txBody>
+          <a:bodyPr wrap="square" lIns="0" tIns="0" rIns="0" bIns="0" rtlCol="0" anchor="ctr"/>
+          <a:lstStyle/>
+          <a:p>
+            <a:pPr algn="ctr" indent="0" marL="0">
+              <a:buNone/>
+            </a:pPr>
+            <a:r>
+              <a:rPr lang="en-US" sz="1300" b="1" dirty="0">
+                <a:solidFill>
+                  <a:srgbClr val="9D174D"/>
+                </a:solidFill>
+                <a:latin typeface="Trebuchet MS" pitchFamily="34" charset="0"/>
+                <a:ea typeface="Trebuchet MS" pitchFamily="34" charset="-122"/>
+                <a:cs typeface="Trebuchet MS" pitchFamily="34" charset="-120"/>
+              </a:rPr>
+              <a:t>ance</a:t>
+            </a:r>
+            <a:endParaRPr lang="en-US" sz="1300" dirty="0"/>
+          </a:p>
+        </p:txBody>
+      </p:sp>
+      <p:sp>
+        <p:nvSpPr>
+          <p:cNvPr id="24" name="Text 22"/>
+          <p:cNvSpPr/>
+          <p:nvPr/>
+        </p:nvSpPr>
+        <p:spPr>
+          <a:xfrm>
+            <a:off x="6519672" y="2569464"/>
+            <a:ext cx="1828800" cy="201168"/>
+          </a:xfrm>
+          <a:prstGeom prst="rect">
+            <a:avLst/>
+          </a:prstGeom>
+          <a:noFill/>
+          <a:ln/>
+        </p:spPr>
+        <p:txBody>
+          <a:bodyPr wrap="square" lIns="0" tIns="0" rIns="0" bIns="0" rtlCol="0" anchor="t"/>
+          <a:lstStyle/>
+          <a:p>
+            <a:pPr algn="ctr" indent="0" marL="0">
+              <a:buNone/>
+            </a:pPr>
+            <a:r>
+              <a:rPr lang="en-US" sz="850" dirty="0">
+                <a:solidFill>
+                  <a:srgbClr val="475569"/>
+                </a:solidFill>
+                <a:latin typeface="Calibri" pitchFamily="34" charset="0"/>
+                <a:ea typeface="Calibri" pitchFamily="34" charset="-122"/>
+                <a:cs typeface="Calibri" pitchFamily="34" charset="-120"/>
+              </a:rPr>
+              <a:t>state of</a:t>
+            </a:r>
+            <a:endParaRPr lang="en-US" sz="850" dirty="0"/>
+          </a:p>
+        </p:txBody>
+      </p:sp>
+      <p:sp>
+        <p:nvSpPr>
+          <p:cNvPr id="25" name="Shape 23"/>
           <p:cNvSpPr/>
           <p:nvPr/>
         </p:nvSpPr>
@@ -30508,7 +31429,7 @@
       </p:sp>
       <p:sp>
         <p:nvSpPr>
-          <p:cNvPr id="23" name="Text 21"/>
+          <p:cNvPr id="26" name="Text 24"/>
           <p:cNvSpPr/>
           <p:nvPr/>
         </p:nvSpPr>
@@ -30547,7 +31468,7 @@
       </p:sp>
       <p:sp>
         <p:nvSpPr>
-          <p:cNvPr id="24" name="Shape 22"/>
+          <p:cNvPr id="27" name="Shape 25"/>
           <p:cNvSpPr/>
           <p:nvPr/>
         </p:nvSpPr>
@@ -30574,13 +31495,13 @@
       </p:sp>
       <p:sp>
         <p:nvSpPr>
-          <p:cNvPr id="25" name="Shape 23"/>
-          <p:cNvSpPr/>
-          <p:nvPr/>
-        </p:nvSpPr>
-        <p:spPr>
-          <a:xfrm>
-            <a:off x="2999232" y="3364992"/>
+          <p:cNvPr id="28" name="Shape 26"/>
+          <p:cNvSpPr/>
+          <p:nvPr/>
+        </p:nvSpPr>
+        <p:spPr>
+          <a:xfrm>
+            <a:off x="2313432" y="3364992"/>
             <a:ext cx="1645920" cy="475488"/>
           </a:xfrm>
           <a:prstGeom prst="rect">
@@ -30601,13 +31522,13 @@
       </p:sp>
       <p:sp>
         <p:nvSpPr>
-          <p:cNvPr id="26" name="Text 24"/>
-          <p:cNvSpPr/>
-          <p:nvPr/>
-        </p:nvSpPr>
-        <p:spPr>
-          <a:xfrm>
-            <a:off x="2999232" y="3364992"/>
+          <p:cNvPr id="29" name="Text 27"/>
+          <p:cNvSpPr/>
+          <p:nvPr/>
+        </p:nvSpPr>
+        <p:spPr>
+          <a:xfrm>
+            <a:off x="2313432" y="3364992"/>
             <a:ext cx="1645920" cy="475488"/>
           </a:xfrm>
           <a:prstGeom prst="rect">
@@ -30632,7 +31553,7 @@
                 <a:ea typeface="Trebuchet MS" pitchFamily="34" charset="-122"/>
                 <a:cs typeface="Trebuchet MS" pitchFamily="34" charset="-120"/>
               </a:rPr>
-              <a:t>blend</a:t>
+              <a:t>en</a:t>
             </a:r>
             <a:endParaRPr lang="en-US" sz="1400" dirty="0"/>
           </a:p>
@@ -30640,14 +31561,14 @@
       </p:sp>
       <p:sp>
         <p:nvSpPr>
-          <p:cNvPr id="27" name="Text 25"/>
-          <p:cNvSpPr/>
-          <p:nvPr/>
-        </p:nvSpPr>
-        <p:spPr>
-          <a:xfrm>
-            <a:off x="4645152" y="3364992"/>
-            <a:ext cx="1097280" cy="475488"/>
+          <p:cNvPr id="30" name="Text 28"/>
+          <p:cNvSpPr/>
+          <p:nvPr/>
+        </p:nvSpPr>
+        <p:spPr>
+          <a:xfrm>
+            <a:off x="3959352" y="3364992"/>
+            <a:ext cx="411480" cy="475488"/>
           </a:xfrm>
           <a:prstGeom prst="rect">
             <a:avLst/>
@@ -30679,13 +31600,13 @@
       </p:sp>
       <p:sp>
         <p:nvSpPr>
-          <p:cNvPr id="28" name="Shape 26"/>
-          <p:cNvSpPr/>
-          <p:nvPr/>
-        </p:nvSpPr>
-        <p:spPr>
-          <a:xfrm>
-            <a:off x="5742432" y="3364992"/>
+          <p:cNvPr id="31" name="Shape 29"/>
+          <p:cNvSpPr/>
+          <p:nvPr/>
+        </p:nvSpPr>
+        <p:spPr>
+          <a:xfrm>
+            <a:off x="4370832" y="3364992"/>
             <a:ext cx="1645920" cy="475488"/>
           </a:xfrm>
           <a:prstGeom prst="rect">
@@ -30706,13 +31627,13 @@
       </p:sp>
       <p:sp>
         <p:nvSpPr>
-          <p:cNvPr id="29" name="Text 27"/>
-          <p:cNvSpPr/>
-          <p:nvPr/>
-        </p:nvSpPr>
-        <p:spPr>
-          <a:xfrm>
-            <a:off x="5742432" y="3364992"/>
+          <p:cNvPr id="32" name="Text 30"/>
+          <p:cNvSpPr/>
+          <p:nvPr/>
+        </p:nvSpPr>
+        <p:spPr>
+          <a:xfrm>
+            <a:off x="4370832" y="3364992"/>
             <a:ext cx="1645920" cy="475488"/>
           </a:xfrm>
           <a:prstGeom prst="rect">
@@ -30737,7 +31658,7 @@
                 <a:ea typeface="Trebuchet MS" pitchFamily="34" charset="-122"/>
                 <a:cs typeface="Trebuchet MS" pitchFamily="34" charset="-120"/>
               </a:rPr>
-              <a:t>ing</a:t>
+              <a:t>dur</a:t>
             </a:r>
             <a:endParaRPr lang="en-US" sz="1400" dirty="0"/>
           </a:p>
@@ -30745,7 +31666,112 @@
       </p:sp>
       <p:sp>
         <p:nvSpPr>
-          <p:cNvPr id="30" name="Shape 28"/>
+          <p:cNvPr id="33" name="Text 31"/>
+          <p:cNvSpPr/>
+          <p:nvPr/>
+        </p:nvSpPr>
+        <p:spPr>
+          <a:xfrm>
+            <a:off x="6016752" y="3364992"/>
+            <a:ext cx="411480" cy="475488"/>
+          </a:xfrm>
+          <a:prstGeom prst="rect">
+            <a:avLst/>
+          </a:prstGeom>
+          <a:noFill/>
+          <a:ln/>
+        </p:spPr>
+        <p:txBody>
+          <a:bodyPr wrap="square" lIns="0" tIns="0" rIns="0" bIns="0" rtlCol="0" anchor="ctr"/>
+          <a:lstStyle/>
+          <a:p>
+            <a:pPr algn="ctr" indent="0" marL="0">
+              <a:buNone/>
+            </a:pPr>
+            <a:r>
+              <a:rPr lang="en-US" sz="1600" b="1" dirty="0">
+                <a:solidFill>
+                  <a:srgbClr val="0D9488"/>
+                </a:solidFill>
+                <a:latin typeface="Trebuchet MS" pitchFamily="34" charset="0"/>
+                <a:ea typeface="Trebuchet MS" pitchFamily="34" charset="-122"/>
+                <a:cs typeface="Trebuchet MS" pitchFamily="34" charset="-120"/>
+              </a:rPr>
+              <a:t>·</a:t>
+            </a:r>
+            <a:endParaRPr lang="en-US" sz="1600" dirty="0"/>
+          </a:p>
+        </p:txBody>
+      </p:sp>
+      <p:sp>
+        <p:nvSpPr>
+          <p:cNvPr id="34" name="Shape 32"/>
+          <p:cNvSpPr/>
+          <p:nvPr/>
+        </p:nvSpPr>
+        <p:spPr>
+          <a:xfrm>
+            <a:off x="6428232" y="3364992"/>
+            <a:ext cx="1645920" cy="475488"/>
+          </a:xfrm>
+          <a:prstGeom prst="rect">
+            <a:avLst>
+              <a:gd name="adj" fmla="val 9615"/>
+            </a:avLst>
+          </a:prstGeom>
+          <a:solidFill>
+            <a:srgbClr val="FFFFFF"/>
+          </a:solidFill>
+          <a:ln w="12700">
+            <a:solidFill>
+              <a:srgbClr val="0D9488"/>
+            </a:solidFill>
+            <a:prstDash val="solid"/>
+          </a:ln>
+        </p:spPr>
+      </p:sp>
+      <p:sp>
+        <p:nvSpPr>
+          <p:cNvPr id="35" name="Text 33"/>
+          <p:cNvSpPr/>
+          <p:nvPr/>
+        </p:nvSpPr>
+        <p:spPr>
+          <a:xfrm>
+            <a:off x="6428232" y="3364992"/>
+            <a:ext cx="1645920" cy="475488"/>
+          </a:xfrm>
+          <a:prstGeom prst="rect">
+            <a:avLst/>
+          </a:prstGeom>
+          <a:noFill/>
+          <a:ln/>
+        </p:spPr>
+        <p:txBody>
+          <a:bodyPr wrap="square" lIns="0" tIns="0" rIns="0" bIns="0" rtlCol="0" anchor="ctr"/>
+          <a:lstStyle/>
+          <a:p>
+            <a:pPr algn="ctr" indent="0" marL="0">
+              <a:buNone/>
+            </a:pPr>
+            <a:r>
+              <a:rPr lang="en-US" sz="1400" b="1" dirty="0">
+                <a:solidFill>
+                  <a:srgbClr val="0D9488"/>
+                </a:solidFill>
+                <a:latin typeface="Trebuchet MS" pitchFamily="34" charset="0"/>
+                <a:ea typeface="Trebuchet MS" pitchFamily="34" charset="-122"/>
+                <a:cs typeface="Trebuchet MS" pitchFamily="34" charset="-120"/>
+              </a:rPr>
+              <a:t>ance</a:t>
+            </a:r>
+            <a:endParaRPr lang="en-US" sz="1400" dirty="0"/>
+          </a:p>
+        </p:txBody>
+      </p:sp>
+      <p:sp>
+        <p:nvSpPr>
+          <p:cNvPr id="36" name="Shape 34"/>
           <p:cNvSpPr/>
           <p:nvPr/>
         </p:nvSpPr>
@@ -30772,7 +31798,7 @@
       </p:sp>
       <p:sp>
         <p:nvSpPr>
-          <p:cNvPr id="31" name="Text 29"/>
+          <p:cNvPr id="37" name="Text 35"/>
           <p:cNvSpPr/>
           <p:nvPr/>
         </p:nvSpPr>
@@ -30811,7 +31837,7 @@
       </p:sp>
       <p:sp>
         <p:nvSpPr>
-          <p:cNvPr id="32" name="Shape 30"/>
+          <p:cNvPr id="38" name="Shape 36"/>
           <p:cNvSpPr/>
           <p:nvPr/>
         </p:nvSpPr>
@@ -30838,7 +31864,7 @@
       </p:sp>
       <p:sp>
         <p:nvSpPr>
-          <p:cNvPr id="33" name="Shape 31"/>
+          <p:cNvPr id="39" name="Shape 37"/>
           <p:cNvSpPr/>
           <p:nvPr/>
         </p:nvSpPr>
@@ -30865,7 +31891,7 @@
       </p:sp>
       <p:sp>
         <p:nvSpPr>
-          <p:cNvPr id="34" name="Text 32"/>
+          <p:cNvPr id="40" name="Text 38"/>
           <p:cNvSpPr/>
           <p:nvPr/>
         </p:nvSpPr>
@@ -30896,7 +31922,7 @@
                 <a:ea typeface="Trebuchet MS" pitchFamily="34" charset="-122"/>
                 <a:cs typeface="Trebuchet MS" pitchFamily="34" charset="-120"/>
               </a:rPr>
-              <a:t>b</a:t>
+              <a:t>e</a:t>
             </a:r>
             <a:endParaRPr lang="en-US" sz="900" dirty="0"/>
           </a:p>
@@ -30904,7 +31930,7 @@
       </p:sp>
       <p:sp>
         <p:nvSpPr>
-          <p:cNvPr id="35" name="Shape 33"/>
+          <p:cNvPr id="41" name="Shape 39"/>
           <p:cNvSpPr/>
           <p:nvPr/>
         </p:nvSpPr>
@@ -30931,7 +31957,7 @@
       </p:sp>
       <p:sp>
         <p:nvSpPr>
-          <p:cNvPr id="36" name="Text 34"/>
+          <p:cNvPr id="42" name="Text 40"/>
           <p:cNvSpPr/>
           <p:nvPr/>
         </p:nvSpPr>
@@ -30962,7 +31988,7 @@
                 <a:ea typeface="Trebuchet MS" pitchFamily="34" charset="-122"/>
                 <a:cs typeface="Trebuchet MS" pitchFamily="34" charset="-120"/>
               </a:rPr>
-              <a:t>l</a:t>
+              <a:t>n</a:t>
             </a:r>
             <a:endParaRPr lang="en-US" sz="900" dirty="0"/>
           </a:p>
@@ -30970,7 +31996,7 @@
       </p:sp>
       <p:sp>
         <p:nvSpPr>
-          <p:cNvPr id="37" name="Shape 35"/>
+          <p:cNvPr id="43" name="Shape 41"/>
           <p:cNvSpPr/>
           <p:nvPr/>
         </p:nvSpPr>
@@ -30997,7 +32023,7 @@
       </p:sp>
       <p:sp>
         <p:nvSpPr>
-          <p:cNvPr id="38" name="Text 36"/>
+          <p:cNvPr id="44" name="Text 42"/>
           <p:cNvSpPr/>
           <p:nvPr/>
         </p:nvSpPr>
@@ -31028,7 +32054,7 @@
                 <a:ea typeface="Trebuchet MS" pitchFamily="34" charset="-122"/>
                 <a:cs typeface="Trebuchet MS" pitchFamily="34" charset="-120"/>
               </a:rPr>
-              <a:t>e</a:t>
+              <a:t>d</a:t>
             </a:r>
             <a:endParaRPr lang="en-US" sz="900" dirty="0"/>
           </a:p>
@@ -31036,7 +32062,7 @@
       </p:sp>
       <p:sp>
         <p:nvSpPr>
-          <p:cNvPr id="39" name="Shape 37"/>
+          <p:cNvPr id="45" name="Shape 43"/>
           <p:cNvSpPr/>
           <p:nvPr/>
         </p:nvSpPr>
@@ -31063,7 +32089,7 @@
       </p:sp>
       <p:sp>
         <p:nvSpPr>
-          <p:cNvPr id="40" name="Text 38"/>
+          <p:cNvPr id="46" name="Text 44"/>
           <p:cNvSpPr/>
           <p:nvPr/>
         </p:nvSpPr>
@@ -31094,7 +32120,7 @@
                 <a:ea typeface="Trebuchet MS" pitchFamily="34" charset="-122"/>
                 <a:cs typeface="Trebuchet MS" pitchFamily="34" charset="-120"/>
               </a:rPr>
-              <a:t>n</a:t>
+              <a:t>ur</a:t>
             </a:r>
             <a:endParaRPr lang="en-US" sz="900" dirty="0"/>
           </a:p>
@@ -31102,7 +32128,7 @@
       </p:sp>
       <p:sp>
         <p:nvSpPr>
-          <p:cNvPr id="41" name="Shape 39"/>
+          <p:cNvPr id="47" name="Shape 45"/>
           <p:cNvSpPr/>
           <p:nvPr/>
         </p:nvSpPr>
@@ -31129,7 +32155,7 @@
       </p:sp>
       <p:sp>
         <p:nvSpPr>
-          <p:cNvPr id="42" name="Text 40"/>
+          <p:cNvPr id="48" name="Text 46"/>
           <p:cNvSpPr/>
           <p:nvPr/>
         </p:nvSpPr>
@@ -31160,7 +32186,7 @@
                 <a:ea typeface="Trebuchet MS" pitchFamily="34" charset="-122"/>
                 <a:cs typeface="Trebuchet MS" pitchFamily="34" charset="-120"/>
               </a:rPr>
-              <a:t>d</a:t>
+              <a:t>a</a:t>
             </a:r>
             <a:endParaRPr lang="en-US" sz="900" dirty="0"/>
           </a:p>
@@ -31168,7 +32194,7 @@
       </p:sp>
       <p:sp>
         <p:nvSpPr>
-          <p:cNvPr id="43" name="Shape 41"/>
+          <p:cNvPr id="49" name="Shape 47"/>
           <p:cNvSpPr/>
           <p:nvPr/>
         </p:nvSpPr>
@@ -31195,7 +32221,7 @@
       </p:sp>
       <p:sp>
         <p:nvSpPr>
-          <p:cNvPr id="44" name="Text 42"/>
+          <p:cNvPr id="50" name="Text 48"/>
           <p:cNvSpPr/>
           <p:nvPr/>
         </p:nvSpPr>
@@ -31226,7 +32252,7 @@
                 <a:ea typeface="Trebuchet MS" pitchFamily="34" charset="-122"/>
                 <a:cs typeface="Trebuchet MS" pitchFamily="34" charset="-120"/>
               </a:rPr>
-              <a:t>i</a:t>
+              <a:t>n</a:t>
             </a:r>
             <a:endParaRPr lang="en-US" sz="900" dirty="0"/>
           </a:p>
@@ -31234,7 +32260,7 @@
       </p:sp>
       <p:sp>
         <p:nvSpPr>
-          <p:cNvPr id="45" name="Shape 43"/>
+          <p:cNvPr id="51" name="Shape 49"/>
           <p:cNvSpPr/>
           <p:nvPr/>
         </p:nvSpPr>
@@ -31261,7 +32287,7 @@
       </p:sp>
       <p:sp>
         <p:nvSpPr>
-          <p:cNvPr id="46" name="Text 44"/>
+          <p:cNvPr id="52" name="Text 50"/>
           <p:cNvSpPr/>
           <p:nvPr/>
         </p:nvSpPr>
@@ -31292,7 +32318,7 @@
                 <a:ea typeface="Trebuchet MS" pitchFamily="34" charset="-122"/>
                 <a:cs typeface="Trebuchet MS" pitchFamily="34" charset="-120"/>
               </a:rPr>
-              <a:t>ng</a:t>
+              <a:t>ce</a:t>
             </a:r>
             <a:endParaRPr lang="en-US" sz="900" dirty="0"/>
           </a:p>
@@ -31584,7 +32610,7 @@
                 <a:ea typeface="Calibri" pitchFamily="34" charset="-122"/>
                 <a:cs typeface="Calibri" pitchFamily="34" charset="-120"/>
               </a:rPr>
-              <a:t>Word Labs  •  wordlabs.app  •  Root: 'end' = to finish, stop, or limit</a:t>
+              <a:t>Word Labs  •  wordlabs.app  •  Root: 'end' = to finish; the final part</a:t>
             </a:r>
             <a:endParaRPr lang="en-US" sz="800" dirty="0"/>
           </a:p>
@@ -32753,7 +33779,7 @@
                 <a:ea typeface="Calibri" pitchFamily="34" charset="-122"/>
                 <a:cs typeface="Calibri" pitchFamily="34" charset="-120"/>
               </a:rPr>
-              <a:t>Word Labs  •  wordlabs.app  •  Root: 'end' = to finish, stop, or limit</a:t>
+              <a:t>Word Labs  •  wordlabs.app  •  Root: 'end' = to finish; the final part</a:t>
             </a:r>
             <a:endParaRPr lang="en-US" sz="800" dirty="0"/>
           </a:p>
@@ -33011,7 +34037,7 @@
             <a:avLst/>
           </a:prstGeom>
           <a:solidFill>
-            <a:srgbClr val="DDD6FE"/>
+            <a:srgbClr val="F8FAFC"/>
           </a:solidFill>
           <a:ln w="12700">
             <a:solidFill>
@@ -33023,14 +34049,39 @@
       </p:sp>
       <p:sp>
         <p:nvSpPr>
-          <p:cNvPr id="18" name="Text 16"/>
-          <p:cNvSpPr/>
-          <p:nvPr/>
-        </p:nvSpPr>
-        <p:spPr>
-          <a:xfrm>
-            <a:off x="365760" y="1563624"/>
-            <a:ext cx="2468880" cy="402336"/>
+          <p:cNvPr id="18" name="Shape 16"/>
+          <p:cNvSpPr/>
+          <p:nvPr/>
+        </p:nvSpPr>
+        <p:spPr>
+          <a:xfrm>
+            <a:off x="2971800" y="1563624"/>
+            <a:ext cx="2834640" cy="402336"/>
+          </a:xfrm>
+          <a:prstGeom prst="rect">
+            <a:avLst/>
+          </a:prstGeom>
+          <a:solidFill>
+            <a:srgbClr val="CCFBF1"/>
+          </a:solidFill>
+          <a:ln w="12700">
+            <a:solidFill>
+              <a:srgbClr val="E2E8F0"/>
+            </a:solidFill>
+            <a:prstDash val="solid"/>
+          </a:ln>
+        </p:spPr>
+      </p:sp>
+      <p:sp>
+        <p:nvSpPr>
+          <p:cNvPr id="19" name="Text 17"/>
+          <p:cNvSpPr/>
+          <p:nvPr/>
+        </p:nvSpPr>
+        <p:spPr>
+          <a:xfrm>
+            <a:off x="2971800" y="1563624"/>
+            <a:ext cx="2834640" cy="402336"/>
           </a:xfrm>
           <a:prstGeom prst="rect">
             <a:avLst/>
@@ -33048,13 +34099,13 @@
             <a:r>
               <a:rPr lang="en-US" sz="1300" b="1" dirty="0">
                 <a:solidFill>
-                  <a:srgbClr val="4C1D95"/>
+                  <a:srgbClr val="0F766E"/>
                 </a:solidFill>
                 <a:latin typeface="Trebuchet MS" pitchFamily="34" charset="0"/>
                 <a:ea typeface="Trebuchet MS" pitchFamily="34" charset="-122"/>
                 <a:cs typeface="Trebuchet MS" pitchFamily="34" charset="-120"/>
               </a:rPr>
-              <a:t>ap-</a:t>
+              <a:t>end</a:t>
             </a:r>
             <a:endParaRPr lang="en-US" sz="1300" dirty="0"/>
           </a:p>
@@ -33062,20 +34113,20 @@
       </p:sp>
       <p:sp>
         <p:nvSpPr>
-          <p:cNvPr id="19" name="Shape 17"/>
-          <p:cNvSpPr/>
-          <p:nvPr/>
-        </p:nvSpPr>
-        <p:spPr>
-          <a:xfrm>
-            <a:off x="2971800" y="1563624"/>
+          <p:cNvPr id="20" name="Shape 18"/>
+          <p:cNvSpPr/>
+          <p:nvPr/>
+        </p:nvSpPr>
+        <p:spPr>
+          <a:xfrm>
+            <a:off x="5943600" y="1563624"/>
             <a:ext cx="2834640" cy="402336"/>
           </a:xfrm>
           <a:prstGeom prst="rect">
             <a:avLst/>
           </a:prstGeom>
           <a:solidFill>
-            <a:srgbClr val="CCFBF1"/>
+            <a:srgbClr val="FCE7F3"/>
           </a:solidFill>
           <a:ln w="12700">
             <a:solidFill>
@@ -33087,13 +34138,13 @@
       </p:sp>
       <p:sp>
         <p:nvSpPr>
-          <p:cNvPr id="20" name="Text 18"/>
-          <p:cNvSpPr/>
-          <p:nvPr/>
-        </p:nvSpPr>
-        <p:spPr>
-          <a:xfrm>
-            <a:off x="2971800" y="1563624"/>
+          <p:cNvPr id="21" name="Text 19"/>
+          <p:cNvSpPr/>
+          <p:nvPr/>
+        </p:nvSpPr>
+        <p:spPr>
+          <a:xfrm>
+            <a:off x="5943600" y="1563624"/>
             <a:ext cx="2834640" cy="402336"/>
           </a:xfrm>
           <a:prstGeom prst="rect">
@@ -33112,13 +34163,13 @@
             <a:r>
               <a:rPr lang="en-US" sz="1300" b="1" dirty="0">
                 <a:solidFill>
-                  <a:srgbClr val="0F766E"/>
+                  <a:srgbClr val="9D174D"/>
                 </a:solidFill>
                 <a:latin typeface="Trebuchet MS" pitchFamily="34" charset="0"/>
                 <a:ea typeface="Trebuchet MS" pitchFamily="34" charset="-122"/>
                 <a:cs typeface="Trebuchet MS" pitchFamily="34" charset="-120"/>
               </a:rPr>
-              <a:t>end</a:t>
+              <a:t>-ed</a:t>
             </a:r>
             <a:endParaRPr lang="en-US" sz="1300" dirty="0"/>
           </a:p>
@@ -33126,19 +34177,69 @@
       </p:sp>
       <p:sp>
         <p:nvSpPr>
-          <p:cNvPr id="21" name="Shape 19"/>
-          <p:cNvSpPr/>
-          <p:nvPr/>
-        </p:nvSpPr>
-        <p:spPr>
-          <a:xfrm>
-            <a:off x="5943600" y="1563624"/>
+          <p:cNvPr id="22" name="Shape 20"/>
+          <p:cNvSpPr/>
+          <p:nvPr/>
+        </p:nvSpPr>
+        <p:spPr>
+          <a:xfrm>
+            <a:off x="365760" y="1984248"/>
+            <a:ext cx="2468880" cy="402336"/>
+          </a:xfrm>
+          <a:prstGeom prst="rect">
+            <a:avLst/>
+          </a:prstGeom>
+          <a:solidFill>
+            <a:srgbClr val="F1F5F9"/>
+          </a:solidFill>
+          <a:ln w="12700">
+            <a:solidFill>
+              <a:srgbClr val="E2E8F0"/>
+            </a:solidFill>
+            <a:prstDash val="solid"/>
+          </a:ln>
+        </p:spPr>
+      </p:sp>
+      <p:sp>
+        <p:nvSpPr>
+          <p:cNvPr id="23" name="Shape 21"/>
+          <p:cNvSpPr/>
+          <p:nvPr/>
+        </p:nvSpPr>
+        <p:spPr>
+          <a:xfrm>
+            <a:off x="2971800" y="1984248"/>
             <a:ext cx="2834640" cy="402336"/>
           </a:xfrm>
           <a:prstGeom prst="rect">
             <a:avLst/>
           </a:prstGeom>
           <a:solidFill>
+            <a:srgbClr val="F1F5F9"/>
+          </a:solidFill>
+          <a:ln w="12700">
+            <a:solidFill>
+              <a:srgbClr val="E2E8F0"/>
+            </a:solidFill>
+            <a:prstDash val="solid"/>
+          </a:ln>
+        </p:spPr>
+      </p:sp>
+      <p:sp>
+        <p:nvSpPr>
+          <p:cNvPr id="24" name="Shape 22"/>
+          <p:cNvSpPr/>
+          <p:nvPr/>
+        </p:nvSpPr>
+        <p:spPr>
+          <a:xfrm>
+            <a:off x="5943600" y="1984248"/>
+            <a:ext cx="2834640" cy="402336"/>
+          </a:xfrm>
+          <a:prstGeom prst="rect">
+            <a:avLst/>
+          </a:prstGeom>
+          <a:solidFill>
             <a:srgbClr val="FCE7F3"/>
           </a:solidFill>
           <a:ln w="12700">
@@ -33151,13 +34252,13 @@
       </p:sp>
       <p:sp>
         <p:nvSpPr>
-          <p:cNvPr id="22" name="Text 20"/>
-          <p:cNvSpPr/>
-          <p:nvPr/>
-        </p:nvSpPr>
-        <p:spPr>
-          <a:xfrm>
-            <a:off x="5943600" y="1563624"/>
+          <p:cNvPr id="25" name="Text 23"/>
+          <p:cNvSpPr/>
+          <p:nvPr/>
+        </p:nvSpPr>
+        <p:spPr>
+          <a:xfrm>
+            <a:off x="5943600" y="1984248"/>
             <a:ext cx="2834640" cy="402336"/>
           </a:xfrm>
           <a:prstGeom prst="rect">
@@ -33182,7 +34283,7 @@
                 <a:ea typeface="Trebuchet MS" pitchFamily="34" charset="-122"/>
                 <a:cs typeface="Trebuchet MS" pitchFamily="34" charset="-120"/>
               </a:rPr>
-              <a:t>-ed</a:t>
+              <a:t>-ing</a:t>
             </a:r>
             <a:endParaRPr lang="en-US" sz="1300" dirty="0"/>
           </a:p>
@@ -33190,20 +34291,20 @@
       </p:sp>
       <p:sp>
         <p:nvSpPr>
-          <p:cNvPr id="23" name="Shape 21"/>
-          <p:cNvSpPr/>
-          <p:nvPr/>
-        </p:nvSpPr>
-        <p:spPr>
-          <a:xfrm>
-            <a:off x="365760" y="1984248"/>
+          <p:cNvPr id="26" name="Shape 24"/>
+          <p:cNvSpPr/>
+          <p:nvPr/>
+        </p:nvSpPr>
+        <p:spPr>
+          <a:xfrm>
+            <a:off x="365760" y="2404872"/>
             <a:ext cx="2468880" cy="402336"/>
           </a:xfrm>
           <a:prstGeom prst="rect">
             <a:avLst/>
           </a:prstGeom>
           <a:solidFill>
-            <a:srgbClr val="DDD6FE"/>
+            <a:srgbClr val="F8FAFC"/>
           </a:solidFill>
           <a:ln w="12700">
             <a:solidFill>
@@ -33215,14 +34316,64 @@
       </p:sp>
       <p:sp>
         <p:nvSpPr>
-          <p:cNvPr id="24" name="Text 22"/>
-          <p:cNvSpPr/>
-          <p:nvPr/>
-        </p:nvSpPr>
-        <p:spPr>
-          <a:xfrm>
-            <a:off x="365760" y="1984248"/>
-            <a:ext cx="2468880" cy="402336"/>
+          <p:cNvPr id="27" name="Shape 25"/>
+          <p:cNvSpPr/>
+          <p:nvPr/>
+        </p:nvSpPr>
+        <p:spPr>
+          <a:xfrm>
+            <a:off x="2971800" y="2404872"/>
+            <a:ext cx="2834640" cy="402336"/>
+          </a:xfrm>
+          <a:prstGeom prst="rect">
+            <a:avLst/>
+          </a:prstGeom>
+          <a:solidFill>
+            <a:srgbClr val="F8FAFC"/>
+          </a:solidFill>
+          <a:ln w="12700">
+            <a:solidFill>
+              <a:srgbClr val="E2E8F0"/>
+            </a:solidFill>
+            <a:prstDash val="solid"/>
+          </a:ln>
+        </p:spPr>
+      </p:sp>
+      <p:sp>
+        <p:nvSpPr>
+          <p:cNvPr id="28" name="Shape 26"/>
+          <p:cNvSpPr/>
+          <p:nvPr/>
+        </p:nvSpPr>
+        <p:spPr>
+          <a:xfrm>
+            <a:off x="5943600" y="2404872"/>
+            <a:ext cx="2834640" cy="402336"/>
+          </a:xfrm>
+          <a:prstGeom prst="rect">
+            <a:avLst/>
+          </a:prstGeom>
+          <a:solidFill>
+            <a:srgbClr val="FCE7F3"/>
+          </a:solidFill>
+          <a:ln w="12700">
+            <a:solidFill>
+              <a:srgbClr val="E2E8F0"/>
+            </a:solidFill>
+            <a:prstDash val="solid"/>
+          </a:ln>
+        </p:spPr>
+      </p:sp>
+      <p:sp>
+        <p:nvSpPr>
+          <p:cNvPr id="29" name="Text 27"/>
+          <p:cNvSpPr/>
+          <p:nvPr/>
+        </p:nvSpPr>
+        <p:spPr>
+          <a:xfrm>
+            <a:off x="5943600" y="2404872"/>
+            <a:ext cx="2834640" cy="402336"/>
           </a:xfrm>
           <a:prstGeom prst="rect">
             <a:avLst/>
@@ -33240,13 +34391,13 @@
             <a:r>
               <a:rPr lang="en-US" sz="1300" b="1" dirty="0">
                 <a:solidFill>
-                  <a:srgbClr val="4C1D95"/>
+                  <a:srgbClr val="9D174D"/>
                 </a:solidFill>
                 <a:latin typeface="Trebuchet MS" pitchFamily="34" charset="0"/>
                 <a:ea typeface="Trebuchet MS" pitchFamily="34" charset="-122"/>
                 <a:cs typeface="Trebuchet MS" pitchFamily="34" charset="-120"/>
               </a:rPr>
-              <a:t>bl-</a:t>
+              <a:t>-less</a:t>
             </a:r>
             <a:endParaRPr lang="en-US" sz="1300" dirty="0"/>
           </a:p>
@@ -33254,13 +34405,38 @@
       </p:sp>
       <p:sp>
         <p:nvSpPr>
-          <p:cNvPr id="25" name="Shape 23"/>
-          <p:cNvSpPr/>
-          <p:nvPr/>
-        </p:nvSpPr>
-        <p:spPr>
-          <a:xfrm>
-            <a:off x="2971800" y="1984248"/>
+          <p:cNvPr id="30" name="Shape 28"/>
+          <p:cNvSpPr/>
+          <p:nvPr/>
+        </p:nvSpPr>
+        <p:spPr>
+          <a:xfrm>
+            <a:off x="365760" y="2825496"/>
+            <a:ext cx="2468880" cy="402336"/>
+          </a:xfrm>
+          <a:prstGeom prst="rect">
+            <a:avLst/>
+          </a:prstGeom>
+          <a:solidFill>
+            <a:srgbClr val="F1F5F9"/>
+          </a:solidFill>
+          <a:ln w="12700">
+            <a:solidFill>
+              <a:srgbClr val="E2E8F0"/>
+            </a:solidFill>
+            <a:prstDash val="solid"/>
+          </a:ln>
+        </p:spPr>
+      </p:sp>
+      <p:sp>
+        <p:nvSpPr>
+          <p:cNvPr id="31" name="Shape 29"/>
+          <p:cNvSpPr/>
+          <p:nvPr/>
+        </p:nvSpPr>
+        <p:spPr>
+          <a:xfrm>
+            <a:off x="2971800" y="2825496"/>
             <a:ext cx="2834640" cy="402336"/>
           </a:xfrm>
           <a:prstGeom prst="rect">
@@ -33279,13 +34455,13 @@
       </p:sp>
       <p:sp>
         <p:nvSpPr>
-          <p:cNvPr id="26" name="Shape 24"/>
-          <p:cNvSpPr/>
-          <p:nvPr/>
-        </p:nvSpPr>
-        <p:spPr>
-          <a:xfrm>
-            <a:off x="5943600" y="1984248"/>
+          <p:cNvPr id="32" name="Shape 30"/>
+          <p:cNvSpPr/>
+          <p:nvPr/>
+        </p:nvSpPr>
+        <p:spPr>
+          <a:xfrm>
+            <a:off x="5943600" y="2825496"/>
             <a:ext cx="2834640" cy="402336"/>
           </a:xfrm>
           <a:prstGeom prst="rect">
@@ -33304,13 +34480,13 @@
       </p:sp>
       <p:sp>
         <p:nvSpPr>
-          <p:cNvPr id="27" name="Text 25"/>
-          <p:cNvSpPr/>
-          <p:nvPr/>
-        </p:nvSpPr>
-        <p:spPr>
-          <a:xfrm>
-            <a:off x="5943600" y="1984248"/>
+          <p:cNvPr id="33" name="Text 31"/>
+          <p:cNvSpPr/>
+          <p:nvPr/>
+        </p:nvSpPr>
+        <p:spPr>
+          <a:xfrm>
+            <a:off x="5943600" y="2825496"/>
             <a:ext cx="2834640" cy="402336"/>
           </a:xfrm>
           <a:prstGeom prst="rect">
@@ -33335,7 +34511,7 @@
                 <a:ea typeface="Trebuchet MS" pitchFamily="34" charset="-122"/>
                 <a:cs typeface="Trebuchet MS" pitchFamily="34" charset="-120"/>
               </a:rPr>
-              <a:t>-ing</a:t>
+              <a:t>-s</a:t>
             </a:r>
             <a:endParaRPr lang="en-US" sz="1300" dirty="0"/>
           </a:p>
@@ -33343,20 +34519,20 @@
       </p:sp>
       <p:sp>
         <p:nvSpPr>
-          <p:cNvPr id="28" name="Shape 26"/>
-          <p:cNvSpPr/>
-          <p:nvPr/>
-        </p:nvSpPr>
-        <p:spPr>
-          <a:xfrm>
-            <a:off x="365760" y="2404872"/>
+          <p:cNvPr id="34" name="Shape 32"/>
+          <p:cNvSpPr/>
+          <p:nvPr/>
+        </p:nvSpPr>
+        <p:spPr>
+          <a:xfrm>
+            <a:off x="365760" y="3246120"/>
             <a:ext cx="2468880" cy="402336"/>
           </a:xfrm>
           <a:prstGeom prst="rect">
             <a:avLst/>
           </a:prstGeom>
           <a:solidFill>
-            <a:srgbClr val="DDD6FE"/>
+            <a:srgbClr val="F8FAFC"/>
           </a:solidFill>
           <a:ln w="12700">
             <a:solidFill>
@@ -33368,14 +34544,64 @@
       </p:sp>
       <p:sp>
         <p:nvSpPr>
-          <p:cNvPr id="29" name="Text 27"/>
-          <p:cNvSpPr/>
-          <p:nvPr/>
-        </p:nvSpPr>
-        <p:spPr>
-          <a:xfrm>
-            <a:off x="365760" y="2404872"/>
-            <a:ext cx="2468880" cy="402336"/>
+          <p:cNvPr id="35" name="Shape 33"/>
+          <p:cNvSpPr/>
+          <p:nvPr/>
+        </p:nvSpPr>
+        <p:spPr>
+          <a:xfrm>
+            <a:off x="2971800" y="3246120"/>
+            <a:ext cx="2834640" cy="402336"/>
+          </a:xfrm>
+          <a:prstGeom prst="rect">
+            <a:avLst/>
+          </a:prstGeom>
+          <a:solidFill>
+            <a:srgbClr val="F8FAFC"/>
+          </a:solidFill>
+          <a:ln w="12700">
+            <a:solidFill>
+              <a:srgbClr val="E2E8F0"/>
+            </a:solidFill>
+            <a:prstDash val="solid"/>
+          </a:ln>
+        </p:spPr>
+      </p:sp>
+      <p:sp>
+        <p:nvSpPr>
+          <p:cNvPr id="36" name="Shape 34"/>
+          <p:cNvSpPr/>
+          <p:nvPr/>
+        </p:nvSpPr>
+        <p:spPr>
+          <a:xfrm>
+            <a:off x="5943600" y="3246120"/>
+            <a:ext cx="2834640" cy="402336"/>
+          </a:xfrm>
+          <a:prstGeom prst="rect">
+            <a:avLst/>
+          </a:prstGeom>
+          <a:solidFill>
+            <a:srgbClr val="FCE7F3"/>
+          </a:solidFill>
+          <a:ln w="12700">
+            <a:solidFill>
+              <a:srgbClr val="E2E8F0"/>
+            </a:solidFill>
+            <a:prstDash val="solid"/>
+          </a:ln>
+        </p:spPr>
+      </p:sp>
+      <p:sp>
+        <p:nvSpPr>
+          <p:cNvPr id="37" name="Text 35"/>
+          <p:cNvSpPr/>
+          <p:nvPr/>
+        </p:nvSpPr>
+        <p:spPr>
+          <a:xfrm>
+            <a:off x="5943600" y="3246120"/>
+            <a:ext cx="2834640" cy="402336"/>
           </a:xfrm>
           <a:prstGeom prst="rect">
             <a:avLst/>
@@ -33393,13 +34619,13 @@
             <a:r>
               <a:rPr lang="en-US" sz="1300" b="1" dirty="0">
                 <a:solidFill>
-                  <a:srgbClr val="4C1D95"/>
+                  <a:srgbClr val="9D174D"/>
                 </a:solidFill>
                 <a:latin typeface="Trebuchet MS" pitchFamily="34" charset="0"/>
                 <a:ea typeface="Trebuchet MS" pitchFamily="34" charset="-122"/>
                 <a:cs typeface="Trebuchet MS" pitchFamily="34" charset="-120"/>
               </a:rPr>
-              <a:t>d-</a:t>
+              <a:t>-ure</a:t>
             </a:r>
             <a:endParaRPr lang="en-US" sz="1300" dirty="0"/>
           </a:p>
@@ -33407,64 +34633,14 @@
       </p:sp>
       <p:sp>
         <p:nvSpPr>
-          <p:cNvPr id="30" name="Shape 28"/>
-          <p:cNvSpPr/>
-          <p:nvPr/>
-        </p:nvSpPr>
-        <p:spPr>
-          <a:xfrm>
-            <a:off x="2971800" y="2404872"/>
-            <a:ext cx="2834640" cy="402336"/>
-          </a:xfrm>
-          <a:prstGeom prst="rect">
-            <a:avLst/>
-          </a:prstGeom>
-          <a:solidFill>
-            <a:srgbClr val="F8FAFC"/>
-          </a:solidFill>
-          <a:ln w="12700">
-            <a:solidFill>
-              <a:srgbClr val="E2E8F0"/>
-            </a:solidFill>
-            <a:prstDash val="solid"/>
-          </a:ln>
-        </p:spPr>
-      </p:sp>
-      <p:sp>
-        <p:nvSpPr>
-          <p:cNvPr id="31" name="Shape 29"/>
-          <p:cNvSpPr/>
-          <p:nvPr/>
-        </p:nvSpPr>
-        <p:spPr>
-          <a:xfrm>
-            <a:off x="5943600" y="2404872"/>
-            <a:ext cx="2834640" cy="402336"/>
-          </a:xfrm>
-          <a:prstGeom prst="rect">
-            <a:avLst/>
-          </a:prstGeom>
-          <a:solidFill>
-            <a:srgbClr val="FCE7F3"/>
-          </a:solidFill>
-          <a:ln w="12700">
-            <a:solidFill>
-              <a:srgbClr val="E2E8F0"/>
-            </a:solidFill>
-            <a:prstDash val="solid"/>
-          </a:ln>
-        </p:spPr>
-      </p:sp>
-      <p:sp>
-        <p:nvSpPr>
-          <p:cNvPr id="32" name="Text 30"/>
-          <p:cNvSpPr/>
-          <p:nvPr/>
-        </p:nvSpPr>
-        <p:spPr>
-          <a:xfrm>
-            <a:off x="5943600" y="2404872"/>
-            <a:ext cx="2834640" cy="402336"/>
+          <p:cNvPr id="38" name="Text 36"/>
+          <p:cNvSpPr/>
+          <p:nvPr/>
+        </p:nvSpPr>
+        <p:spPr>
+          <a:xfrm>
+            <a:off x="365760" y="3611880"/>
+            <a:ext cx="1828800" cy="347472"/>
           </a:xfrm>
           <a:prstGeom prst="rect">
             <a:avLst/>
@@ -33476,59 +34652,61 @@
           <a:bodyPr wrap="square" lIns="0" tIns="0" rIns="0" bIns="0" rtlCol="0" anchor="ctr"/>
           <a:lstStyle/>
           <a:p>
-            <a:pPr algn="ctr" indent="0" marL="0">
-              <a:buNone/>
-            </a:pPr>
-            <a:r>
-              <a:rPr lang="en-US" sz="1300" b="1" dirty="0">
-                <a:solidFill>
-                  <a:srgbClr val="9D174D"/>
+            <a:pPr algn="l" indent="0" marL="0">
+              <a:buNone/>
+            </a:pPr>
+            <a:r>
+              <a:rPr lang="en-US" sz="1200" b="1" dirty="0">
+                <a:solidFill>
+                  <a:srgbClr val="0F172A"/>
                 </a:solidFill>
                 <a:latin typeface="Trebuchet MS" pitchFamily="34" charset="0"/>
                 <a:ea typeface="Trebuchet MS" pitchFamily="34" charset="-122"/>
                 <a:cs typeface="Trebuchet MS" pitchFamily="34" charset="-120"/>
               </a:rPr>
-              <a:t>-er</a:t>
-            </a:r>
-            <a:endParaRPr lang="en-US" sz="1300" dirty="0"/>
-          </a:p>
-        </p:txBody>
-      </p:sp>
-      <p:sp>
-        <p:nvSpPr>
-          <p:cNvPr id="33" name="Shape 31"/>
-          <p:cNvSpPr/>
-          <p:nvPr/>
-        </p:nvSpPr>
-        <p:spPr>
-          <a:xfrm>
-            <a:off x="365760" y="2825496"/>
-            <a:ext cx="2468880" cy="402336"/>
-          </a:xfrm>
-          <a:prstGeom prst="rect">
-            <a:avLst/>
-          </a:prstGeom>
-          <a:solidFill>
-            <a:srgbClr val="DDD6FE"/>
-          </a:solidFill>
-          <a:ln w="12700">
-            <a:solidFill>
-              <a:srgbClr val="E2E8F0"/>
-            </a:solidFill>
-            <a:prstDash val="solid"/>
-          </a:ln>
-        </p:spPr>
-      </p:sp>
-      <p:sp>
-        <p:nvSpPr>
-          <p:cNvPr id="34" name="Text 32"/>
-          <p:cNvSpPr/>
-          <p:nvPr/>
-        </p:nvSpPr>
-        <p:spPr>
-          <a:xfrm>
-            <a:off x="365760" y="2825496"/>
-            <a:ext cx="2468880" cy="402336"/>
+              <a:t>Sample words:</a:t>
+            </a:r>
+            <a:endParaRPr lang="en-US" sz="1200" dirty="0"/>
+          </a:p>
+        </p:txBody>
+      </p:sp>
+      <p:sp>
+        <p:nvSpPr>
+          <p:cNvPr id="39" name="Shape 37"/>
+          <p:cNvSpPr/>
+          <p:nvPr/>
+        </p:nvSpPr>
+        <p:spPr>
+          <a:xfrm>
+            <a:off x="365760" y="4023360"/>
+            <a:ext cx="2011680" cy="402336"/>
+          </a:xfrm>
+          <a:prstGeom prst="rect">
+            <a:avLst>
+              <a:gd name="adj" fmla="val 13636"/>
+            </a:avLst>
+          </a:prstGeom>
+          <a:solidFill>
+            <a:srgbClr val="EEF2FF"/>
+          </a:solidFill>
+          <a:ln w="12700">
+            <a:solidFill>
+              <a:srgbClr val="6366F1"/>
+            </a:solidFill>
+            <a:prstDash val="solid"/>
+          </a:ln>
+        </p:spPr>
+      </p:sp>
+      <p:sp>
+        <p:nvSpPr>
+          <p:cNvPr id="40" name="Text 38"/>
+          <p:cNvSpPr/>
+          <p:nvPr/>
+        </p:nvSpPr>
+        <p:spPr>
+          <a:xfrm>
+            <a:off x="365760" y="4023360"/>
+            <a:ext cx="2011680" cy="402336"/>
           </a:xfrm>
           <a:prstGeom prst="rect">
             <a:avLst/>
@@ -33544,80 +34722,57 @@
               <a:buNone/>
             </a:pPr>
             <a:r>
-              <a:rPr lang="en-US" sz="1300" b="1" dirty="0">
-                <a:solidFill>
-                  <a:srgbClr val="4C1D95"/>
+              <a:rPr lang="en-US" sz="1200" b="1" dirty="0">
+                <a:solidFill>
+                  <a:srgbClr val="4338CA"/>
                 </a:solidFill>
                 <a:latin typeface="Trebuchet MS" pitchFamily="34" charset="0"/>
                 <a:ea typeface="Trebuchet MS" pitchFamily="34" charset="-122"/>
                 <a:cs typeface="Trebuchet MS" pitchFamily="34" charset="-120"/>
               </a:rPr>
-              <a:t>ext-</a:t>
-            </a:r>
-            <a:endParaRPr lang="en-US" sz="1300" dirty="0"/>
-          </a:p>
-        </p:txBody>
-      </p:sp>
-      <p:sp>
-        <p:nvSpPr>
-          <p:cNvPr id="35" name="Shape 33"/>
-          <p:cNvSpPr/>
-          <p:nvPr/>
-        </p:nvSpPr>
-        <p:spPr>
-          <a:xfrm>
-            <a:off x="2971800" y="2825496"/>
-            <a:ext cx="2834640" cy="402336"/>
-          </a:xfrm>
-          <a:prstGeom prst="rect">
-            <a:avLst/>
-          </a:prstGeom>
-          <a:solidFill>
-            <a:srgbClr val="F1F5F9"/>
-          </a:solidFill>
-          <a:ln w="12700">
-            <a:solidFill>
-              <a:srgbClr val="E2E8F0"/>
-            </a:solidFill>
-            <a:prstDash val="solid"/>
-          </a:ln>
-        </p:spPr>
-      </p:sp>
-      <p:sp>
-        <p:nvSpPr>
-          <p:cNvPr id="36" name="Shape 34"/>
-          <p:cNvSpPr/>
-          <p:nvPr/>
-        </p:nvSpPr>
-        <p:spPr>
-          <a:xfrm>
-            <a:off x="5943600" y="2825496"/>
-            <a:ext cx="2834640" cy="402336"/>
-          </a:xfrm>
-          <a:prstGeom prst="rect">
-            <a:avLst/>
-          </a:prstGeom>
-          <a:solidFill>
-            <a:srgbClr val="FCE7F3"/>
-          </a:solidFill>
-          <a:ln w="12700">
-            <a:solidFill>
-              <a:srgbClr val="E2E8F0"/>
-            </a:solidFill>
-            <a:prstDash val="solid"/>
-          </a:ln>
-        </p:spPr>
-      </p:sp>
-      <p:sp>
-        <p:nvSpPr>
-          <p:cNvPr id="37" name="Text 35"/>
-          <p:cNvSpPr/>
-          <p:nvPr/>
-        </p:nvSpPr>
-        <p:spPr>
-          <a:xfrm>
-            <a:off x="5943600" y="2825496"/>
-            <a:ext cx="2834640" cy="402336"/>
+              <a:t>end</a:t>
+            </a:r>
+            <a:endParaRPr lang="en-US" sz="1200" dirty="0"/>
+          </a:p>
+        </p:txBody>
+      </p:sp>
+      <p:sp>
+        <p:nvSpPr>
+          <p:cNvPr id="41" name="Shape 39"/>
+          <p:cNvSpPr/>
+          <p:nvPr/>
+        </p:nvSpPr>
+        <p:spPr>
+          <a:xfrm>
+            <a:off x="2542032" y="4023360"/>
+            <a:ext cx="2011680" cy="402336"/>
+          </a:xfrm>
+          <a:prstGeom prst="rect">
+            <a:avLst>
+              <a:gd name="adj" fmla="val 13636"/>
+            </a:avLst>
+          </a:prstGeom>
+          <a:solidFill>
+            <a:srgbClr val="EEF2FF"/>
+          </a:solidFill>
+          <a:ln w="12700">
+            <a:solidFill>
+              <a:srgbClr val="6366F1"/>
+            </a:solidFill>
+            <a:prstDash val="solid"/>
+          </a:ln>
+        </p:spPr>
+      </p:sp>
+      <p:sp>
+        <p:nvSpPr>
+          <p:cNvPr id="42" name="Text 40"/>
+          <p:cNvSpPr/>
+          <p:nvPr/>
+        </p:nvSpPr>
+        <p:spPr>
+          <a:xfrm>
+            <a:off x="2542032" y="4023360"/>
+            <a:ext cx="2011680" cy="402336"/>
           </a:xfrm>
           <a:prstGeom prst="rect">
             <a:avLst/>
@@ -33633,55 +34788,57 @@
               <a:buNone/>
             </a:pPr>
             <a:r>
-              <a:rPr lang="en-US" sz="1300" b="1" dirty="0">
-                <a:solidFill>
-                  <a:srgbClr val="9D174D"/>
+              <a:rPr lang="en-US" sz="1200" b="1" dirty="0">
+                <a:solidFill>
+                  <a:srgbClr val="4338CA"/>
                 </a:solidFill>
                 <a:latin typeface="Trebuchet MS" pitchFamily="34" charset="0"/>
                 <a:ea typeface="Trebuchet MS" pitchFamily="34" charset="-122"/>
                 <a:cs typeface="Trebuchet MS" pitchFamily="34" charset="-120"/>
               </a:rPr>
-              <a:t>-less</a:t>
-            </a:r>
-            <a:endParaRPr lang="en-US" sz="1300" dirty="0"/>
-          </a:p>
-        </p:txBody>
-      </p:sp>
-      <p:sp>
-        <p:nvSpPr>
-          <p:cNvPr id="38" name="Shape 36"/>
-          <p:cNvSpPr/>
-          <p:nvPr/>
-        </p:nvSpPr>
-        <p:spPr>
-          <a:xfrm>
-            <a:off x="365760" y="3246120"/>
-            <a:ext cx="2468880" cy="402336"/>
-          </a:xfrm>
-          <a:prstGeom prst="rect">
-            <a:avLst/>
-          </a:prstGeom>
-          <a:solidFill>
-            <a:srgbClr val="DDD6FE"/>
-          </a:solidFill>
-          <a:ln w="12700">
-            <a:solidFill>
-              <a:srgbClr val="E2E8F0"/>
-            </a:solidFill>
-            <a:prstDash val="solid"/>
-          </a:ln>
-        </p:spPr>
-      </p:sp>
-      <p:sp>
-        <p:nvSpPr>
-          <p:cNvPr id="39" name="Text 37"/>
-          <p:cNvSpPr/>
-          <p:nvPr/>
-        </p:nvSpPr>
-        <p:spPr>
-          <a:xfrm>
-            <a:off x="365760" y="3246120"/>
-            <a:ext cx="2468880" cy="402336"/>
+              <a:t>ends</a:t>
+            </a:r>
+            <a:endParaRPr lang="en-US" sz="1200" dirty="0"/>
+          </a:p>
+        </p:txBody>
+      </p:sp>
+      <p:sp>
+        <p:nvSpPr>
+          <p:cNvPr id="43" name="Shape 41"/>
+          <p:cNvSpPr/>
+          <p:nvPr/>
+        </p:nvSpPr>
+        <p:spPr>
+          <a:xfrm>
+            <a:off x="4718304" y="4023360"/>
+            <a:ext cx="2011680" cy="402336"/>
+          </a:xfrm>
+          <a:prstGeom prst="rect">
+            <a:avLst>
+              <a:gd name="adj" fmla="val 13636"/>
+            </a:avLst>
+          </a:prstGeom>
+          <a:solidFill>
+            <a:srgbClr val="EEF2FF"/>
+          </a:solidFill>
+          <a:ln w="12700">
+            <a:solidFill>
+              <a:srgbClr val="6366F1"/>
+            </a:solidFill>
+            <a:prstDash val="solid"/>
+          </a:ln>
+        </p:spPr>
+      </p:sp>
+      <p:sp>
+        <p:nvSpPr>
+          <p:cNvPr id="44" name="Text 42"/>
+          <p:cNvSpPr/>
+          <p:nvPr/>
+        </p:nvSpPr>
+        <p:spPr>
+          <a:xfrm>
+            <a:off x="4718304" y="4023360"/>
+            <a:ext cx="2011680" cy="402336"/>
           </a:xfrm>
           <a:prstGeom prst="rect">
             <a:avLst/>
@@ -33697,671 +34854,15 @@
               <a:buNone/>
             </a:pPr>
             <a:r>
-              <a:rPr lang="en-US" sz="1300" b="1" dirty="0">
-                <a:solidFill>
-                  <a:srgbClr val="4C1D95"/>
+              <a:rPr lang="en-US" sz="1200" b="1" dirty="0">
+                <a:solidFill>
+                  <a:srgbClr val="4338CA"/>
                 </a:solidFill>
                 <a:latin typeface="Trebuchet MS" pitchFamily="34" charset="0"/>
                 <a:ea typeface="Trebuchet MS" pitchFamily="34" charset="-122"/>
                 <a:cs typeface="Trebuchet MS" pitchFamily="34" charset="-120"/>
               </a:rPr>
-              <a:t>sp-</a:t>
-            </a:r>
-            <a:endParaRPr lang="en-US" sz="1300" dirty="0"/>
-          </a:p>
-        </p:txBody>
-      </p:sp>
-      <p:sp>
-        <p:nvSpPr>
-          <p:cNvPr id="40" name="Shape 38"/>
-          <p:cNvSpPr/>
-          <p:nvPr/>
-        </p:nvSpPr>
-        <p:spPr>
-          <a:xfrm>
-            <a:off x="2971800" y="3246120"/>
-            <a:ext cx="2834640" cy="402336"/>
-          </a:xfrm>
-          <a:prstGeom prst="rect">
-            <a:avLst/>
-          </a:prstGeom>
-          <a:solidFill>
-            <a:srgbClr val="F8FAFC"/>
-          </a:solidFill>
-          <a:ln w="12700">
-            <a:solidFill>
-              <a:srgbClr val="E2E8F0"/>
-            </a:solidFill>
-            <a:prstDash val="solid"/>
-          </a:ln>
-        </p:spPr>
-      </p:sp>
-      <p:sp>
-        <p:nvSpPr>
-          <p:cNvPr id="41" name="Shape 39"/>
-          <p:cNvSpPr/>
-          <p:nvPr/>
-        </p:nvSpPr>
-        <p:spPr>
-          <a:xfrm>
-            <a:off x="5943600" y="3246120"/>
-            <a:ext cx="2834640" cy="402336"/>
-          </a:xfrm>
-          <a:prstGeom prst="rect">
-            <a:avLst/>
-          </a:prstGeom>
-          <a:solidFill>
-            <a:srgbClr val="FCE7F3"/>
-          </a:solidFill>
-          <a:ln w="12700">
-            <a:solidFill>
-              <a:srgbClr val="E2E8F0"/>
-            </a:solidFill>
-            <a:prstDash val="solid"/>
-          </a:ln>
-        </p:spPr>
-      </p:sp>
-      <p:sp>
-        <p:nvSpPr>
-          <p:cNvPr id="42" name="Text 40"/>
-          <p:cNvSpPr/>
-          <p:nvPr/>
-        </p:nvSpPr>
-        <p:spPr>
-          <a:xfrm>
-            <a:off x="5943600" y="3246120"/>
-            <a:ext cx="2834640" cy="402336"/>
-          </a:xfrm>
-          <a:prstGeom prst="rect">
-            <a:avLst/>
-          </a:prstGeom>
-          <a:noFill/>
-          <a:ln/>
-        </p:spPr>
-        <p:txBody>
-          <a:bodyPr wrap="square" lIns="0" tIns="0" rIns="0" bIns="0" rtlCol="0" anchor="ctr"/>
-          <a:lstStyle/>
-          <a:p>
-            <a:pPr algn="ctr" indent="0" marL="0">
-              <a:buNone/>
-            </a:pPr>
-            <a:r>
-              <a:rPr lang="en-US" sz="1300" b="1" dirty="0">
-                <a:solidFill>
-                  <a:srgbClr val="9D174D"/>
-                </a:solidFill>
-                <a:latin typeface="Trebuchet MS" pitchFamily="34" charset="0"/>
-                <a:ea typeface="Trebuchet MS" pitchFamily="34" charset="-122"/>
-                <a:cs typeface="Trebuchet MS" pitchFamily="34" charset="-120"/>
-              </a:rPr>
-              <a:t>-ure</a:t>
-            </a:r>
-            <a:endParaRPr lang="en-US" sz="1300" dirty="0"/>
-          </a:p>
-        </p:txBody>
-      </p:sp>
-      <p:sp>
-        <p:nvSpPr>
-          <p:cNvPr id="43" name="Text 41"/>
-          <p:cNvSpPr/>
-          <p:nvPr/>
-        </p:nvSpPr>
-        <p:spPr>
-          <a:xfrm>
-            <a:off x="365760" y="3611880"/>
-            <a:ext cx="1828800" cy="347472"/>
-          </a:xfrm>
-          <a:prstGeom prst="rect">
-            <a:avLst/>
-          </a:prstGeom>
-          <a:noFill/>
-          <a:ln/>
-        </p:spPr>
-        <p:txBody>
-          <a:bodyPr wrap="square" lIns="0" tIns="0" rIns="0" bIns="0" rtlCol="0" anchor="ctr"/>
-          <a:lstStyle/>
-          <a:p>
-            <a:pPr algn="l" indent="0" marL="0">
-              <a:buNone/>
-            </a:pPr>
-            <a:r>
-              <a:rPr lang="en-US" sz="1200" b="1" dirty="0">
-                <a:solidFill>
-                  <a:srgbClr val="0F172A"/>
-                </a:solidFill>
-                <a:latin typeface="Trebuchet MS" pitchFamily="34" charset="0"/>
-                <a:ea typeface="Trebuchet MS" pitchFamily="34" charset="-122"/>
-                <a:cs typeface="Trebuchet MS" pitchFamily="34" charset="-120"/>
-              </a:rPr>
-              <a:t>Sample words:</a:t>
-            </a:r>
-            <a:endParaRPr lang="en-US" sz="1200" dirty="0"/>
-          </a:p>
-        </p:txBody>
-      </p:sp>
-      <p:sp>
-        <p:nvSpPr>
-          <p:cNvPr id="44" name="Shape 42"/>
-          <p:cNvSpPr/>
-          <p:nvPr/>
-        </p:nvSpPr>
-        <p:spPr>
-          <a:xfrm>
-            <a:off x="365760" y="4023360"/>
-            <a:ext cx="2011680" cy="402336"/>
-          </a:xfrm>
-          <a:prstGeom prst="rect">
-            <a:avLst>
-              <a:gd name="adj" fmla="val 13636"/>
-            </a:avLst>
-          </a:prstGeom>
-          <a:solidFill>
-            <a:srgbClr val="EEF2FF"/>
-          </a:solidFill>
-          <a:ln w="12700">
-            <a:solidFill>
-              <a:srgbClr val="6366F1"/>
-            </a:solidFill>
-            <a:prstDash val="solid"/>
-          </a:ln>
-        </p:spPr>
-      </p:sp>
-      <p:sp>
-        <p:nvSpPr>
-          <p:cNvPr id="45" name="Text 43"/>
-          <p:cNvSpPr/>
-          <p:nvPr/>
-        </p:nvSpPr>
-        <p:spPr>
-          <a:xfrm>
-            <a:off x="365760" y="4023360"/>
-            <a:ext cx="2011680" cy="402336"/>
-          </a:xfrm>
-          <a:prstGeom prst="rect">
-            <a:avLst/>
-          </a:prstGeom>
-          <a:noFill/>
-          <a:ln/>
-        </p:spPr>
-        <p:txBody>
-          <a:bodyPr wrap="square" lIns="0" tIns="0" rIns="0" bIns="0" rtlCol="0" anchor="ctr"/>
-          <a:lstStyle/>
-          <a:p>
-            <a:pPr algn="ctr" indent="0" marL="0">
-              <a:buNone/>
-            </a:pPr>
-            <a:r>
-              <a:rPr lang="en-US" sz="1200" b="1" dirty="0">
-                <a:solidFill>
-                  <a:srgbClr val="4338CA"/>
-                </a:solidFill>
-                <a:latin typeface="Trebuchet MS" pitchFamily="34" charset="0"/>
-                <a:ea typeface="Trebuchet MS" pitchFamily="34" charset="-122"/>
-                <a:cs typeface="Trebuchet MS" pitchFamily="34" charset="-120"/>
-              </a:rPr>
-              <a:t>ending</a:t>
-            </a:r>
-            <a:endParaRPr lang="en-US" sz="1200" dirty="0"/>
-          </a:p>
-        </p:txBody>
-      </p:sp>
-      <p:sp>
-        <p:nvSpPr>
-          <p:cNvPr id="46" name="Shape 44"/>
-          <p:cNvSpPr/>
-          <p:nvPr/>
-        </p:nvSpPr>
-        <p:spPr>
-          <a:xfrm>
-            <a:off x="2542032" y="4023360"/>
-            <a:ext cx="2011680" cy="402336"/>
-          </a:xfrm>
-          <a:prstGeom prst="rect">
-            <a:avLst>
-              <a:gd name="adj" fmla="val 13636"/>
-            </a:avLst>
-          </a:prstGeom>
-          <a:solidFill>
-            <a:srgbClr val="EEF2FF"/>
-          </a:solidFill>
-          <a:ln w="12700">
-            <a:solidFill>
-              <a:srgbClr val="6366F1"/>
-            </a:solidFill>
-            <a:prstDash val="solid"/>
-          </a:ln>
-        </p:spPr>
-      </p:sp>
-      <p:sp>
-        <p:nvSpPr>
-          <p:cNvPr id="47" name="Text 45"/>
-          <p:cNvSpPr/>
-          <p:nvPr/>
-        </p:nvSpPr>
-        <p:spPr>
-          <a:xfrm>
-            <a:off x="2542032" y="4023360"/>
-            <a:ext cx="2011680" cy="402336"/>
-          </a:xfrm>
-          <a:prstGeom prst="rect">
-            <a:avLst/>
-          </a:prstGeom>
-          <a:noFill/>
-          <a:ln/>
-        </p:spPr>
-        <p:txBody>
-          <a:bodyPr wrap="square" lIns="0" tIns="0" rIns="0" bIns="0" rtlCol="0" anchor="ctr"/>
-          <a:lstStyle/>
-          <a:p>
-            <a:pPr algn="ctr" indent="0" marL="0">
-              <a:buNone/>
-            </a:pPr>
-            <a:r>
-              <a:rPr lang="en-US" sz="1200" b="1" dirty="0">
-                <a:solidFill>
-                  <a:srgbClr val="4338CA"/>
-                </a:solidFill>
-                <a:latin typeface="Trebuchet MS" pitchFamily="34" charset="0"/>
-                <a:ea typeface="Trebuchet MS" pitchFamily="34" charset="-122"/>
-                <a:cs typeface="Trebuchet MS" pitchFamily="34" charset="-120"/>
-              </a:rPr>
-              <a:t>endless</a:t>
-            </a:r>
-            <a:endParaRPr lang="en-US" sz="1200" dirty="0"/>
-          </a:p>
-        </p:txBody>
-      </p:sp>
-      <p:sp>
-        <p:nvSpPr>
-          <p:cNvPr id="48" name="Shape 46"/>
-          <p:cNvSpPr/>
-          <p:nvPr/>
-        </p:nvSpPr>
-        <p:spPr>
-          <a:xfrm>
-            <a:off x="4718304" y="4023360"/>
-            <a:ext cx="2011680" cy="402336"/>
-          </a:xfrm>
-          <a:prstGeom prst="rect">
-            <a:avLst>
-              <a:gd name="adj" fmla="val 13636"/>
-            </a:avLst>
-          </a:prstGeom>
-          <a:solidFill>
-            <a:srgbClr val="EEF2FF"/>
-          </a:solidFill>
-          <a:ln w="12700">
-            <a:solidFill>
-              <a:srgbClr val="6366F1"/>
-            </a:solidFill>
-            <a:prstDash val="solid"/>
-          </a:ln>
-        </p:spPr>
-      </p:sp>
-      <p:sp>
-        <p:nvSpPr>
-          <p:cNvPr id="49" name="Text 47"/>
-          <p:cNvSpPr/>
-          <p:nvPr/>
-        </p:nvSpPr>
-        <p:spPr>
-          <a:xfrm>
-            <a:off x="4718304" y="4023360"/>
-            <a:ext cx="2011680" cy="402336"/>
-          </a:xfrm>
-          <a:prstGeom prst="rect">
-            <a:avLst/>
-          </a:prstGeom>
-          <a:noFill/>
-          <a:ln/>
-        </p:spPr>
-        <p:txBody>
-          <a:bodyPr wrap="square" lIns="0" tIns="0" rIns="0" bIns="0" rtlCol="0" anchor="ctr"/>
-          <a:lstStyle/>
-          <a:p>
-            <a:pPr algn="ctr" indent="0" marL="0">
-              <a:buNone/>
-            </a:pPr>
-            <a:r>
-              <a:rPr lang="en-US" sz="1200" b="1" dirty="0">
-                <a:solidFill>
-                  <a:srgbClr val="4338CA"/>
-                </a:solidFill>
-                <a:latin typeface="Trebuchet MS" pitchFamily="34" charset="0"/>
-                <a:ea typeface="Trebuchet MS" pitchFamily="34" charset="-122"/>
-                <a:cs typeface="Trebuchet MS" pitchFamily="34" charset="-120"/>
-              </a:rPr>
-              <a:t>defend</a:t>
-            </a:r>
-            <a:endParaRPr lang="en-US" sz="1200" dirty="0"/>
-          </a:p>
-        </p:txBody>
-      </p:sp>
-      <p:sp>
-        <p:nvSpPr>
-          <p:cNvPr id="50" name="Shape 48"/>
-          <p:cNvSpPr/>
-          <p:nvPr/>
-        </p:nvSpPr>
-        <p:spPr>
-          <a:xfrm>
-            <a:off x="6894576" y="4023360"/>
-            <a:ext cx="2011680" cy="402336"/>
-          </a:xfrm>
-          <a:prstGeom prst="rect">
-            <a:avLst>
-              <a:gd name="adj" fmla="val 13636"/>
-            </a:avLst>
-          </a:prstGeom>
-          <a:solidFill>
-            <a:srgbClr val="EEF2FF"/>
-          </a:solidFill>
-          <a:ln w="12700">
-            <a:solidFill>
-              <a:srgbClr val="6366F1"/>
-            </a:solidFill>
-            <a:prstDash val="solid"/>
-          </a:ln>
-        </p:spPr>
-      </p:sp>
-      <p:sp>
-        <p:nvSpPr>
-          <p:cNvPr id="51" name="Text 49"/>
-          <p:cNvSpPr/>
-          <p:nvPr/>
-        </p:nvSpPr>
-        <p:spPr>
-          <a:xfrm>
-            <a:off x="6894576" y="4023360"/>
-            <a:ext cx="2011680" cy="402336"/>
-          </a:xfrm>
-          <a:prstGeom prst="rect">
-            <a:avLst/>
-          </a:prstGeom>
-          <a:noFill/>
-          <a:ln/>
-        </p:spPr>
-        <p:txBody>
-          <a:bodyPr wrap="square" lIns="0" tIns="0" rIns="0" bIns="0" rtlCol="0" anchor="ctr"/>
-          <a:lstStyle/>
-          <a:p>
-            <a:pPr algn="ctr" indent="0" marL="0">
-              <a:buNone/>
-            </a:pPr>
-            <a:r>
-              <a:rPr lang="en-US" sz="1200" b="1" dirty="0">
-                <a:solidFill>
-                  <a:srgbClr val="4338CA"/>
-                </a:solidFill>
-                <a:latin typeface="Trebuchet MS" pitchFamily="34" charset="0"/>
-                <a:ea typeface="Trebuchet MS" pitchFamily="34" charset="-122"/>
-                <a:cs typeface="Trebuchet MS" pitchFamily="34" charset="-120"/>
-              </a:rPr>
-              <a:t>extend</a:t>
-            </a:r>
-            <a:endParaRPr lang="en-US" sz="1200" dirty="0"/>
-          </a:p>
-        </p:txBody>
-      </p:sp>
-      <p:sp>
-        <p:nvSpPr>
-          <p:cNvPr id="52" name="Shape 50"/>
-          <p:cNvSpPr/>
-          <p:nvPr/>
-        </p:nvSpPr>
-        <p:spPr>
-          <a:xfrm>
-            <a:off x="365760" y="4498848"/>
-            <a:ext cx="2011680" cy="402336"/>
-          </a:xfrm>
-          <a:prstGeom prst="rect">
-            <a:avLst>
-              <a:gd name="adj" fmla="val 13636"/>
-            </a:avLst>
-          </a:prstGeom>
-          <a:solidFill>
-            <a:srgbClr val="EEF2FF"/>
-          </a:solidFill>
-          <a:ln w="12700">
-            <a:solidFill>
-              <a:srgbClr val="6366F1"/>
-            </a:solidFill>
-            <a:prstDash val="solid"/>
-          </a:ln>
-        </p:spPr>
-      </p:sp>
-      <p:sp>
-        <p:nvSpPr>
-          <p:cNvPr id="53" name="Text 51"/>
-          <p:cNvSpPr/>
-          <p:nvPr/>
-        </p:nvSpPr>
-        <p:spPr>
-          <a:xfrm>
-            <a:off x="365760" y="4498848"/>
-            <a:ext cx="2011680" cy="402336"/>
-          </a:xfrm>
-          <a:prstGeom prst="rect">
-            <a:avLst/>
-          </a:prstGeom>
-          <a:noFill/>
-          <a:ln/>
-        </p:spPr>
-        <p:txBody>
-          <a:bodyPr wrap="square" lIns="0" tIns="0" rIns="0" bIns="0" rtlCol="0" anchor="ctr"/>
-          <a:lstStyle/>
-          <a:p>
-            <a:pPr algn="ctr" indent="0" marL="0">
-              <a:buNone/>
-            </a:pPr>
-            <a:r>
-              <a:rPr lang="en-US" sz="1200" b="1" dirty="0">
-                <a:solidFill>
-                  <a:srgbClr val="4338CA"/>
-                </a:solidFill>
-                <a:latin typeface="Trebuchet MS" pitchFamily="34" charset="0"/>
-                <a:ea typeface="Trebuchet MS" pitchFamily="34" charset="-122"/>
-                <a:cs typeface="Trebuchet MS" pitchFamily="34" charset="-120"/>
-              </a:rPr>
-              <a:t>blend</a:t>
-            </a:r>
-            <a:endParaRPr lang="en-US" sz="1200" dirty="0"/>
-          </a:p>
-        </p:txBody>
-      </p:sp>
-      <p:sp>
-        <p:nvSpPr>
-          <p:cNvPr id="54" name="Shape 52"/>
-          <p:cNvSpPr/>
-          <p:nvPr/>
-        </p:nvSpPr>
-        <p:spPr>
-          <a:xfrm>
-            <a:off x="2542032" y="4498848"/>
-            <a:ext cx="2011680" cy="402336"/>
-          </a:xfrm>
-          <a:prstGeom prst="rect">
-            <a:avLst>
-              <a:gd name="adj" fmla="val 13636"/>
-            </a:avLst>
-          </a:prstGeom>
-          <a:solidFill>
-            <a:srgbClr val="EEF2FF"/>
-          </a:solidFill>
-          <a:ln w="12700">
-            <a:solidFill>
-              <a:srgbClr val="6366F1"/>
-            </a:solidFill>
-            <a:prstDash val="solid"/>
-          </a:ln>
-        </p:spPr>
-      </p:sp>
-      <p:sp>
-        <p:nvSpPr>
-          <p:cNvPr id="55" name="Text 53"/>
-          <p:cNvSpPr/>
-          <p:nvPr/>
-        </p:nvSpPr>
-        <p:spPr>
-          <a:xfrm>
-            <a:off x="2542032" y="4498848"/>
-            <a:ext cx="2011680" cy="402336"/>
-          </a:xfrm>
-          <a:prstGeom prst="rect">
-            <a:avLst/>
-          </a:prstGeom>
-          <a:noFill/>
-          <a:ln/>
-        </p:spPr>
-        <p:txBody>
-          <a:bodyPr wrap="square" lIns="0" tIns="0" rIns="0" bIns="0" rtlCol="0" anchor="ctr"/>
-          <a:lstStyle/>
-          <a:p>
-            <a:pPr algn="ctr" indent="0" marL="0">
-              <a:buNone/>
-            </a:pPr>
-            <a:r>
-              <a:rPr lang="en-US" sz="1200" b="1" dirty="0">
-                <a:solidFill>
-                  <a:srgbClr val="4338CA"/>
-                </a:solidFill>
-                <a:latin typeface="Trebuchet MS" pitchFamily="34" charset="0"/>
-                <a:ea typeface="Trebuchet MS" pitchFamily="34" charset="-122"/>
-                <a:cs typeface="Trebuchet MS" pitchFamily="34" charset="-120"/>
-              </a:rPr>
-              <a:t>fender</a:t>
-            </a:r>
-            <a:endParaRPr lang="en-US" sz="1200" dirty="0"/>
-          </a:p>
-        </p:txBody>
-      </p:sp>
-      <p:sp>
-        <p:nvSpPr>
-          <p:cNvPr id="56" name="Shape 54"/>
-          <p:cNvSpPr/>
-          <p:nvPr/>
-        </p:nvSpPr>
-        <p:spPr>
-          <a:xfrm>
-            <a:off x="4718304" y="4498848"/>
-            <a:ext cx="2011680" cy="402336"/>
-          </a:xfrm>
-          <a:prstGeom prst="rect">
-            <a:avLst>
-              <a:gd name="adj" fmla="val 13636"/>
-            </a:avLst>
-          </a:prstGeom>
-          <a:solidFill>
-            <a:srgbClr val="EEF2FF"/>
-          </a:solidFill>
-          <a:ln w="12700">
-            <a:solidFill>
-              <a:srgbClr val="6366F1"/>
-            </a:solidFill>
-            <a:prstDash val="solid"/>
-          </a:ln>
-        </p:spPr>
-      </p:sp>
-      <p:sp>
-        <p:nvSpPr>
-          <p:cNvPr id="57" name="Text 55"/>
-          <p:cNvSpPr/>
-          <p:nvPr/>
-        </p:nvSpPr>
-        <p:spPr>
-          <a:xfrm>
-            <a:off x="4718304" y="4498848"/>
-            <a:ext cx="2011680" cy="402336"/>
-          </a:xfrm>
-          <a:prstGeom prst="rect">
-            <a:avLst/>
-          </a:prstGeom>
-          <a:noFill/>
-          <a:ln/>
-        </p:spPr>
-        <p:txBody>
-          <a:bodyPr wrap="square" lIns="0" tIns="0" rIns="0" bIns="0" rtlCol="0" anchor="ctr"/>
-          <a:lstStyle/>
-          <a:p>
-            <a:pPr algn="ctr" indent="0" marL="0">
-              <a:buNone/>
-            </a:pPr>
-            <a:r>
-              <a:rPr lang="en-US" sz="1200" b="1" dirty="0">
-                <a:solidFill>
-                  <a:srgbClr val="4338CA"/>
-                </a:solidFill>
-                <a:latin typeface="Trebuchet MS" pitchFamily="34" charset="0"/>
-                <a:ea typeface="Trebuchet MS" pitchFamily="34" charset="-122"/>
-                <a:cs typeface="Trebuchet MS" pitchFamily="34" charset="-120"/>
-              </a:rPr>
-              <a:t>spend</a:t>
-            </a:r>
-            <a:endParaRPr lang="en-US" sz="1200" dirty="0"/>
-          </a:p>
-        </p:txBody>
-      </p:sp>
-      <p:sp>
-        <p:nvSpPr>
-          <p:cNvPr id="58" name="Shape 56"/>
-          <p:cNvSpPr/>
-          <p:nvPr/>
-        </p:nvSpPr>
-        <p:spPr>
-          <a:xfrm>
-            <a:off x="6894576" y="4498848"/>
-            <a:ext cx="2011680" cy="402336"/>
-          </a:xfrm>
-          <a:prstGeom prst="rect">
-            <a:avLst>
-              <a:gd name="adj" fmla="val 13636"/>
-            </a:avLst>
-          </a:prstGeom>
-          <a:solidFill>
-            <a:srgbClr val="EEF2FF"/>
-          </a:solidFill>
-          <a:ln w="12700">
-            <a:solidFill>
-              <a:srgbClr val="6366F1"/>
-            </a:solidFill>
-            <a:prstDash val="solid"/>
-          </a:ln>
-        </p:spPr>
-      </p:sp>
-      <p:sp>
-        <p:nvSpPr>
-          <p:cNvPr id="59" name="Text 57"/>
-          <p:cNvSpPr/>
-          <p:nvPr/>
-        </p:nvSpPr>
-        <p:spPr>
-          <a:xfrm>
-            <a:off x="6894576" y="4498848"/>
-            <a:ext cx="2011680" cy="402336"/>
-          </a:xfrm>
-          <a:prstGeom prst="rect">
-            <a:avLst/>
-          </a:prstGeom>
-          <a:noFill/>
-          <a:ln/>
-        </p:spPr>
-        <p:txBody>
-          <a:bodyPr wrap="square" lIns="0" tIns="0" rIns="0" bIns="0" rtlCol="0" anchor="ctr"/>
-          <a:lstStyle/>
-          <a:p>
-            <a:pPr algn="ctr" indent="0" marL="0">
-              <a:buNone/>
-            </a:pPr>
-            <a:r>
-              <a:rPr lang="en-US" sz="1200" b="1" dirty="0">
-                <a:solidFill>
-                  <a:srgbClr val="4338CA"/>
-                </a:solidFill>
-                <a:latin typeface="Trebuchet MS" pitchFamily="34" charset="0"/>
-                <a:ea typeface="Trebuchet MS" pitchFamily="34" charset="-122"/>
-                <a:cs typeface="Trebuchet MS" pitchFamily="34" charset="-120"/>
-              </a:rPr>
-              <a:t>surrender</a:t>
+              <a:t>ended</a:t>
             </a:r>
             <a:endParaRPr lang="en-US" sz="1200" dirty="0"/>
           </a:p>
@@ -34653,7 +35154,7 @@
                 <a:ea typeface="Calibri" pitchFamily="34" charset="-122"/>
                 <a:cs typeface="Calibri" pitchFamily="34" charset="-120"/>
               </a:rPr>
-              <a:t>Word Labs  •  wordlabs.app  •  Root: 'end' = to finish, stop, or limit</a:t>
+              <a:t>Word Labs  •  wordlabs.app  •  Root: 'end' = to finish; the final part</a:t>
             </a:r>
             <a:endParaRPr lang="en-US" sz="800" dirty="0"/>
           </a:p>
@@ -34817,7 +35318,7 @@
                 <a:ea typeface="Calibri" pitchFamily="34" charset="-122"/>
                 <a:cs typeface="Calibri" pitchFamily="34" charset="-120"/>
               </a:rPr>
-              <a:t>The core part of a word carrying its basic meaning. For example, 'end' means 'to finish, stop, or limit'.</a:t>
+              <a:t>The core part of a word carrying its basic meaning. For example, 'end' means 'to finish; the final part'.</a:t>
             </a:r>
             <a:endParaRPr lang="en-US" sz="1350" dirty="0"/>
           </a:p>
@@ -35437,7 +35938,7 @@
                 <a:ea typeface="Calibri" pitchFamily="34" charset="-122"/>
                 <a:cs typeface="Calibri" pitchFamily="34" charset="-120"/>
               </a:rPr>
-              <a:t>Word Labs  •  wordlabs.app  •  Root: 'end' = to finish, stop, or limit</a:t>
+              <a:t>Word Labs  •  wordlabs.app  •  Root: 'end' = to finish; the final part</a:t>
             </a:r>
             <a:endParaRPr lang="en-US" sz="800" dirty="0"/>
           </a:p>
@@ -35549,7 +36050,7 @@
                 <a:ea typeface="Calibri" pitchFamily="34" charset="-122"/>
                 <a:cs typeface="Calibri" pitchFamily="34" charset="-120"/>
               </a:rPr>
-              <a:t>1.  The word 'endless' contains the root 'end' and the suffix '-less'.</a:t>
+              <a:t>1.  'end' means 'the very beginning of something'.</a:t>
             </a:r>
             <a:endParaRPr lang="en-US" sz="1300" dirty="0"/>
           </a:p>
@@ -35572,11 +36073,11 @@
             </a:avLst>
           </a:prstGeom>
           <a:solidFill>
-            <a:srgbClr val="DCFCE7"/>
-          </a:solidFill>
-          <a:ln w="12700">
-            <a:solidFill>
-              <a:srgbClr val="16A34A"/>
+            <a:srgbClr val="FEE2E2"/>
+          </a:solidFill>
+          <a:ln w="12700">
+            <a:solidFill>
+              <a:srgbClr val="DC2626"/>
             </a:solidFill>
             <a:prstDash val="solid"/>
           </a:ln>
@@ -35609,13 +36110,13 @@
             <a:r>
               <a:rPr lang="en-US" sz="1100" b="1" dirty="0">
                 <a:solidFill>
-                  <a:srgbClr val="16A34A"/>
+                  <a:srgbClr val="DC2626"/>
                 </a:solidFill>
                 <a:latin typeface="Trebuchet MS" pitchFamily="34" charset="0"/>
                 <a:ea typeface="Trebuchet MS" pitchFamily="34" charset="-122"/>
                 <a:cs typeface="Trebuchet MS" pitchFamily="34" charset="-120"/>
               </a:rPr>
-              <a:t>TRUE</a:t>
+              <a:t>FALSE</a:t>
             </a:r>
             <a:endParaRPr lang="en-US" sz="1100" dirty="0"/>
           </a:p>
@@ -35688,7 +36189,7 @@
                 <a:ea typeface="Calibri" pitchFamily="34" charset="-122"/>
                 <a:cs typeface="Calibri" pitchFamily="34" charset="-120"/>
               </a:rPr>
-              <a:t>2.  The root 'end' comes from a Greek word.</a:t>
+              <a:t>2.  'end' means 'the last part of something'.</a:t>
             </a:r>
             <a:endParaRPr lang="en-US" sz="1300" dirty="0"/>
           </a:p>
@@ -35711,11 +36212,11 @@
             </a:avLst>
           </a:prstGeom>
           <a:solidFill>
-            <a:srgbClr val="FEE2E2"/>
-          </a:solidFill>
-          <a:ln w="12700">
-            <a:solidFill>
-              <a:srgbClr val="DC2626"/>
+            <a:srgbClr val="DCFCE7"/>
+          </a:solidFill>
+          <a:ln w="12700">
+            <a:solidFill>
+              <a:srgbClr val="16A34A"/>
             </a:solidFill>
             <a:prstDash val="solid"/>
           </a:ln>
@@ -35748,13 +36249,13 @@
             <a:r>
               <a:rPr lang="en-US" sz="1100" b="1" dirty="0">
                 <a:solidFill>
-                  <a:srgbClr val="DC2626"/>
+                  <a:srgbClr val="16A34A"/>
                 </a:solidFill>
                 <a:latin typeface="Trebuchet MS" pitchFamily="34" charset="0"/>
                 <a:ea typeface="Trebuchet MS" pitchFamily="34" charset="-122"/>
                 <a:cs typeface="Trebuchet MS" pitchFamily="34" charset="-120"/>
               </a:rPr>
-              <a:t>FALSE</a:t>
+              <a:t>TRUE</a:t>
             </a:r>
             <a:endParaRPr lang="en-US" sz="1100" dirty="0"/>
           </a:p>
@@ -35827,7 +36328,7 @@
                 <a:ea typeface="Calibri" pitchFamily="34" charset="-122"/>
                 <a:cs typeface="Calibri" pitchFamily="34" charset="-120"/>
               </a:rPr>
-              <a:t>3.  The word 'extend' means to make something stretch out longer.</a:t>
+              <a:t>3.  'ends' means 'finishes or comes to a stop'.</a:t>
             </a:r>
             <a:endParaRPr lang="en-US" sz="1300" dirty="0"/>
           </a:p>
@@ -35966,7 +36467,7 @@
                 <a:ea typeface="Calibri" pitchFamily="34" charset="-122"/>
                 <a:cs typeface="Calibri" pitchFamily="34" charset="-120"/>
               </a:rPr>
-              <a:t>4.  Adding the suffix '-ing' to 'end' makes the word 'ending'.</a:t>
+              <a:t>4.  'ends' means 'begins something new'.</a:t>
             </a:r>
             <a:endParaRPr lang="en-US" sz="1300" dirty="0"/>
           </a:p>
@@ -35989,11 +36490,11 @@
             </a:avLst>
           </a:prstGeom>
           <a:solidFill>
-            <a:srgbClr val="DCFCE7"/>
-          </a:solidFill>
-          <a:ln w="12700">
-            <a:solidFill>
-              <a:srgbClr val="16A34A"/>
+            <a:srgbClr val="FEE2E2"/>
+          </a:solidFill>
+          <a:ln w="12700">
+            <a:solidFill>
+              <a:srgbClr val="DC2626"/>
             </a:solidFill>
             <a:prstDash val="solid"/>
           </a:ln>
@@ -36026,13 +36527,13 @@
             <a:r>
               <a:rPr lang="en-US" sz="1100" b="1" dirty="0">
                 <a:solidFill>
-                  <a:srgbClr val="16A34A"/>
+                  <a:srgbClr val="DC2626"/>
                 </a:solidFill>
                 <a:latin typeface="Trebuchet MS" pitchFamily="34" charset="0"/>
                 <a:ea typeface="Trebuchet MS" pitchFamily="34" charset="-122"/>
                 <a:cs typeface="Trebuchet MS" pitchFamily="34" charset="-120"/>
               </a:rPr>
-              <a:t>TRUE</a:t>
+              <a:t>FALSE</a:t>
             </a:r>
             <a:endParaRPr lang="en-US" sz="1100" dirty="0"/>
           </a:p>
@@ -36105,7 +36606,7 @@
                 <a:ea typeface="Calibri" pitchFamily="34" charset="-122"/>
                 <a:cs typeface="Calibri" pitchFamily="34" charset="-120"/>
               </a:rPr>
-              <a:t>5.  The word 'defend' has the prefix 'de' meaning 'up' or 'above'.</a:t>
+              <a:t>5.  'end' means 'to finish; the final part'.</a:t>
             </a:r>
             <a:endParaRPr lang="en-US" sz="1300" dirty="0"/>
           </a:p>
@@ -36128,11 +36629,11 @@
             </a:avLst>
           </a:prstGeom>
           <a:solidFill>
-            <a:srgbClr val="FEE2E2"/>
-          </a:solidFill>
-          <a:ln w="12700">
-            <a:solidFill>
-              <a:srgbClr val="DC2626"/>
+            <a:srgbClr val="DCFCE7"/>
+          </a:solidFill>
+          <a:ln w="12700">
+            <a:solidFill>
+              <a:srgbClr val="16A34A"/>
             </a:solidFill>
             <a:prstDash val="solid"/>
           </a:ln>
@@ -36165,13 +36666,13 @@
             <a:r>
               <a:rPr lang="en-US" sz="1100" b="1" dirty="0">
                 <a:solidFill>
-                  <a:srgbClr val="DC2626"/>
+                  <a:srgbClr val="16A34A"/>
                 </a:solidFill>
                 <a:latin typeface="Trebuchet MS" pitchFamily="34" charset="0"/>
                 <a:ea typeface="Trebuchet MS" pitchFamily="34" charset="-122"/>
                 <a:cs typeface="Trebuchet MS" pitchFamily="34" charset="-120"/>
               </a:rPr>
-              <a:t>FALSE</a:t>
+              <a:t>TRUE</a:t>
             </a:r>
             <a:endParaRPr lang="en-US" sz="1100" dirty="0"/>
           </a:p>
@@ -36463,7 +36964,7 @@
                 <a:ea typeface="Calibri" pitchFamily="34" charset="-122"/>
                 <a:cs typeface="Calibri" pitchFamily="34" charset="-120"/>
               </a:rPr>
-              <a:t>Word Labs  •  wordlabs.app  •  Root: 'end' = to finish, stop, or limit</a:t>
+              <a:t>Word Labs  •  wordlabs.app  •  Root: 'end' = to finish; the final part</a:t>
             </a:r>
             <a:endParaRPr lang="en-US" sz="800" dirty="0"/>
           </a:p>
@@ -36600,7 +37101,7 @@
                 <a:ea typeface="Trebuchet MS" pitchFamily="34" charset="-122"/>
                 <a:cs typeface="Trebuchet MS" pitchFamily="34" charset="-120"/>
               </a:rPr>
-              <a:t>to finish, stop, or limit</a:t>
+              <a:t>to finish; the final part</a:t>
             </a:r>
             <a:endParaRPr lang="en-US" sz="2000" dirty="0"/>
           </a:p>
@@ -36639,7 +37140,7 @@
                 <a:ea typeface="Calibri" pitchFamily="34" charset="-122"/>
                 <a:cs typeface="Calibri" pitchFamily="34" charset="-120"/>
               </a:rPr>
-              <a:t>Origin: Latin: finis</a:t>
+              <a:t>Origin: Anglo-Saxon (Old English) root</a:t>
             </a:r>
             <a:endParaRPr lang="en-US" sz="1100" dirty="0"/>
           </a:p>
@@ -36744,7 +37245,7 @@
                 <a:ea typeface="Trebuchet MS" pitchFamily="34" charset="-122"/>
                 <a:cs typeface="Trebuchet MS" pitchFamily="34" charset="-120"/>
               </a:rPr>
-              <a:t>ending</a:t>
+              <a:t>end</a:t>
             </a:r>
             <a:endParaRPr lang="en-US" sz="1300" dirty="0"/>
           </a:p>
@@ -36810,7 +37311,7 @@
                 <a:ea typeface="Trebuchet MS" pitchFamily="34" charset="-122"/>
                 <a:cs typeface="Trebuchet MS" pitchFamily="34" charset="-120"/>
               </a:rPr>
-              <a:t>endless</a:t>
+              <a:t>ends</a:t>
             </a:r>
             <a:endParaRPr lang="en-US" sz="1300" dirty="0"/>
           </a:p>
@@ -36876,271 +37377,7 @@
                 <a:ea typeface="Trebuchet MS" pitchFamily="34" charset="-122"/>
                 <a:cs typeface="Trebuchet MS" pitchFamily="34" charset="-120"/>
               </a:rPr>
-              <a:t>defend</a:t>
-            </a:r>
-            <a:endParaRPr lang="en-US" sz="1300" dirty="0"/>
-          </a:p>
-        </p:txBody>
-      </p:sp>
-      <p:sp>
-        <p:nvSpPr>
-          <p:cNvPr id="22" name="Shape 20"/>
-          <p:cNvSpPr/>
-          <p:nvPr/>
-        </p:nvSpPr>
-        <p:spPr>
-          <a:xfrm>
-            <a:off x="6812280" y="2743200"/>
-            <a:ext cx="2011680" cy="502920"/>
-          </a:xfrm>
-          <a:prstGeom prst="rect">
-            <a:avLst>
-              <a:gd name="adj" fmla="val 14545"/>
-            </a:avLst>
-          </a:prstGeom>
-          <a:solidFill>
-            <a:srgbClr val="EEF2FF"/>
-          </a:solidFill>
-          <a:ln w="12700">
-            <a:solidFill>
-              <a:srgbClr val="6366F1"/>
-            </a:solidFill>
-            <a:prstDash val="solid"/>
-          </a:ln>
-        </p:spPr>
-      </p:sp>
-      <p:sp>
-        <p:nvSpPr>
-          <p:cNvPr id="23" name="Text 21"/>
-          <p:cNvSpPr/>
-          <p:nvPr/>
-        </p:nvSpPr>
-        <p:spPr>
-          <a:xfrm>
-            <a:off x="6812280" y="2743200"/>
-            <a:ext cx="2011680" cy="502920"/>
-          </a:xfrm>
-          <a:prstGeom prst="rect">
-            <a:avLst/>
-          </a:prstGeom>
-          <a:noFill/>
-          <a:ln/>
-        </p:spPr>
-        <p:txBody>
-          <a:bodyPr wrap="square" lIns="0" tIns="0" rIns="0" bIns="0" rtlCol="0" anchor="ctr"/>
-          <a:lstStyle/>
-          <a:p>
-            <a:pPr algn="ctr" indent="0" marL="0">
-              <a:buNone/>
-            </a:pPr>
-            <a:r>
-              <a:rPr lang="en-US" sz="1300" b="1" dirty="0">
-                <a:solidFill>
-                  <a:srgbClr val="4338CA"/>
-                </a:solidFill>
-                <a:latin typeface="Trebuchet MS" pitchFamily="34" charset="0"/>
-                <a:ea typeface="Trebuchet MS" pitchFamily="34" charset="-122"/>
-                <a:cs typeface="Trebuchet MS" pitchFamily="34" charset="-120"/>
-              </a:rPr>
-              <a:t>extend</a:t>
-            </a:r>
-            <a:endParaRPr lang="en-US" sz="1300" dirty="0"/>
-          </a:p>
-        </p:txBody>
-      </p:sp>
-      <p:sp>
-        <p:nvSpPr>
-          <p:cNvPr id="24" name="Shape 22"/>
-          <p:cNvSpPr/>
-          <p:nvPr/>
-        </p:nvSpPr>
-        <p:spPr>
-          <a:xfrm>
-            <a:off x="365760" y="3401568"/>
-            <a:ext cx="2011680" cy="502920"/>
-          </a:xfrm>
-          <a:prstGeom prst="rect">
-            <a:avLst>
-              <a:gd name="adj" fmla="val 14545"/>
-            </a:avLst>
-          </a:prstGeom>
-          <a:solidFill>
-            <a:srgbClr val="EEF2FF"/>
-          </a:solidFill>
-          <a:ln w="12700">
-            <a:solidFill>
-              <a:srgbClr val="6366F1"/>
-            </a:solidFill>
-            <a:prstDash val="solid"/>
-          </a:ln>
-        </p:spPr>
-      </p:sp>
-      <p:sp>
-        <p:nvSpPr>
-          <p:cNvPr id="25" name="Text 23"/>
-          <p:cNvSpPr/>
-          <p:nvPr/>
-        </p:nvSpPr>
-        <p:spPr>
-          <a:xfrm>
-            <a:off x="365760" y="3401568"/>
-            <a:ext cx="2011680" cy="502920"/>
-          </a:xfrm>
-          <a:prstGeom prst="rect">
-            <a:avLst/>
-          </a:prstGeom>
-          <a:noFill/>
-          <a:ln/>
-        </p:spPr>
-        <p:txBody>
-          <a:bodyPr wrap="square" lIns="0" tIns="0" rIns="0" bIns="0" rtlCol="0" anchor="ctr"/>
-          <a:lstStyle/>
-          <a:p>
-            <a:pPr algn="ctr" indent="0" marL="0">
-              <a:buNone/>
-            </a:pPr>
-            <a:r>
-              <a:rPr lang="en-US" sz="1300" b="1" dirty="0">
-                <a:solidFill>
-                  <a:srgbClr val="4338CA"/>
-                </a:solidFill>
-                <a:latin typeface="Trebuchet MS" pitchFamily="34" charset="0"/>
-                <a:ea typeface="Trebuchet MS" pitchFamily="34" charset="-122"/>
-                <a:cs typeface="Trebuchet MS" pitchFamily="34" charset="-120"/>
-              </a:rPr>
-              <a:t>blend</a:t>
-            </a:r>
-            <a:endParaRPr lang="en-US" sz="1300" dirty="0"/>
-          </a:p>
-        </p:txBody>
-      </p:sp>
-      <p:sp>
-        <p:nvSpPr>
-          <p:cNvPr id="26" name="Shape 24"/>
-          <p:cNvSpPr/>
-          <p:nvPr/>
-        </p:nvSpPr>
-        <p:spPr>
-          <a:xfrm>
-            <a:off x="2514600" y="3401568"/>
-            <a:ext cx="2011680" cy="502920"/>
-          </a:xfrm>
-          <a:prstGeom prst="rect">
-            <a:avLst>
-              <a:gd name="adj" fmla="val 14545"/>
-            </a:avLst>
-          </a:prstGeom>
-          <a:solidFill>
-            <a:srgbClr val="EEF2FF"/>
-          </a:solidFill>
-          <a:ln w="12700">
-            <a:solidFill>
-              <a:srgbClr val="6366F1"/>
-            </a:solidFill>
-            <a:prstDash val="solid"/>
-          </a:ln>
-        </p:spPr>
-      </p:sp>
-      <p:sp>
-        <p:nvSpPr>
-          <p:cNvPr id="27" name="Text 25"/>
-          <p:cNvSpPr/>
-          <p:nvPr/>
-        </p:nvSpPr>
-        <p:spPr>
-          <a:xfrm>
-            <a:off x="2514600" y="3401568"/>
-            <a:ext cx="2011680" cy="502920"/>
-          </a:xfrm>
-          <a:prstGeom prst="rect">
-            <a:avLst/>
-          </a:prstGeom>
-          <a:noFill/>
-          <a:ln/>
-        </p:spPr>
-        <p:txBody>
-          <a:bodyPr wrap="square" lIns="0" tIns="0" rIns="0" bIns="0" rtlCol="0" anchor="ctr"/>
-          <a:lstStyle/>
-          <a:p>
-            <a:pPr algn="ctr" indent="0" marL="0">
-              <a:buNone/>
-            </a:pPr>
-            <a:r>
-              <a:rPr lang="en-US" sz="1300" b="1" dirty="0">
-                <a:solidFill>
-                  <a:srgbClr val="4338CA"/>
-                </a:solidFill>
-                <a:latin typeface="Trebuchet MS" pitchFamily="34" charset="0"/>
-                <a:ea typeface="Trebuchet MS" pitchFamily="34" charset="-122"/>
-                <a:cs typeface="Trebuchet MS" pitchFamily="34" charset="-120"/>
-              </a:rPr>
-              <a:t>fender</a:t>
-            </a:r>
-            <a:endParaRPr lang="en-US" sz="1300" dirty="0"/>
-          </a:p>
-        </p:txBody>
-      </p:sp>
-      <p:sp>
-        <p:nvSpPr>
-          <p:cNvPr id="28" name="Shape 26"/>
-          <p:cNvSpPr/>
-          <p:nvPr/>
-        </p:nvSpPr>
-        <p:spPr>
-          <a:xfrm>
-            <a:off x="4663440" y="3401568"/>
-            <a:ext cx="2011680" cy="502920"/>
-          </a:xfrm>
-          <a:prstGeom prst="rect">
-            <a:avLst>
-              <a:gd name="adj" fmla="val 14545"/>
-            </a:avLst>
-          </a:prstGeom>
-          <a:solidFill>
-            <a:srgbClr val="EEF2FF"/>
-          </a:solidFill>
-          <a:ln w="12700">
-            <a:solidFill>
-              <a:srgbClr val="6366F1"/>
-            </a:solidFill>
-            <a:prstDash val="solid"/>
-          </a:ln>
-        </p:spPr>
-      </p:sp>
-      <p:sp>
-        <p:nvSpPr>
-          <p:cNvPr id="29" name="Text 27"/>
-          <p:cNvSpPr/>
-          <p:nvPr/>
-        </p:nvSpPr>
-        <p:spPr>
-          <a:xfrm>
-            <a:off x="4663440" y="3401568"/>
-            <a:ext cx="2011680" cy="502920"/>
-          </a:xfrm>
-          <a:prstGeom prst="rect">
-            <a:avLst/>
-          </a:prstGeom>
-          <a:noFill/>
-          <a:ln/>
-        </p:spPr>
-        <p:txBody>
-          <a:bodyPr wrap="square" lIns="0" tIns="0" rIns="0" bIns="0" rtlCol="0" anchor="ctr"/>
-          <a:lstStyle/>
-          <a:p>
-            <a:pPr algn="ctr" indent="0" marL="0">
-              <a:buNone/>
-            </a:pPr>
-            <a:r>
-              <a:rPr lang="en-US" sz="1300" b="1" dirty="0">
-                <a:solidFill>
-                  <a:srgbClr val="4338CA"/>
-                </a:solidFill>
-                <a:latin typeface="Trebuchet MS" pitchFamily="34" charset="0"/>
-                <a:ea typeface="Trebuchet MS" pitchFamily="34" charset="-122"/>
-                <a:cs typeface="Trebuchet MS" pitchFamily="34" charset="-120"/>
-              </a:rPr>
-              <a:t>spend</a:t>
+              <a:t>ended</a:t>
             </a:r>
             <a:endParaRPr lang="en-US" sz="1300" dirty="0"/>
           </a:p>
@@ -37432,7 +37669,7 @@
                 <a:ea typeface="Calibri" pitchFamily="34" charset="-122"/>
                 <a:cs typeface="Calibri" pitchFamily="34" charset="-120"/>
               </a:rPr>
-              <a:t>Word Labs  •  wordlabs.app  •  Root: 'end' = to finish, stop, or limit</a:t>
+              <a:t>Word Labs  •  wordlabs.app  •  Root: 'end' = to finish; the final part</a:t>
             </a:r>
             <a:endParaRPr lang="en-US" sz="800" dirty="0"/>
           </a:p>
@@ -37690,7 +37927,7 @@
             <a:avLst/>
           </a:prstGeom>
           <a:solidFill>
-            <a:srgbClr val="DDD6FE"/>
+            <a:srgbClr val="F8FAFC"/>
           </a:solidFill>
           <a:ln w="12700">
             <a:solidFill>
@@ -37702,14 +37939,39 @@
       </p:sp>
       <p:sp>
         <p:nvSpPr>
-          <p:cNvPr id="18" name="Text 16"/>
-          <p:cNvSpPr/>
-          <p:nvPr/>
-        </p:nvSpPr>
-        <p:spPr>
-          <a:xfrm>
-            <a:off x="640080" y="1755648"/>
-            <a:ext cx="1463040" cy="420624"/>
+          <p:cNvPr id="18" name="Shape 16"/>
+          <p:cNvSpPr/>
+          <p:nvPr/>
+        </p:nvSpPr>
+        <p:spPr>
+          <a:xfrm>
+            <a:off x="3291840" y="1755648"/>
+            <a:ext cx="1645920" cy="420624"/>
+          </a:xfrm>
+          <a:prstGeom prst="rect">
+            <a:avLst/>
+          </a:prstGeom>
+          <a:solidFill>
+            <a:srgbClr val="CCFBF1"/>
+          </a:solidFill>
+          <a:ln w="12700">
+            <a:solidFill>
+              <a:srgbClr val="E5E7EB"/>
+            </a:solidFill>
+            <a:prstDash val="solid"/>
+          </a:ln>
+        </p:spPr>
+      </p:sp>
+      <p:sp>
+        <p:nvSpPr>
+          <p:cNvPr id="19" name="Text 17"/>
+          <p:cNvSpPr/>
+          <p:nvPr/>
+        </p:nvSpPr>
+        <p:spPr>
+          <a:xfrm>
+            <a:off x="3291840" y="1755648"/>
+            <a:ext cx="1645920" cy="420624"/>
           </a:xfrm>
           <a:prstGeom prst="rect">
             <a:avLst/>
@@ -37727,13 +37989,13 @@
             <a:r>
               <a:rPr lang="en-US" sz="1300" b="1" dirty="0">
                 <a:solidFill>
-                  <a:srgbClr val="4C1D95"/>
+                  <a:srgbClr val="0F766E"/>
                 </a:solidFill>
                 <a:latin typeface="Trebuchet MS" pitchFamily="34" charset="0"/>
                 <a:ea typeface="Trebuchet MS" pitchFamily="34" charset="-122"/>
                 <a:cs typeface="Trebuchet MS" pitchFamily="34" charset="-120"/>
               </a:rPr>
-              <a:t>ap-</a:t>
+              <a:t>end</a:t>
             </a:r>
             <a:endParaRPr lang="en-US" sz="1300" dirty="0"/>
           </a:p>
@@ -37741,20 +38003,20 @@
       </p:sp>
       <p:sp>
         <p:nvSpPr>
-          <p:cNvPr id="19" name="Shape 17"/>
-          <p:cNvSpPr/>
-          <p:nvPr/>
-        </p:nvSpPr>
-        <p:spPr>
-          <a:xfrm>
-            <a:off x="3291840" y="1755648"/>
-            <a:ext cx="1645920" cy="420624"/>
-          </a:xfrm>
-          <a:prstGeom prst="rect">
-            <a:avLst/>
-          </a:prstGeom>
-          <a:solidFill>
-            <a:srgbClr val="CCFBF1"/>
+          <p:cNvPr id="20" name="Shape 18"/>
+          <p:cNvSpPr/>
+          <p:nvPr/>
+        </p:nvSpPr>
+        <p:spPr>
+          <a:xfrm>
+            <a:off x="5943600" y="1755648"/>
+            <a:ext cx="1463040" cy="420624"/>
+          </a:xfrm>
+          <a:prstGeom prst="rect">
+            <a:avLst/>
+          </a:prstGeom>
+          <a:solidFill>
+            <a:srgbClr val="FCE7F3"/>
           </a:solidFill>
           <a:ln w="12700">
             <a:solidFill>
@@ -37766,14 +38028,14 @@
       </p:sp>
       <p:sp>
         <p:nvSpPr>
-          <p:cNvPr id="20" name="Text 18"/>
-          <p:cNvSpPr/>
-          <p:nvPr/>
-        </p:nvSpPr>
-        <p:spPr>
-          <a:xfrm>
-            <a:off x="3291840" y="1755648"/>
-            <a:ext cx="1645920" cy="420624"/>
+          <p:cNvPr id="21" name="Text 19"/>
+          <p:cNvSpPr/>
+          <p:nvPr/>
+        </p:nvSpPr>
+        <p:spPr>
+          <a:xfrm>
+            <a:off x="5943600" y="1755648"/>
+            <a:ext cx="1463040" cy="420624"/>
           </a:xfrm>
           <a:prstGeom prst="rect">
             <a:avLst/>
@@ -37791,13 +38053,13 @@
             <a:r>
               <a:rPr lang="en-US" sz="1300" b="1" dirty="0">
                 <a:solidFill>
-                  <a:srgbClr val="0F766E"/>
+                  <a:srgbClr val="9D174D"/>
                 </a:solidFill>
                 <a:latin typeface="Trebuchet MS" pitchFamily="34" charset="0"/>
                 <a:ea typeface="Trebuchet MS" pitchFamily="34" charset="-122"/>
                 <a:cs typeface="Trebuchet MS" pitchFamily="34" charset="-120"/>
               </a:rPr>
-              <a:t>end</a:t>
+              <a:t>-ed</a:t>
             </a:r>
             <a:endParaRPr lang="en-US" sz="1300" dirty="0"/>
           </a:p>
@@ -37805,19 +38067,69 @@
       </p:sp>
       <p:sp>
         <p:nvSpPr>
-          <p:cNvPr id="21" name="Shape 19"/>
-          <p:cNvSpPr/>
-          <p:nvPr/>
-        </p:nvSpPr>
-        <p:spPr>
-          <a:xfrm>
-            <a:off x="5943600" y="1755648"/>
+          <p:cNvPr id="22" name="Shape 20"/>
+          <p:cNvSpPr/>
+          <p:nvPr/>
+        </p:nvSpPr>
+        <p:spPr>
+          <a:xfrm>
+            <a:off x="640080" y="2212848"/>
             <a:ext cx="1463040" cy="420624"/>
           </a:xfrm>
           <a:prstGeom prst="rect">
             <a:avLst/>
           </a:prstGeom>
           <a:solidFill>
+            <a:srgbClr val="F1F5F9"/>
+          </a:solidFill>
+          <a:ln w="12700">
+            <a:solidFill>
+              <a:srgbClr val="E5E7EB"/>
+            </a:solidFill>
+            <a:prstDash val="solid"/>
+          </a:ln>
+        </p:spPr>
+      </p:sp>
+      <p:sp>
+        <p:nvSpPr>
+          <p:cNvPr id="23" name="Shape 21"/>
+          <p:cNvSpPr/>
+          <p:nvPr/>
+        </p:nvSpPr>
+        <p:spPr>
+          <a:xfrm>
+            <a:off x="3291840" y="2212848"/>
+            <a:ext cx="1645920" cy="420624"/>
+          </a:xfrm>
+          <a:prstGeom prst="rect">
+            <a:avLst/>
+          </a:prstGeom>
+          <a:solidFill>
+            <a:srgbClr val="F1F5F9"/>
+          </a:solidFill>
+          <a:ln w="12700">
+            <a:solidFill>
+              <a:srgbClr val="E5E7EB"/>
+            </a:solidFill>
+            <a:prstDash val="solid"/>
+          </a:ln>
+        </p:spPr>
+      </p:sp>
+      <p:sp>
+        <p:nvSpPr>
+          <p:cNvPr id="24" name="Shape 22"/>
+          <p:cNvSpPr/>
+          <p:nvPr/>
+        </p:nvSpPr>
+        <p:spPr>
+          <a:xfrm>
+            <a:off x="5943600" y="2212848"/>
+            <a:ext cx="1463040" cy="420624"/>
+          </a:xfrm>
+          <a:prstGeom prst="rect">
+            <a:avLst/>
+          </a:prstGeom>
+          <a:solidFill>
             <a:srgbClr val="FCE7F3"/>
           </a:solidFill>
           <a:ln w="12700">
@@ -37830,13 +38142,13 @@
       </p:sp>
       <p:sp>
         <p:nvSpPr>
-          <p:cNvPr id="22" name="Text 20"/>
-          <p:cNvSpPr/>
-          <p:nvPr/>
-        </p:nvSpPr>
-        <p:spPr>
-          <a:xfrm>
-            <a:off x="5943600" y="1755648"/>
+          <p:cNvPr id="25" name="Text 23"/>
+          <p:cNvSpPr/>
+          <p:nvPr/>
+        </p:nvSpPr>
+        <p:spPr>
+          <a:xfrm>
+            <a:off x="5943600" y="2212848"/>
             <a:ext cx="1463040" cy="420624"/>
           </a:xfrm>
           <a:prstGeom prst="rect">
@@ -37861,7 +38173,7 @@
                 <a:ea typeface="Trebuchet MS" pitchFamily="34" charset="-122"/>
                 <a:cs typeface="Trebuchet MS" pitchFamily="34" charset="-120"/>
               </a:rPr>
-              <a:t>-ed</a:t>
+              <a:t>-ing</a:t>
             </a:r>
             <a:endParaRPr lang="en-US" sz="1300" dirty="0"/>
           </a:p>
@@ -37869,20 +38181,20 @@
       </p:sp>
       <p:sp>
         <p:nvSpPr>
-          <p:cNvPr id="23" name="Shape 21"/>
-          <p:cNvSpPr/>
-          <p:nvPr/>
-        </p:nvSpPr>
-        <p:spPr>
-          <a:xfrm>
-            <a:off x="640080" y="2212848"/>
+          <p:cNvPr id="26" name="Shape 24"/>
+          <p:cNvSpPr/>
+          <p:nvPr/>
+        </p:nvSpPr>
+        <p:spPr>
+          <a:xfrm>
+            <a:off x="640080" y="2670048"/>
             <a:ext cx="1463040" cy="420624"/>
           </a:xfrm>
           <a:prstGeom prst="rect">
             <a:avLst/>
           </a:prstGeom>
           <a:solidFill>
-            <a:srgbClr val="DDD6FE"/>
+            <a:srgbClr val="F8FAFC"/>
           </a:solidFill>
           <a:ln w="12700">
             <a:solidFill>
@@ -37894,18 +38206,68 @@
       </p:sp>
       <p:sp>
         <p:nvSpPr>
-          <p:cNvPr id="24" name="Text 22"/>
-          <p:cNvSpPr/>
-          <p:nvPr/>
-        </p:nvSpPr>
-        <p:spPr>
-          <a:xfrm>
-            <a:off x="640080" y="2212848"/>
+          <p:cNvPr id="27" name="Shape 25"/>
+          <p:cNvSpPr/>
+          <p:nvPr/>
+        </p:nvSpPr>
+        <p:spPr>
+          <a:xfrm>
+            <a:off x="3291840" y="2670048"/>
+            <a:ext cx="1645920" cy="420624"/>
+          </a:xfrm>
+          <a:prstGeom prst="rect">
+            <a:avLst/>
+          </a:prstGeom>
+          <a:solidFill>
+            <a:srgbClr val="F8FAFC"/>
+          </a:solidFill>
+          <a:ln w="12700">
+            <a:solidFill>
+              <a:srgbClr val="E5E7EB"/>
+            </a:solidFill>
+            <a:prstDash val="solid"/>
+          </a:ln>
+        </p:spPr>
+      </p:sp>
+      <p:sp>
+        <p:nvSpPr>
+          <p:cNvPr id="28" name="Shape 26"/>
+          <p:cNvSpPr/>
+          <p:nvPr/>
+        </p:nvSpPr>
+        <p:spPr>
+          <a:xfrm>
+            <a:off x="5943600" y="2670048"/>
             <a:ext cx="1463040" cy="420624"/>
           </a:xfrm>
           <a:prstGeom prst="rect">
             <a:avLst/>
           </a:prstGeom>
+          <a:solidFill>
+            <a:srgbClr val="FCE7F3"/>
+          </a:solidFill>
+          <a:ln w="12700">
+            <a:solidFill>
+              <a:srgbClr val="E5E7EB"/>
+            </a:solidFill>
+            <a:prstDash val="solid"/>
+          </a:ln>
+        </p:spPr>
+      </p:sp>
+      <p:sp>
+        <p:nvSpPr>
+          <p:cNvPr id="29" name="Text 27"/>
+          <p:cNvSpPr/>
+          <p:nvPr/>
+        </p:nvSpPr>
+        <p:spPr>
+          <a:xfrm>
+            <a:off x="5943600" y="2670048"/>
+            <a:ext cx="1463040" cy="420624"/>
+          </a:xfrm>
+          <a:prstGeom prst="rect">
+            <a:avLst/>
+          </a:prstGeom>
           <a:noFill/>
           <a:ln/>
         </p:spPr>
@@ -37919,13 +38281,13 @@
             <a:r>
               <a:rPr lang="en-US" sz="1300" b="1" dirty="0">
                 <a:solidFill>
-                  <a:srgbClr val="4C1D95"/>
+                  <a:srgbClr val="9D174D"/>
                 </a:solidFill>
                 <a:latin typeface="Trebuchet MS" pitchFamily="34" charset="0"/>
                 <a:ea typeface="Trebuchet MS" pitchFamily="34" charset="-122"/>
                 <a:cs typeface="Trebuchet MS" pitchFamily="34" charset="-120"/>
               </a:rPr>
-              <a:t>bl-</a:t>
+              <a:t>-less</a:t>
             </a:r>
             <a:endParaRPr lang="en-US" sz="1300" dirty="0"/>
           </a:p>
@@ -37933,13 +38295,38 @@
       </p:sp>
       <p:sp>
         <p:nvSpPr>
-          <p:cNvPr id="25" name="Shape 23"/>
-          <p:cNvSpPr/>
-          <p:nvPr/>
-        </p:nvSpPr>
-        <p:spPr>
-          <a:xfrm>
-            <a:off x="3291840" y="2212848"/>
+          <p:cNvPr id="30" name="Shape 28"/>
+          <p:cNvSpPr/>
+          <p:nvPr/>
+        </p:nvSpPr>
+        <p:spPr>
+          <a:xfrm>
+            <a:off x="640080" y="3127248"/>
+            <a:ext cx="1463040" cy="420624"/>
+          </a:xfrm>
+          <a:prstGeom prst="rect">
+            <a:avLst/>
+          </a:prstGeom>
+          <a:solidFill>
+            <a:srgbClr val="F1F5F9"/>
+          </a:solidFill>
+          <a:ln w="12700">
+            <a:solidFill>
+              <a:srgbClr val="E5E7EB"/>
+            </a:solidFill>
+            <a:prstDash val="solid"/>
+          </a:ln>
+        </p:spPr>
+      </p:sp>
+      <p:sp>
+        <p:nvSpPr>
+          <p:cNvPr id="31" name="Shape 29"/>
+          <p:cNvSpPr/>
+          <p:nvPr/>
+        </p:nvSpPr>
+        <p:spPr>
+          <a:xfrm>
+            <a:off x="3291840" y="3127248"/>
             <a:ext cx="1645920" cy="420624"/>
           </a:xfrm>
           <a:prstGeom prst="rect">
@@ -37958,13 +38345,13 @@
       </p:sp>
       <p:sp>
         <p:nvSpPr>
-          <p:cNvPr id="26" name="Shape 24"/>
-          <p:cNvSpPr/>
-          <p:nvPr/>
-        </p:nvSpPr>
-        <p:spPr>
-          <a:xfrm>
-            <a:off x="5943600" y="2212848"/>
+          <p:cNvPr id="32" name="Shape 30"/>
+          <p:cNvSpPr/>
+          <p:nvPr/>
+        </p:nvSpPr>
+        <p:spPr>
+          <a:xfrm>
+            <a:off x="5943600" y="3127248"/>
             <a:ext cx="1463040" cy="420624"/>
           </a:xfrm>
           <a:prstGeom prst="rect">
@@ -37983,13 +38370,13 @@
       </p:sp>
       <p:sp>
         <p:nvSpPr>
-          <p:cNvPr id="27" name="Text 25"/>
-          <p:cNvSpPr/>
-          <p:nvPr/>
-        </p:nvSpPr>
-        <p:spPr>
-          <a:xfrm>
-            <a:off x="5943600" y="2212848"/>
+          <p:cNvPr id="33" name="Text 31"/>
+          <p:cNvSpPr/>
+          <p:nvPr/>
+        </p:nvSpPr>
+        <p:spPr>
+          <a:xfrm>
+            <a:off x="5943600" y="3127248"/>
             <a:ext cx="1463040" cy="420624"/>
           </a:xfrm>
           <a:prstGeom prst="rect">
@@ -38014,7 +38401,7 @@
                 <a:ea typeface="Trebuchet MS" pitchFamily="34" charset="-122"/>
                 <a:cs typeface="Trebuchet MS" pitchFamily="34" charset="-120"/>
               </a:rPr>
-              <a:t>-ing</a:t>
+              <a:t>-s</a:t>
             </a:r>
             <a:endParaRPr lang="en-US" sz="1300" dirty="0"/>
           </a:p>
@@ -38022,20 +38409,20 @@
       </p:sp>
       <p:sp>
         <p:nvSpPr>
-          <p:cNvPr id="28" name="Shape 26"/>
-          <p:cNvSpPr/>
-          <p:nvPr/>
-        </p:nvSpPr>
-        <p:spPr>
-          <a:xfrm>
-            <a:off x="640080" y="2670048"/>
+          <p:cNvPr id="34" name="Shape 32"/>
+          <p:cNvSpPr/>
+          <p:nvPr/>
+        </p:nvSpPr>
+        <p:spPr>
+          <a:xfrm>
+            <a:off x="640080" y="3584448"/>
             <a:ext cx="1463040" cy="420624"/>
           </a:xfrm>
           <a:prstGeom prst="rect">
             <a:avLst/>
           </a:prstGeom>
           <a:solidFill>
-            <a:srgbClr val="DDD6FE"/>
+            <a:srgbClr val="F8FAFC"/>
           </a:solidFill>
           <a:ln w="12700">
             <a:solidFill>
@@ -38047,18 +38434,68 @@
       </p:sp>
       <p:sp>
         <p:nvSpPr>
-          <p:cNvPr id="29" name="Text 27"/>
-          <p:cNvSpPr/>
-          <p:nvPr/>
-        </p:nvSpPr>
-        <p:spPr>
-          <a:xfrm>
-            <a:off x="640080" y="2670048"/>
+          <p:cNvPr id="35" name="Shape 33"/>
+          <p:cNvSpPr/>
+          <p:nvPr/>
+        </p:nvSpPr>
+        <p:spPr>
+          <a:xfrm>
+            <a:off x="3291840" y="3584448"/>
+            <a:ext cx="1645920" cy="420624"/>
+          </a:xfrm>
+          <a:prstGeom prst="rect">
+            <a:avLst/>
+          </a:prstGeom>
+          <a:solidFill>
+            <a:srgbClr val="F8FAFC"/>
+          </a:solidFill>
+          <a:ln w="12700">
+            <a:solidFill>
+              <a:srgbClr val="E5E7EB"/>
+            </a:solidFill>
+            <a:prstDash val="solid"/>
+          </a:ln>
+        </p:spPr>
+      </p:sp>
+      <p:sp>
+        <p:nvSpPr>
+          <p:cNvPr id="36" name="Shape 34"/>
+          <p:cNvSpPr/>
+          <p:nvPr/>
+        </p:nvSpPr>
+        <p:spPr>
+          <a:xfrm>
+            <a:off x="5943600" y="3584448"/>
             <a:ext cx="1463040" cy="420624"/>
           </a:xfrm>
           <a:prstGeom prst="rect">
             <a:avLst/>
           </a:prstGeom>
+          <a:solidFill>
+            <a:srgbClr val="FCE7F3"/>
+          </a:solidFill>
+          <a:ln w="12700">
+            <a:solidFill>
+              <a:srgbClr val="E5E7EB"/>
+            </a:solidFill>
+            <a:prstDash val="solid"/>
+          </a:ln>
+        </p:spPr>
+      </p:sp>
+      <p:sp>
+        <p:nvSpPr>
+          <p:cNvPr id="37" name="Text 35"/>
+          <p:cNvSpPr/>
+          <p:nvPr/>
+        </p:nvSpPr>
+        <p:spPr>
+          <a:xfrm>
+            <a:off x="5943600" y="3584448"/>
+            <a:ext cx="1463040" cy="420624"/>
+          </a:xfrm>
+          <a:prstGeom prst="rect">
+            <a:avLst/>
+          </a:prstGeom>
           <a:noFill/>
           <a:ln/>
         </p:spPr>
@@ -38072,13 +38509,13 @@
             <a:r>
               <a:rPr lang="en-US" sz="1300" b="1" dirty="0">
                 <a:solidFill>
-                  <a:srgbClr val="4C1D95"/>
+                  <a:srgbClr val="9D174D"/>
                 </a:solidFill>
                 <a:latin typeface="Trebuchet MS" pitchFamily="34" charset="0"/>
                 <a:ea typeface="Trebuchet MS" pitchFamily="34" charset="-122"/>
                 <a:cs typeface="Trebuchet MS" pitchFamily="34" charset="-120"/>
               </a:rPr>
-              <a:t>d-</a:t>
+              <a:t>-ure</a:t>
             </a:r>
             <a:endParaRPr lang="en-US" sz="1300" dirty="0"/>
           </a:p>
@@ -38086,402 +38523,7 @@
       </p:sp>
       <p:sp>
         <p:nvSpPr>
-          <p:cNvPr id="30" name="Shape 28"/>
-          <p:cNvSpPr/>
-          <p:nvPr/>
-        </p:nvSpPr>
-        <p:spPr>
-          <a:xfrm>
-            <a:off x="3291840" y="2670048"/>
-            <a:ext cx="1645920" cy="420624"/>
-          </a:xfrm>
-          <a:prstGeom prst="rect">
-            <a:avLst/>
-          </a:prstGeom>
-          <a:solidFill>
-            <a:srgbClr val="F8FAFC"/>
-          </a:solidFill>
-          <a:ln w="12700">
-            <a:solidFill>
-              <a:srgbClr val="E5E7EB"/>
-            </a:solidFill>
-            <a:prstDash val="solid"/>
-          </a:ln>
-        </p:spPr>
-      </p:sp>
-      <p:sp>
-        <p:nvSpPr>
-          <p:cNvPr id="31" name="Shape 29"/>
-          <p:cNvSpPr/>
-          <p:nvPr/>
-        </p:nvSpPr>
-        <p:spPr>
-          <a:xfrm>
-            <a:off x="5943600" y="2670048"/>
-            <a:ext cx="1463040" cy="420624"/>
-          </a:xfrm>
-          <a:prstGeom prst="rect">
-            <a:avLst/>
-          </a:prstGeom>
-          <a:solidFill>
-            <a:srgbClr val="FCE7F3"/>
-          </a:solidFill>
-          <a:ln w="12700">
-            <a:solidFill>
-              <a:srgbClr val="E5E7EB"/>
-            </a:solidFill>
-            <a:prstDash val="solid"/>
-          </a:ln>
-        </p:spPr>
-      </p:sp>
-      <p:sp>
-        <p:nvSpPr>
-          <p:cNvPr id="32" name="Text 30"/>
-          <p:cNvSpPr/>
-          <p:nvPr/>
-        </p:nvSpPr>
-        <p:spPr>
-          <a:xfrm>
-            <a:off x="5943600" y="2670048"/>
-            <a:ext cx="1463040" cy="420624"/>
-          </a:xfrm>
-          <a:prstGeom prst="rect">
-            <a:avLst/>
-          </a:prstGeom>
-          <a:noFill/>
-          <a:ln/>
-        </p:spPr>
-        <p:txBody>
-          <a:bodyPr wrap="square" lIns="0" tIns="0" rIns="0" bIns="0" rtlCol="0" anchor="ctr"/>
-          <a:lstStyle/>
-          <a:p>
-            <a:pPr algn="ctr" indent="0" marL="0">
-              <a:buNone/>
-            </a:pPr>
-            <a:r>
-              <a:rPr lang="en-US" sz="1300" b="1" dirty="0">
-                <a:solidFill>
-                  <a:srgbClr val="9D174D"/>
-                </a:solidFill>
-                <a:latin typeface="Trebuchet MS" pitchFamily="34" charset="0"/>
-                <a:ea typeface="Trebuchet MS" pitchFamily="34" charset="-122"/>
-                <a:cs typeface="Trebuchet MS" pitchFamily="34" charset="-120"/>
-              </a:rPr>
-              <a:t>-er</a:t>
-            </a:r>
-            <a:endParaRPr lang="en-US" sz="1300" dirty="0"/>
-          </a:p>
-        </p:txBody>
-      </p:sp>
-      <p:sp>
-        <p:nvSpPr>
-          <p:cNvPr id="33" name="Shape 31"/>
-          <p:cNvSpPr/>
-          <p:nvPr/>
-        </p:nvSpPr>
-        <p:spPr>
-          <a:xfrm>
-            <a:off x="640080" y="3127248"/>
-            <a:ext cx="1463040" cy="420624"/>
-          </a:xfrm>
-          <a:prstGeom prst="rect">
-            <a:avLst/>
-          </a:prstGeom>
-          <a:solidFill>
-            <a:srgbClr val="DDD6FE"/>
-          </a:solidFill>
-          <a:ln w="12700">
-            <a:solidFill>
-              <a:srgbClr val="E5E7EB"/>
-            </a:solidFill>
-            <a:prstDash val="solid"/>
-          </a:ln>
-        </p:spPr>
-      </p:sp>
-      <p:sp>
-        <p:nvSpPr>
-          <p:cNvPr id="34" name="Text 32"/>
-          <p:cNvSpPr/>
-          <p:nvPr/>
-        </p:nvSpPr>
-        <p:spPr>
-          <a:xfrm>
-            <a:off x="640080" y="3127248"/>
-            <a:ext cx="1463040" cy="420624"/>
-          </a:xfrm>
-          <a:prstGeom prst="rect">
-            <a:avLst/>
-          </a:prstGeom>
-          <a:noFill/>
-          <a:ln/>
-        </p:spPr>
-        <p:txBody>
-          <a:bodyPr wrap="square" lIns="0" tIns="0" rIns="0" bIns="0" rtlCol="0" anchor="ctr"/>
-          <a:lstStyle/>
-          <a:p>
-            <a:pPr algn="ctr" indent="0" marL="0">
-              <a:buNone/>
-            </a:pPr>
-            <a:r>
-              <a:rPr lang="en-US" sz="1300" b="1" dirty="0">
-                <a:solidFill>
-                  <a:srgbClr val="4C1D95"/>
-                </a:solidFill>
-                <a:latin typeface="Trebuchet MS" pitchFamily="34" charset="0"/>
-                <a:ea typeface="Trebuchet MS" pitchFamily="34" charset="-122"/>
-                <a:cs typeface="Trebuchet MS" pitchFamily="34" charset="-120"/>
-              </a:rPr>
-              <a:t>ext-</a:t>
-            </a:r>
-            <a:endParaRPr lang="en-US" sz="1300" dirty="0"/>
-          </a:p>
-        </p:txBody>
-      </p:sp>
-      <p:sp>
-        <p:nvSpPr>
-          <p:cNvPr id="35" name="Shape 33"/>
-          <p:cNvSpPr/>
-          <p:nvPr/>
-        </p:nvSpPr>
-        <p:spPr>
-          <a:xfrm>
-            <a:off x="3291840" y="3127248"/>
-            <a:ext cx="1645920" cy="420624"/>
-          </a:xfrm>
-          <a:prstGeom prst="rect">
-            <a:avLst/>
-          </a:prstGeom>
-          <a:solidFill>
-            <a:srgbClr val="F1F5F9"/>
-          </a:solidFill>
-          <a:ln w="12700">
-            <a:solidFill>
-              <a:srgbClr val="E5E7EB"/>
-            </a:solidFill>
-            <a:prstDash val="solid"/>
-          </a:ln>
-        </p:spPr>
-      </p:sp>
-      <p:sp>
-        <p:nvSpPr>
-          <p:cNvPr id="36" name="Shape 34"/>
-          <p:cNvSpPr/>
-          <p:nvPr/>
-        </p:nvSpPr>
-        <p:spPr>
-          <a:xfrm>
-            <a:off x="5943600" y="3127248"/>
-            <a:ext cx="1463040" cy="420624"/>
-          </a:xfrm>
-          <a:prstGeom prst="rect">
-            <a:avLst/>
-          </a:prstGeom>
-          <a:solidFill>
-            <a:srgbClr val="FCE7F3"/>
-          </a:solidFill>
-          <a:ln w="12700">
-            <a:solidFill>
-              <a:srgbClr val="E5E7EB"/>
-            </a:solidFill>
-            <a:prstDash val="solid"/>
-          </a:ln>
-        </p:spPr>
-      </p:sp>
-      <p:sp>
-        <p:nvSpPr>
-          <p:cNvPr id="37" name="Text 35"/>
-          <p:cNvSpPr/>
-          <p:nvPr/>
-        </p:nvSpPr>
-        <p:spPr>
-          <a:xfrm>
-            <a:off x="5943600" y="3127248"/>
-            <a:ext cx="1463040" cy="420624"/>
-          </a:xfrm>
-          <a:prstGeom prst="rect">
-            <a:avLst/>
-          </a:prstGeom>
-          <a:noFill/>
-          <a:ln/>
-        </p:spPr>
-        <p:txBody>
-          <a:bodyPr wrap="square" lIns="0" tIns="0" rIns="0" bIns="0" rtlCol="0" anchor="ctr"/>
-          <a:lstStyle/>
-          <a:p>
-            <a:pPr algn="ctr" indent="0" marL="0">
-              <a:buNone/>
-            </a:pPr>
-            <a:r>
-              <a:rPr lang="en-US" sz="1300" b="1" dirty="0">
-                <a:solidFill>
-                  <a:srgbClr val="9D174D"/>
-                </a:solidFill>
-                <a:latin typeface="Trebuchet MS" pitchFamily="34" charset="0"/>
-                <a:ea typeface="Trebuchet MS" pitchFamily="34" charset="-122"/>
-                <a:cs typeface="Trebuchet MS" pitchFamily="34" charset="-120"/>
-              </a:rPr>
-              <a:t>-less</a:t>
-            </a:r>
-            <a:endParaRPr lang="en-US" sz="1300" dirty="0"/>
-          </a:p>
-        </p:txBody>
-      </p:sp>
-      <p:sp>
-        <p:nvSpPr>
-          <p:cNvPr id="38" name="Shape 36"/>
-          <p:cNvSpPr/>
-          <p:nvPr/>
-        </p:nvSpPr>
-        <p:spPr>
-          <a:xfrm>
-            <a:off x="640080" y="3584448"/>
-            <a:ext cx="1463040" cy="420624"/>
-          </a:xfrm>
-          <a:prstGeom prst="rect">
-            <a:avLst/>
-          </a:prstGeom>
-          <a:solidFill>
-            <a:srgbClr val="DDD6FE"/>
-          </a:solidFill>
-          <a:ln w="12700">
-            <a:solidFill>
-              <a:srgbClr val="E5E7EB"/>
-            </a:solidFill>
-            <a:prstDash val="solid"/>
-          </a:ln>
-        </p:spPr>
-      </p:sp>
-      <p:sp>
-        <p:nvSpPr>
-          <p:cNvPr id="39" name="Text 37"/>
-          <p:cNvSpPr/>
-          <p:nvPr/>
-        </p:nvSpPr>
-        <p:spPr>
-          <a:xfrm>
-            <a:off x="640080" y="3584448"/>
-            <a:ext cx="1463040" cy="420624"/>
-          </a:xfrm>
-          <a:prstGeom prst="rect">
-            <a:avLst/>
-          </a:prstGeom>
-          <a:noFill/>
-          <a:ln/>
-        </p:spPr>
-        <p:txBody>
-          <a:bodyPr wrap="square" lIns="0" tIns="0" rIns="0" bIns="0" rtlCol="0" anchor="ctr"/>
-          <a:lstStyle/>
-          <a:p>
-            <a:pPr algn="ctr" indent="0" marL="0">
-              <a:buNone/>
-            </a:pPr>
-            <a:r>
-              <a:rPr lang="en-US" sz="1300" b="1" dirty="0">
-                <a:solidFill>
-                  <a:srgbClr val="4C1D95"/>
-                </a:solidFill>
-                <a:latin typeface="Trebuchet MS" pitchFamily="34" charset="0"/>
-                <a:ea typeface="Trebuchet MS" pitchFamily="34" charset="-122"/>
-                <a:cs typeface="Trebuchet MS" pitchFamily="34" charset="-120"/>
-              </a:rPr>
-              <a:t>sp-</a:t>
-            </a:r>
-            <a:endParaRPr lang="en-US" sz="1300" dirty="0"/>
-          </a:p>
-        </p:txBody>
-      </p:sp>
-      <p:sp>
-        <p:nvSpPr>
-          <p:cNvPr id="40" name="Shape 38"/>
-          <p:cNvSpPr/>
-          <p:nvPr/>
-        </p:nvSpPr>
-        <p:spPr>
-          <a:xfrm>
-            <a:off x="3291840" y="3584448"/>
-            <a:ext cx="1645920" cy="420624"/>
-          </a:xfrm>
-          <a:prstGeom prst="rect">
-            <a:avLst/>
-          </a:prstGeom>
-          <a:solidFill>
-            <a:srgbClr val="F8FAFC"/>
-          </a:solidFill>
-          <a:ln w="12700">
-            <a:solidFill>
-              <a:srgbClr val="E5E7EB"/>
-            </a:solidFill>
-            <a:prstDash val="solid"/>
-          </a:ln>
-        </p:spPr>
-      </p:sp>
-      <p:sp>
-        <p:nvSpPr>
-          <p:cNvPr id="41" name="Shape 39"/>
-          <p:cNvSpPr/>
-          <p:nvPr/>
-        </p:nvSpPr>
-        <p:spPr>
-          <a:xfrm>
-            <a:off x="5943600" y="3584448"/>
-            <a:ext cx="1463040" cy="420624"/>
-          </a:xfrm>
-          <a:prstGeom prst="rect">
-            <a:avLst/>
-          </a:prstGeom>
-          <a:solidFill>
-            <a:srgbClr val="FCE7F3"/>
-          </a:solidFill>
-          <a:ln w="12700">
-            <a:solidFill>
-              <a:srgbClr val="E5E7EB"/>
-            </a:solidFill>
-            <a:prstDash val="solid"/>
-          </a:ln>
-        </p:spPr>
-      </p:sp>
-      <p:sp>
-        <p:nvSpPr>
-          <p:cNvPr id="42" name="Text 40"/>
-          <p:cNvSpPr/>
-          <p:nvPr/>
-        </p:nvSpPr>
-        <p:spPr>
-          <a:xfrm>
-            <a:off x="5943600" y="3584448"/>
-            <a:ext cx="1463040" cy="420624"/>
-          </a:xfrm>
-          <a:prstGeom prst="rect">
-            <a:avLst/>
-          </a:prstGeom>
-          <a:noFill/>
-          <a:ln/>
-        </p:spPr>
-        <p:txBody>
-          <a:bodyPr wrap="square" lIns="0" tIns="0" rIns="0" bIns="0" rtlCol="0" anchor="ctr"/>
-          <a:lstStyle/>
-          <a:p>
-            <a:pPr algn="ctr" indent="0" marL="0">
-              <a:buNone/>
-            </a:pPr>
-            <a:r>
-              <a:rPr lang="en-US" sz="1300" b="1" dirty="0">
-                <a:solidFill>
-                  <a:srgbClr val="9D174D"/>
-                </a:solidFill>
-                <a:latin typeface="Trebuchet MS" pitchFamily="34" charset="0"/>
-                <a:ea typeface="Trebuchet MS" pitchFamily="34" charset="-122"/>
-                <a:cs typeface="Trebuchet MS" pitchFamily="34" charset="-120"/>
-              </a:rPr>
-              <a:t>-ure</a:t>
-            </a:r>
-            <a:endParaRPr lang="en-US" sz="1300" dirty="0"/>
-          </a:p>
-        </p:txBody>
-      </p:sp>
-      <p:sp>
-        <p:nvSpPr>
-          <p:cNvPr id="43" name="Text 41"/>
+          <p:cNvPr id="38" name="Text 36"/>
           <p:cNvSpPr/>
           <p:nvPr/>
         </p:nvSpPr>
@@ -38520,14 +38562,14 @@
       </p:sp>
       <p:sp>
         <p:nvSpPr>
-          <p:cNvPr id="44" name="Shape 42"/>
+          <p:cNvPr id="39" name="Shape 37"/>
           <p:cNvSpPr/>
           <p:nvPr/>
         </p:nvSpPr>
         <p:spPr>
           <a:xfrm>
             <a:off x="1508760" y="4178808"/>
-            <a:ext cx="822960" cy="420624"/>
+            <a:ext cx="1097280" cy="420624"/>
           </a:xfrm>
           <a:prstGeom prst="rect">
             <a:avLst>
@@ -38535,11 +38577,11 @@
             </a:avLst>
           </a:prstGeom>
           <a:solidFill>
-            <a:srgbClr val="DDD6FE"/>
+            <a:srgbClr val="CCFBF1"/>
           </a:solidFill>
           <a:ln w="19050">
             <a:solidFill>
-              <a:srgbClr val="7C3AED"/>
+              <a:srgbClr val="0D9488"/>
             </a:solidFill>
             <a:prstDash val="solid"/>
           </a:ln>
@@ -38554,14 +38596,14 @@
       </p:sp>
       <p:sp>
         <p:nvSpPr>
-          <p:cNvPr id="45" name="Text 43"/>
+          <p:cNvPr id="40" name="Text 38"/>
           <p:cNvSpPr/>
           <p:nvPr/>
         </p:nvSpPr>
         <p:spPr>
           <a:xfrm>
             <a:off x="1508760" y="4178808"/>
-            <a:ext cx="822960" cy="420624"/>
+            <a:ext cx="1097280" cy="420624"/>
           </a:xfrm>
           <a:prstGeom prst="rect">
             <a:avLst/>
@@ -38579,13 +38621,13 @@
             <a:r>
               <a:rPr lang="en-US" sz="1300" b="1" dirty="0">
                 <a:solidFill>
-                  <a:srgbClr val="4C1D95"/>
+                  <a:srgbClr val="0F766E"/>
                 </a:solidFill>
                 <a:latin typeface="Trebuchet MS" pitchFamily="34" charset="0"/>
                 <a:ea typeface="Trebuchet MS" pitchFamily="34" charset="-122"/>
                 <a:cs typeface="Trebuchet MS" pitchFamily="34" charset="-120"/>
               </a:rPr>
-              <a:t>ap-</a:t>
+              <a:t>'end'</a:t>
             </a:r>
             <a:endParaRPr lang="en-US" sz="1300" dirty="0"/>
           </a:p>
@@ -38593,13 +38635,13 @@
       </p:sp>
       <p:sp>
         <p:nvSpPr>
-          <p:cNvPr id="46" name="Text 44"/>
-          <p:cNvSpPr/>
-          <p:nvPr/>
-        </p:nvSpPr>
-        <p:spPr>
-          <a:xfrm>
-            <a:off x="2359152" y="4178808"/>
+          <p:cNvPr id="41" name="Text 39"/>
+          <p:cNvSpPr/>
+          <p:nvPr/>
+        </p:nvSpPr>
+        <p:spPr>
+          <a:xfrm>
+            <a:off x="2633472" y="4178808"/>
             <a:ext cx="320040" cy="420624"/>
           </a:xfrm>
           <a:prstGeom prst="rect">
@@ -38632,14 +38674,14 @@
       </p:sp>
       <p:sp>
         <p:nvSpPr>
-          <p:cNvPr id="47" name="Shape 45"/>
-          <p:cNvSpPr/>
-          <p:nvPr/>
-        </p:nvSpPr>
-        <p:spPr>
-          <a:xfrm>
-            <a:off x="2706624" y="4178808"/>
-            <a:ext cx="1097280" cy="420624"/>
+          <p:cNvPr id="42" name="Shape 40"/>
+          <p:cNvSpPr/>
+          <p:nvPr/>
+        </p:nvSpPr>
+        <p:spPr>
+          <a:xfrm>
+            <a:off x="2980944" y="4178808"/>
+            <a:ext cx="822960" cy="420624"/>
           </a:xfrm>
           <a:prstGeom prst="rect">
             <a:avLst>
@@ -38647,11 +38689,11 @@
             </a:avLst>
           </a:prstGeom>
           <a:solidFill>
-            <a:srgbClr val="CCFBF1"/>
+            <a:srgbClr val="FCE7F3"/>
           </a:solidFill>
           <a:ln w="19050">
             <a:solidFill>
-              <a:srgbClr val="0D9488"/>
+              <a:srgbClr val="DB2777"/>
             </a:solidFill>
             <a:prstDash val="solid"/>
           </a:ln>
@@ -38666,14 +38708,14 @@
       </p:sp>
       <p:sp>
         <p:nvSpPr>
-          <p:cNvPr id="48" name="Text 46"/>
-          <p:cNvSpPr/>
-          <p:nvPr/>
-        </p:nvSpPr>
-        <p:spPr>
-          <a:xfrm>
-            <a:off x="2706624" y="4178808"/>
-            <a:ext cx="1097280" cy="420624"/>
+          <p:cNvPr id="43" name="Text 41"/>
+          <p:cNvSpPr/>
+          <p:nvPr/>
+        </p:nvSpPr>
+        <p:spPr>
+          <a:xfrm>
+            <a:off x="2980944" y="4178808"/>
+            <a:ext cx="822960" cy="420624"/>
           </a:xfrm>
           <a:prstGeom prst="rect">
             <a:avLst/>
@@ -38691,13 +38733,13 @@
             <a:r>
               <a:rPr lang="en-US" sz="1300" b="1" dirty="0">
                 <a:solidFill>
-                  <a:srgbClr val="0F766E"/>
+                  <a:srgbClr val="9D174D"/>
                 </a:solidFill>
                 <a:latin typeface="Trebuchet MS" pitchFamily="34" charset="0"/>
                 <a:ea typeface="Trebuchet MS" pitchFamily="34" charset="-122"/>
                 <a:cs typeface="Trebuchet MS" pitchFamily="34" charset="-120"/>
               </a:rPr>
-              <a:t>'end'</a:t>
+              <a:t>-ed</a:t>
             </a:r>
             <a:endParaRPr lang="en-US" sz="1300" dirty="0"/>
           </a:p>
@@ -38705,14 +38747,14 @@
       </p:sp>
       <p:sp>
         <p:nvSpPr>
-          <p:cNvPr id="49" name="Text 47"/>
-          <p:cNvSpPr/>
-          <p:nvPr/>
-        </p:nvSpPr>
-        <p:spPr>
-          <a:xfrm>
-            <a:off x="3831336" y="4178808"/>
-            <a:ext cx="320040" cy="420624"/>
+          <p:cNvPr id="44" name="Text 42"/>
+          <p:cNvSpPr/>
+          <p:nvPr/>
+        </p:nvSpPr>
+        <p:spPr>
+          <a:xfrm>
+            <a:off x="3877056" y="4178808"/>
+            <a:ext cx="365760" cy="420624"/>
           </a:xfrm>
           <a:prstGeom prst="rect">
             <a:avLst/>
@@ -38728,30 +38770,30 @@
               <a:buNone/>
             </a:pPr>
             <a:r>
-              <a:rPr lang="en-US" sz="1400" dirty="0">
-                <a:solidFill>
-                  <a:srgbClr val="475569"/>
+              <a:rPr lang="en-US" sz="1800" b="1" dirty="0">
+                <a:solidFill>
+                  <a:srgbClr val="0D9488"/>
                 </a:solidFill>
                 <a:latin typeface="Trebuchet MS" pitchFamily="34" charset="0"/>
                 <a:ea typeface="Trebuchet MS" pitchFamily="34" charset="-122"/>
                 <a:cs typeface="Trebuchet MS" pitchFamily="34" charset="-120"/>
               </a:rPr>
-              <a:t>+</a:t>
-            </a:r>
-            <a:endParaRPr lang="en-US" sz="1400" dirty="0"/>
-          </a:p>
-        </p:txBody>
-      </p:sp>
-      <p:sp>
-        <p:nvSpPr>
-          <p:cNvPr id="50" name="Shape 48"/>
-          <p:cNvSpPr/>
-          <p:nvPr/>
-        </p:nvSpPr>
-        <p:spPr>
-          <a:xfrm>
-            <a:off x="4178808" y="4178808"/>
-            <a:ext cx="822960" cy="420624"/>
+              <a:t>=</a:t>
+            </a:r>
+            <a:endParaRPr lang="en-US" sz="1800" dirty="0"/>
+          </a:p>
+        </p:txBody>
+      </p:sp>
+      <p:sp>
+        <p:nvSpPr>
+          <p:cNvPr id="45" name="Shape 43"/>
+          <p:cNvSpPr/>
+          <p:nvPr/>
+        </p:nvSpPr>
+        <p:spPr>
+          <a:xfrm>
+            <a:off x="4288536" y="4178808"/>
+            <a:ext cx="2194560" cy="420624"/>
           </a:xfrm>
           <a:prstGeom prst="rect">
             <a:avLst>
@@ -38759,33 +38801,26 @@
             </a:avLst>
           </a:prstGeom>
           <a:solidFill>
-            <a:srgbClr val="FCE7F3"/>
-          </a:solidFill>
-          <a:ln w="19050">
-            <a:solidFill>
-              <a:srgbClr val="DB2777"/>
-            </a:solidFill>
-            <a:prstDash val="solid"/>
-          </a:ln>
-          <a:effectLst>
-            <a:outerShdw sx="100000" sy="100000" kx="0" ky="0" algn="bl" rotWithShape="0" blurRad="101600" dist="38100" dir="8100000">
-              <a:srgbClr val="000000">
-                <a:alpha val="12000"/>
-              </a:srgbClr>
-            </a:outerShdw>
-          </a:effectLst>
-        </p:spPr>
-      </p:sp>
-      <p:sp>
-        <p:nvSpPr>
-          <p:cNvPr id="51" name="Text 49"/>
-          <p:cNvSpPr/>
-          <p:nvPr/>
-        </p:nvSpPr>
-        <p:spPr>
-          <a:xfrm>
-            <a:off x="4178808" y="4178808"/>
-            <a:ext cx="822960" cy="420624"/>
+            <a:srgbClr val="0D9488"/>
+          </a:solidFill>
+          <a:ln w="12700">
+            <a:solidFill>
+              <a:srgbClr val="0D9488"/>
+            </a:solidFill>
+            <a:prstDash val="solid"/>
+          </a:ln>
+        </p:spPr>
+      </p:sp>
+      <p:sp>
+        <p:nvSpPr>
+          <p:cNvPr id="46" name="Text 44"/>
+          <p:cNvSpPr/>
+          <p:nvPr/>
+        </p:nvSpPr>
+        <p:spPr>
+          <a:xfrm>
+            <a:off x="4288536" y="4178808"/>
+            <a:ext cx="2194560" cy="420624"/>
           </a:xfrm>
           <a:prstGeom prst="rect">
             <a:avLst/>
@@ -38801,120 +38836,15 @@
               <a:buNone/>
             </a:pPr>
             <a:r>
-              <a:rPr lang="en-US" sz="1300" b="1" dirty="0">
-                <a:solidFill>
-                  <a:srgbClr val="9D174D"/>
+              <a:rPr lang="en-US" sz="1400" b="1" dirty="0">
+                <a:solidFill>
+                  <a:srgbClr val="FFFFFF"/>
                 </a:solidFill>
                 <a:latin typeface="Trebuchet MS" pitchFamily="34" charset="0"/>
                 <a:ea typeface="Trebuchet MS" pitchFamily="34" charset="-122"/>
                 <a:cs typeface="Trebuchet MS" pitchFamily="34" charset="-120"/>
               </a:rPr>
-              <a:t>-ed</a:t>
-            </a:r>
-            <a:endParaRPr lang="en-US" sz="1300" dirty="0"/>
-          </a:p>
-        </p:txBody>
-      </p:sp>
-      <p:sp>
-        <p:nvSpPr>
-          <p:cNvPr id="52" name="Text 50"/>
-          <p:cNvSpPr/>
-          <p:nvPr/>
-        </p:nvSpPr>
-        <p:spPr>
-          <a:xfrm>
-            <a:off x="5074920" y="4178808"/>
-            <a:ext cx="365760" cy="420624"/>
-          </a:xfrm>
-          <a:prstGeom prst="rect">
-            <a:avLst/>
-          </a:prstGeom>
-          <a:noFill/>
-          <a:ln/>
-        </p:spPr>
-        <p:txBody>
-          <a:bodyPr wrap="square" lIns="0" tIns="0" rIns="0" bIns="0" rtlCol="0" anchor="ctr"/>
-          <a:lstStyle/>
-          <a:p>
-            <a:pPr algn="ctr" indent="0" marL="0">
-              <a:buNone/>
-            </a:pPr>
-            <a:r>
-              <a:rPr lang="en-US" sz="1800" b="1" dirty="0">
-                <a:solidFill>
-                  <a:srgbClr val="0D9488"/>
-                </a:solidFill>
-                <a:latin typeface="Trebuchet MS" pitchFamily="34" charset="0"/>
-                <a:ea typeface="Trebuchet MS" pitchFamily="34" charset="-122"/>
-                <a:cs typeface="Trebuchet MS" pitchFamily="34" charset="-120"/>
-              </a:rPr>
-              <a:t>=</a:t>
-            </a:r>
-            <a:endParaRPr lang="en-US" sz="1800" dirty="0"/>
-          </a:p>
-        </p:txBody>
-      </p:sp>
-      <p:sp>
-        <p:nvSpPr>
-          <p:cNvPr id="53" name="Shape 51"/>
-          <p:cNvSpPr/>
-          <p:nvPr/>
-        </p:nvSpPr>
-        <p:spPr>
-          <a:xfrm>
-            <a:off x="5486400" y="4178808"/>
-            <a:ext cx="2194560" cy="420624"/>
-          </a:xfrm>
-          <a:prstGeom prst="rect">
-            <a:avLst>
-              <a:gd name="adj" fmla="val 17391"/>
-            </a:avLst>
-          </a:prstGeom>
-          <a:solidFill>
-            <a:srgbClr val="0D9488"/>
-          </a:solidFill>
-          <a:ln w="12700">
-            <a:solidFill>
-              <a:srgbClr val="0D9488"/>
-            </a:solidFill>
-            <a:prstDash val="solid"/>
-          </a:ln>
-        </p:spPr>
-      </p:sp>
-      <p:sp>
-        <p:nvSpPr>
-          <p:cNvPr id="54" name="Text 52"/>
-          <p:cNvSpPr/>
-          <p:nvPr/>
-        </p:nvSpPr>
-        <p:spPr>
-          <a:xfrm>
-            <a:off x="5486400" y="4178808"/>
-            <a:ext cx="2194560" cy="420624"/>
-          </a:xfrm>
-          <a:prstGeom prst="rect">
-            <a:avLst/>
-          </a:prstGeom>
-          <a:noFill/>
-          <a:ln/>
-        </p:spPr>
-        <p:txBody>
-          <a:bodyPr wrap="square" lIns="0" tIns="0" rIns="0" bIns="0" rtlCol="0" anchor="ctr"/>
-          <a:lstStyle/>
-          <a:p>
-            <a:pPr algn="ctr" indent="0" marL="0">
-              <a:buNone/>
-            </a:pPr>
-            <a:r>
-              <a:rPr lang="en-US" sz="1400" b="1" dirty="0">
-                <a:solidFill>
-                  <a:srgbClr val="FFFFFF"/>
-                </a:solidFill>
-                <a:latin typeface="Trebuchet MS" pitchFamily="34" charset="0"/>
-                <a:ea typeface="Trebuchet MS" pitchFamily="34" charset="-122"/>
-                <a:cs typeface="Trebuchet MS" pitchFamily="34" charset="-120"/>
-              </a:rPr>
-              <a:t>ending</a:t>
+              <a:t>end</a:t>
             </a:r>
             <a:endParaRPr lang="en-US" sz="1400" dirty="0"/>
           </a:p>
@@ -39206,7 +39136,7 @@
                 <a:ea typeface="Calibri" pitchFamily="34" charset="-122"/>
                 <a:cs typeface="Calibri" pitchFamily="34" charset="-120"/>
               </a:rPr>
-              <a:t>Word Labs  •  wordlabs.app  •  Root: 'end' = to finish, stop, or limit</a:t>
+              <a:t>Word Labs  •  wordlabs.app  •  Root: 'end' = to finish; the final part</a:t>
             </a:r>
             <a:endParaRPr lang="en-US" sz="800" dirty="0"/>
           </a:p>
@@ -39318,7 +39248,7 @@
                 <a:ea typeface="Trebuchet MS" pitchFamily="34" charset="-122"/>
                 <a:cs typeface="Trebuchet MS" pitchFamily="34" charset="-120"/>
               </a:rPr>
-              <a:t>ending</a:t>
+              <a:t>end</a:t>
             </a:r>
             <a:endParaRPr lang="en-US" sz="1200" dirty="0"/>
           </a:p>
@@ -39384,7 +39314,7 @@
                 <a:ea typeface="Calibri" pitchFamily="34" charset="-122"/>
                 <a:cs typeface="Calibri" pitchFamily="34" charset="-120"/>
               </a:rPr>
-              <a:t>To make something longer or stretch it out further.</a:t>
+              <a:t>finished or came to a close (past tense)</a:t>
             </a:r>
             <a:endParaRPr lang="en-US" sz="1200" dirty="0"/>
           </a:p>
@@ -39457,7 +39387,7 @@
                 <a:ea typeface="Trebuchet MS" pitchFamily="34" charset="-122"/>
                 <a:cs typeface="Trebuchet MS" pitchFamily="34" charset="-120"/>
               </a:rPr>
-              <a:t>endless</a:t>
+              <a:t>ends</a:t>
             </a:r>
             <a:endParaRPr lang="en-US" sz="1200" dirty="0"/>
           </a:p>
@@ -39523,7 +39453,7 @@
                 <a:ea typeface="Calibri" pitchFamily="34" charset="-122"/>
                 <a:cs typeface="Calibri" pitchFamily="34" charset="-120"/>
               </a:rPr>
-              <a:t>The final part of something, like the ending of a story.</a:t>
+              <a:t>the last part of something</a:t>
             </a:r>
             <a:endParaRPr lang="en-US" sz="1200" dirty="0"/>
           </a:p>
@@ -39596,7 +39526,7 @@
                 <a:ea typeface="Trebuchet MS" pitchFamily="34" charset="-122"/>
                 <a:cs typeface="Trebuchet MS" pitchFamily="34" charset="-120"/>
               </a:rPr>
-              <a:t>defend</a:t>
+              <a:t>ended</a:t>
             </a:r>
             <a:endParaRPr lang="en-US" sz="1200" dirty="0"/>
           </a:p>
@@ -39662,563 +39592,7 @@
                 <a:ea typeface="Calibri" pitchFamily="34" charset="-122"/>
                 <a:cs typeface="Calibri" pitchFamily="34" charset="-120"/>
               </a:rPr>
-              <a:t>To use money to buy something, or to use time doing something.</a:t>
-            </a:r>
-            <a:endParaRPr lang="en-US" sz="1200" dirty="0"/>
-          </a:p>
-        </p:txBody>
-      </p:sp>
-      <p:sp>
-        <p:nvSpPr>
-          <p:cNvPr id="23" name="Shape 21"/>
-          <p:cNvSpPr/>
-          <p:nvPr/>
-        </p:nvSpPr>
-        <p:spPr>
-          <a:xfrm>
-            <a:off x="365760" y="2779776"/>
-            <a:ext cx="2011680" cy="457200"/>
-          </a:xfrm>
-          <a:prstGeom prst="rect">
-            <a:avLst>
-              <a:gd name="adj" fmla="val 12000"/>
-            </a:avLst>
-          </a:prstGeom>
-          <a:solidFill>
-            <a:srgbClr val="EEF2FF"/>
-          </a:solidFill>
-          <a:ln w="12700">
-            <a:solidFill>
-              <a:srgbClr val="6366F1"/>
-            </a:solidFill>
-            <a:prstDash val="solid"/>
-          </a:ln>
-          <a:effectLst>
-            <a:outerShdw sx="100000" sy="100000" kx="0" ky="0" algn="bl" rotWithShape="0" blurRad="101600" dist="38100" dir="8100000">
-              <a:srgbClr val="000000">
-                <a:alpha val="12000"/>
-              </a:srgbClr>
-            </a:outerShdw>
-          </a:effectLst>
-        </p:spPr>
-      </p:sp>
-      <p:sp>
-        <p:nvSpPr>
-          <p:cNvPr id="24" name="Text 22"/>
-          <p:cNvSpPr/>
-          <p:nvPr/>
-        </p:nvSpPr>
-        <p:spPr>
-          <a:xfrm>
-            <a:off x="365760" y="2779776"/>
-            <a:ext cx="2011680" cy="457200"/>
-          </a:xfrm>
-          <a:prstGeom prst="rect">
-            <a:avLst/>
-          </a:prstGeom>
-          <a:noFill/>
-          <a:ln/>
-        </p:spPr>
-        <p:txBody>
-          <a:bodyPr wrap="square" lIns="0" tIns="0" rIns="0" bIns="0" rtlCol="0" anchor="ctr"/>
-          <a:lstStyle/>
-          <a:p>
-            <a:pPr algn="ctr" indent="0" marL="0">
-              <a:buNone/>
-            </a:pPr>
-            <a:r>
-              <a:rPr lang="en-US" sz="1200" b="1" dirty="0">
-                <a:solidFill>
-                  <a:srgbClr val="4338CA"/>
-                </a:solidFill>
-                <a:latin typeface="Trebuchet MS" pitchFamily="34" charset="0"/>
-                <a:ea typeface="Trebuchet MS" pitchFamily="34" charset="-122"/>
-                <a:cs typeface="Trebuchet MS" pitchFamily="34" charset="-120"/>
-              </a:rPr>
-              <a:t>extend</a:t>
-            </a:r>
-            <a:endParaRPr lang="en-US" sz="1200" dirty="0"/>
-          </a:p>
-        </p:txBody>
-      </p:sp>
-      <p:sp>
-        <p:nvSpPr>
-          <p:cNvPr id="25" name="Shape 23"/>
-          <p:cNvSpPr/>
-          <p:nvPr/>
-        </p:nvSpPr>
-        <p:spPr>
-          <a:xfrm>
-            <a:off x="2514600" y="2779776"/>
-            <a:ext cx="6263640" cy="457200"/>
-          </a:xfrm>
-          <a:prstGeom prst="rect">
-            <a:avLst>
-              <a:gd name="adj" fmla="val 12000"/>
-            </a:avLst>
-          </a:prstGeom>
-          <a:solidFill>
-            <a:srgbClr val="F8FAFC"/>
-          </a:solidFill>
-          <a:ln w="12700">
-            <a:solidFill>
-              <a:srgbClr val="E2E8F0"/>
-            </a:solidFill>
-            <a:prstDash val="solid"/>
-          </a:ln>
-        </p:spPr>
-      </p:sp>
-      <p:sp>
-        <p:nvSpPr>
-          <p:cNvPr id="26" name="Text 24"/>
-          <p:cNvSpPr/>
-          <p:nvPr/>
-        </p:nvSpPr>
-        <p:spPr>
-          <a:xfrm>
-            <a:off x="2651760" y="2779776"/>
-            <a:ext cx="6035040" cy="457200"/>
-          </a:xfrm>
-          <a:prstGeom prst="rect">
-            <a:avLst/>
-          </a:prstGeom>
-          <a:noFill/>
-          <a:ln/>
-        </p:spPr>
-        <p:txBody>
-          <a:bodyPr wrap="square" rtlCol="0" anchor="ctr"/>
-          <a:lstStyle/>
-          <a:p>
-            <a:pPr algn="l" indent="0" marL="0">
-              <a:buNone/>
-            </a:pPr>
-            <a:r>
-              <a:rPr lang="en-US" sz="1200" dirty="0">
-                <a:solidFill>
-                  <a:srgbClr val="0F172A"/>
-                </a:solidFill>
-                <a:latin typeface="Calibri" pitchFamily="34" charset="0"/>
-                <a:ea typeface="Calibri" pitchFamily="34" charset="-122"/>
-                <a:cs typeface="Calibri" pitchFamily="34" charset="-120"/>
-              </a:rPr>
-              <a:t>To protect someone or something from danger or attack.</a:t>
-            </a:r>
-            <a:endParaRPr lang="en-US" sz="1200" dirty="0"/>
-          </a:p>
-        </p:txBody>
-      </p:sp>
-      <p:sp>
-        <p:nvSpPr>
-          <p:cNvPr id="27" name="Shape 25"/>
-          <p:cNvSpPr/>
-          <p:nvPr/>
-        </p:nvSpPr>
-        <p:spPr>
-          <a:xfrm>
-            <a:off x="365760" y="3310128"/>
-            <a:ext cx="2011680" cy="457200"/>
-          </a:xfrm>
-          <a:prstGeom prst="rect">
-            <a:avLst>
-              <a:gd name="adj" fmla="val 12000"/>
-            </a:avLst>
-          </a:prstGeom>
-          <a:solidFill>
-            <a:srgbClr val="EEF2FF"/>
-          </a:solidFill>
-          <a:ln w="12700">
-            <a:solidFill>
-              <a:srgbClr val="6366F1"/>
-            </a:solidFill>
-            <a:prstDash val="solid"/>
-          </a:ln>
-          <a:effectLst>
-            <a:outerShdw sx="100000" sy="100000" kx="0" ky="0" algn="bl" rotWithShape="0" blurRad="101600" dist="38100" dir="8100000">
-              <a:srgbClr val="000000">
-                <a:alpha val="12000"/>
-              </a:srgbClr>
-            </a:outerShdw>
-          </a:effectLst>
-        </p:spPr>
-      </p:sp>
-      <p:sp>
-        <p:nvSpPr>
-          <p:cNvPr id="28" name="Text 26"/>
-          <p:cNvSpPr/>
-          <p:nvPr/>
-        </p:nvSpPr>
-        <p:spPr>
-          <a:xfrm>
-            <a:off x="365760" y="3310128"/>
-            <a:ext cx="2011680" cy="457200"/>
-          </a:xfrm>
-          <a:prstGeom prst="rect">
-            <a:avLst/>
-          </a:prstGeom>
-          <a:noFill/>
-          <a:ln/>
-        </p:spPr>
-        <p:txBody>
-          <a:bodyPr wrap="square" lIns="0" tIns="0" rIns="0" bIns="0" rtlCol="0" anchor="ctr"/>
-          <a:lstStyle/>
-          <a:p>
-            <a:pPr algn="ctr" indent="0" marL="0">
-              <a:buNone/>
-            </a:pPr>
-            <a:r>
-              <a:rPr lang="en-US" sz="1200" b="1" dirty="0">
-                <a:solidFill>
-                  <a:srgbClr val="4338CA"/>
-                </a:solidFill>
-                <a:latin typeface="Trebuchet MS" pitchFamily="34" charset="0"/>
-                <a:ea typeface="Trebuchet MS" pitchFamily="34" charset="-122"/>
-                <a:cs typeface="Trebuchet MS" pitchFamily="34" charset="-120"/>
-              </a:rPr>
-              <a:t>blend</a:t>
-            </a:r>
-            <a:endParaRPr lang="en-US" sz="1200" dirty="0"/>
-          </a:p>
-        </p:txBody>
-      </p:sp>
-      <p:sp>
-        <p:nvSpPr>
-          <p:cNvPr id="29" name="Shape 27"/>
-          <p:cNvSpPr/>
-          <p:nvPr/>
-        </p:nvSpPr>
-        <p:spPr>
-          <a:xfrm>
-            <a:off x="2514600" y="3310128"/>
-            <a:ext cx="6263640" cy="457200"/>
-          </a:xfrm>
-          <a:prstGeom prst="rect">
-            <a:avLst>
-              <a:gd name="adj" fmla="val 12000"/>
-            </a:avLst>
-          </a:prstGeom>
-          <a:solidFill>
-            <a:srgbClr val="F8FAFC"/>
-          </a:solidFill>
-          <a:ln w="12700">
-            <a:solidFill>
-              <a:srgbClr val="E2E8F0"/>
-            </a:solidFill>
-            <a:prstDash val="solid"/>
-          </a:ln>
-        </p:spPr>
-      </p:sp>
-      <p:sp>
-        <p:nvSpPr>
-          <p:cNvPr id="30" name="Text 28"/>
-          <p:cNvSpPr/>
-          <p:nvPr/>
-        </p:nvSpPr>
-        <p:spPr>
-          <a:xfrm>
-            <a:off x="2651760" y="3310128"/>
-            <a:ext cx="6035040" cy="457200"/>
-          </a:xfrm>
-          <a:prstGeom prst="rect">
-            <a:avLst/>
-          </a:prstGeom>
-          <a:noFill/>
-          <a:ln/>
-        </p:spPr>
-        <p:txBody>
-          <a:bodyPr wrap="square" rtlCol="0" anchor="ctr"/>
-          <a:lstStyle/>
-          <a:p>
-            <a:pPr algn="l" indent="0" marL="0">
-              <a:buNone/>
-            </a:pPr>
-            <a:r>
-              <a:rPr lang="en-US" sz="1200" dirty="0">
-                <a:solidFill>
-                  <a:srgbClr val="0F172A"/>
-                </a:solidFill>
-                <a:latin typeface="Calibri" pitchFamily="34" charset="0"/>
-                <a:ea typeface="Calibri" pitchFamily="34" charset="-122"/>
-                <a:cs typeface="Calibri" pitchFamily="34" charset="-120"/>
-              </a:rPr>
-              <a:t>A curved cover over a car or bike wheel that stops mud splashing.</a:t>
-            </a:r>
-            <a:endParaRPr lang="en-US" sz="1200" dirty="0"/>
-          </a:p>
-        </p:txBody>
-      </p:sp>
-      <p:sp>
-        <p:nvSpPr>
-          <p:cNvPr id="31" name="Shape 29"/>
-          <p:cNvSpPr/>
-          <p:nvPr/>
-        </p:nvSpPr>
-        <p:spPr>
-          <a:xfrm>
-            <a:off x="365760" y="3840480"/>
-            <a:ext cx="2011680" cy="457200"/>
-          </a:xfrm>
-          <a:prstGeom prst="rect">
-            <a:avLst>
-              <a:gd name="adj" fmla="val 12000"/>
-            </a:avLst>
-          </a:prstGeom>
-          <a:solidFill>
-            <a:srgbClr val="EEF2FF"/>
-          </a:solidFill>
-          <a:ln w="12700">
-            <a:solidFill>
-              <a:srgbClr val="6366F1"/>
-            </a:solidFill>
-            <a:prstDash val="solid"/>
-          </a:ln>
-          <a:effectLst>
-            <a:outerShdw sx="100000" sy="100000" kx="0" ky="0" algn="bl" rotWithShape="0" blurRad="101600" dist="38100" dir="8100000">
-              <a:srgbClr val="000000">
-                <a:alpha val="12000"/>
-              </a:srgbClr>
-            </a:outerShdw>
-          </a:effectLst>
-        </p:spPr>
-      </p:sp>
-      <p:sp>
-        <p:nvSpPr>
-          <p:cNvPr id="32" name="Text 30"/>
-          <p:cNvSpPr/>
-          <p:nvPr/>
-        </p:nvSpPr>
-        <p:spPr>
-          <a:xfrm>
-            <a:off x="365760" y="3840480"/>
-            <a:ext cx="2011680" cy="457200"/>
-          </a:xfrm>
-          <a:prstGeom prst="rect">
-            <a:avLst/>
-          </a:prstGeom>
-          <a:noFill/>
-          <a:ln/>
-        </p:spPr>
-        <p:txBody>
-          <a:bodyPr wrap="square" lIns="0" tIns="0" rIns="0" bIns="0" rtlCol="0" anchor="ctr"/>
-          <a:lstStyle/>
-          <a:p>
-            <a:pPr algn="ctr" indent="0" marL="0">
-              <a:buNone/>
-            </a:pPr>
-            <a:r>
-              <a:rPr lang="en-US" sz="1200" b="1" dirty="0">
-                <a:solidFill>
-                  <a:srgbClr val="4338CA"/>
-                </a:solidFill>
-                <a:latin typeface="Trebuchet MS" pitchFamily="34" charset="0"/>
-                <a:ea typeface="Trebuchet MS" pitchFamily="34" charset="-122"/>
-                <a:cs typeface="Trebuchet MS" pitchFamily="34" charset="-120"/>
-              </a:rPr>
-              <a:t>fender</a:t>
-            </a:r>
-            <a:endParaRPr lang="en-US" sz="1200" dirty="0"/>
-          </a:p>
-        </p:txBody>
-      </p:sp>
-      <p:sp>
-        <p:nvSpPr>
-          <p:cNvPr id="33" name="Shape 31"/>
-          <p:cNvSpPr/>
-          <p:nvPr/>
-        </p:nvSpPr>
-        <p:spPr>
-          <a:xfrm>
-            <a:off x="2514600" y="3840480"/>
-            <a:ext cx="6263640" cy="457200"/>
-          </a:xfrm>
-          <a:prstGeom prst="rect">
-            <a:avLst>
-              <a:gd name="adj" fmla="val 12000"/>
-            </a:avLst>
-          </a:prstGeom>
-          <a:solidFill>
-            <a:srgbClr val="F8FAFC"/>
-          </a:solidFill>
-          <a:ln w="12700">
-            <a:solidFill>
-              <a:srgbClr val="E2E8F0"/>
-            </a:solidFill>
-            <a:prstDash val="solid"/>
-          </a:ln>
-        </p:spPr>
-      </p:sp>
-      <p:sp>
-        <p:nvSpPr>
-          <p:cNvPr id="34" name="Text 32"/>
-          <p:cNvSpPr/>
-          <p:nvPr/>
-        </p:nvSpPr>
-        <p:spPr>
-          <a:xfrm>
-            <a:off x="2651760" y="3840480"/>
-            <a:ext cx="6035040" cy="457200"/>
-          </a:xfrm>
-          <a:prstGeom prst="rect">
-            <a:avLst/>
-          </a:prstGeom>
-          <a:noFill/>
-          <a:ln/>
-        </p:spPr>
-        <p:txBody>
-          <a:bodyPr wrap="square" rtlCol="0" anchor="ctr"/>
-          <a:lstStyle/>
-          <a:p>
-            <a:pPr algn="l" indent="0" marL="0">
-              <a:buNone/>
-            </a:pPr>
-            <a:r>
-              <a:rPr lang="en-US" sz="1200" dirty="0">
-                <a:solidFill>
-                  <a:srgbClr val="0F172A"/>
-                </a:solidFill>
-                <a:latin typeface="Calibri" pitchFamily="34" charset="0"/>
-                <a:ea typeface="Calibri" pitchFamily="34" charset="-122"/>
-                <a:cs typeface="Calibri" pitchFamily="34" charset="-120"/>
-              </a:rPr>
-              <a:t>To mix things together smoothly so they become one.</a:t>
-            </a:r>
-            <a:endParaRPr lang="en-US" sz="1200" dirty="0"/>
-          </a:p>
-        </p:txBody>
-      </p:sp>
-      <p:sp>
-        <p:nvSpPr>
-          <p:cNvPr id="35" name="Shape 33"/>
-          <p:cNvSpPr/>
-          <p:nvPr/>
-        </p:nvSpPr>
-        <p:spPr>
-          <a:xfrm>
-            <a:off x="365760" y="4370832"/>
-            <a:ext cx="2011680" cy="457200"/>
-          </a:xfrm>
-          <a:prstGeom prst="rect">
-            <a:avLst>
-              <a:gd name="adj" fmla="val 12000"/>
-            </a:avLst>
-          </a:prstGeom>
-          <a:solidFill>
-            <a:srgbClr val="EEF2FF"/>
-          </a:solidFill>
-          <a:ln w="12700">
-            <a:solidFill>
-              <a:srgbClr val="6366F1"/>
-            </a:solidFill>
-            <a:prstDash val="solid"/>
-          </a:ln>
-          <a:effectLst>
-            <a:outerShdw sx="100000" sy="100000" kx="0" ky="0" algn="bl" rotWithShape="0" blurRad="101600" dist="38100" dir="8100000">
-              <a:srgbClr val="000000">
-                <a:alpha val="12000"/>
-              </a:srgbClr>
-            </a:outerShdw>
-          </a:effectLst>
-        </p:spPr>
-      </p:sp>
-      <p:sp>
-        <p:nvSpPr>
-          <p:cNvPr id="36" name="Text 34"/>
-          <p:cNvSpPr/>
-          <p:nvPr/>
-        </p:nvSpPr>
-        <p:spPr>
-          <a:xfrm>
-            <a:off x="365760" y="4370832"/>
-            <a:ext cx="2011680" cy="457200"/>
-          </a:xfrm>
-          <a:prstGeom prst="rect">
-            <a:avLst/>
-          </a:prstGeom>
-          <a:noFill/>
-          <a:ln/>
-        </p:spPr>
-        <p:txBody>
-          <a:bodyPr wrap="square" lIns="0" tIns="0" rIns="0" bIns="0" rtlCol="0" anchor="ctr"/>
-          <a:lstStyle/>
-          <a:p>
-            <a:pPr algn="ctr" indent="0" marL="0">
-              <a:buNone/>
-            </a:pPr>
-            <a:r>
-              <a:rPr lang="en-US" sz="1200" b="1" dirty="0">
-                <a:solidFill>
-                  <a:srgbClr val="4338CA"/>
-                </a:solidFill>
-                <a:latin typeface="Trebuchet MS" pitchFamily="34" charset="0"/>
-                <a:ea typeface="Trebuchet MS" pitchFamily="34" charset="-122"/>
-                <a:cs typeface="Trebuchet MS" pitchFamily="34" charset="-120"/>
-              </a:rPr>
-              <a:t>spend</a:t>
-            </a:r>
-            <a:endParaRPr lang="en-US" sz="1200" dirty="0"/>
-          </a:p>
-        </p:txBody>
-      </p:sp>
-      <p:sp>
-        <p:nvSpPr>
-          <p:cNvPr id="37" name="Shape 35"/>
-          <p:cNvSpPr/>
-          <p:nvPr/>
-        </p:nvSpPr>
-        <p:spPr>
-          <a:xfrm>
-            <a:off x="2514600" y="4370832"/>
-            <a:ext cx="6263640" cy="457200"/>
-          </a:xfrm>
-          <a:prstGeom prst="rect">
-            <a:avLst>
-              <a:gd name="adj" fmla="val 12000"/>
-            </a:avLst>
-          </a:prstGeom>
-          <a:solidFill>
-            <a:srgbClr val="F8FAFC"/>
-          </a:solidFill>
-          <a:ln w="12700">
-            <a:solidFill>
-              <a:srgbClr val="E2E8F0"/>
-            </a:solidFill>
-            <a:prstDash val="solid"/>
-          </a:ln>
-        </p:spPr>
-      </p:sp>
-      <p:sp>
-        <p:nvSpPr>
-          <p:cNvPr id="38" name="Text 36"/>
-          <p:cNvSpPr/>
-          <p:nvPr/>
-        </p:nvSpPr>
-        <p:spPr>
-          <a:xfrm>
-            <a:off x="2651760" y="4370832"/>
-            <a:ext cx="6035040" cy="457200"/>
-          </a:xfrm>
-          <a:prstGeom prst="rect">
-            <a:avLst/>
-          </a:prstGeom>
-          <a:noFill/>
-          <a:ln/>
-        </p:spPr>
-        <p:txBody>
-          <a:bodyPr wrap="square" rtlCol="0" anchor="ctr"/>
-          <a:lstStyle/>
-          <a:p>
-            <a:pPr algn="l" indent="0" marL="0">
-              <a:buNone/>
-            </a:pPr>
-            <a:r>
-              <a:rPr lang="en-US" sz="1200" dirty="0">
-                <a:solidFill>
-                  <a:srgbClr val="0F172A"/>
-                </a:solidFill>
-                <a:latin typeface="Calibri" pitchFamily="34" charset="0"/>
-                <a:ea typeface="Calibri" pitchFamily="34" charset="-122"/>
-                <a:cs typeface="Calibri" pitchFamily="34" charset="-120"/>
-              </a:rPr>
-              <a:t>Something that seems to go on forever with no stop.</a:t>
+              <a:t>finishes or comes to a stop</a:t>
             </a:r>
             <a:endParaRPr lang="en-US" sz="1200" dirty="0"/>
           </a:p>
@@ -40510,7 +39884,7 @@
                 <a:ea typeface="Calibri" pitchFamily="34" charset="-122"/>
                 <a:cs typeface="Calibri" pitchFamily="34" charset="-120"/>
               </a:rPr>
-              <a:t>Word Labs  •  wordlabs.app  •  Root: 'end' = to finish, stop, or limit</a:t>
+              <a:t>Word Labs  •  wordlabs.app  •  Root: 'end' = to finish; the final part</a:t>
             </a:r>
             <a:endParaRPr lang="en-US" sz="800" dirty="0"/>
           </a:p>
@@ -40713,7 +40087,7 @@
                 <a:ea typeface="Calibri" pitchFamily="34" charset="-122"/>
                 <a:cs typeface="Calibri" pitchFamily="34" charset="-120"/>
               </a:rPr>
-              <a:t>The teacher asked the students to extend their story by adding two more paragraphs.</a:t>
+              <a:t>We stayed until the end of the film.</a:t>
             </a:r>
             <a:endParaRPr lang="en-US" sz="1500" dirty="0"/>
           </a:p>
@@ -40877,7 +40251,7 @@
                 <a:ea typeface="Calibri" pitchFamily="34" charset="-122"/>
                 <a:cs typeface="Calibri" pitchFamily="34" charset="-120"/>
               </a:rPr>
-              <a:t>The endless rain during the holidays made it impossible to play outside.</a:t>
+              <a:t>The film ends with a surprising twist.</a:t>
             </a:r>
             <a:endParaRPr lang="en-US" sz="1500" dirty="0"/>
           </a:p>
@@ -41041,7 +40415,7 @@
                 <a:ea typeface="Calibri" pitchFamily="34" charset="-122"/>
                 <a:cs typeface="Calibri" pitchFamily="34" charset="-120"/>
               </a:rPr>
-              <a:t>We watched the exciting ending of the film together as a class.</a:t>
+              <a:t>The match ended in a draw.</a:t>
             </a:r>
             <a:endParaRPr lang="en-US" sz="1500" dirty="0"/>
           </a:p>
